--- a/docs/review-pack/AVA_Evaluation_Review_Slides.pptx
+++ b/docs/review-pack/AVA_Evaluation_Review_Slides.pptx
@@ -21,6 +21,10 @@
     <p:sldId id="269" r:id="rId21"/>
     <p:sldId id="270" r:id="rId22"/>
     <p:sldId id="271" r:id="rId23"/>
+    <p:sldId id="272" r:id="rId24"/>
+    <p:sldId id="273" r:id="rId25"/>
+    <p:sldId id="274" r:id="rId26"/>
+    <p:sldId id="275" r:id="rId27"/>
   </p:sldIdLst>
   <p:sldSz cx="12191695" cy="6858000" type="screen4x3"/>
   <p:notesSz cx="6858000" cy="9144000"/>
@@ -1032,6 +1036,216 @@
 </p:notes>
 </file>
 
+<file path=ppt/notesSlides/notesSlide17.xml><?xml version="1.0" encoding="utf-8"?>
+<p:notes xmlns:a="http://schemas.openxmlformats.org/drawingml/2006/main" xmlns:p="http://schemas.openxmlformats.org/presentationml/2006/main" xmlns:r="http://schemas.openxmlformats.org/officeDocument/2006/relationships">
+  <p:cSld>
+    <p:spTree>
+      <p:nvGrpSpPr>
+        <p:cNvPr id="1" name=""/>
+        <p:cNvGrpSpPr/>
+        <p:nvPr/>
+      </p:nvGrpSpPr>
+      <p:grpSpPr>
+        <a:xfrm>
+          <a:off x="0" y="0"/>
+          <a:ext cx="0" cy="0"/>
+          <a:chOff x="0" y="0"/>
+          <a:chExt cx="0" cy="0"/>
+        </a:xfrm>
+      </p:grpSpPr>
+      <p:sp>
+        <p:nvSpPr>
+          <p:cNvPr id="2" name="Slide Image Placeholder 1"/>
+          <p:cNvSpPr>
+            <a:spLocks noGrp="1"/>
+          </p:cNvSpPr>
+          <p:nvPr>
+            <p:ph type="sldImg" idx="2"/>
+          </p:nvPr>
+        </p:nvSpPr>
+        <p:spPr/>
+      </p:sp>
+      <p:sp>
+        <p:nvSpPr>
+          <p:cNvPr id="3" name="Notes Placeholder 2"/>
+          <p:cNvSpPr>
+            <a:spLocks noGrp="1"/>
+          </p:cNvSpPr>
+          <p:nvPr>
+            <p:ph type="body" idx="3" sz="quarter"/>
+          </p:nvPr>
+        </p:nvSpPr>
+        <p:spPr/>
+        <p:txBody>
+          <a:bodyPr/>
+          <a:lstStyle/>
+          <a:p>
+            <a:r>
+              <a:t>All six labels are exactly those supplied by Selvin and are hypothetical labels only. Do not infer actual products, model identities, capabilities, integrations, roles, reliability, or performance. The scenario is fabricated solely for explanation: each label independently emits a candidate write for the same declared key, service.demo-api.primary_db, with exactly-one cardinality and the same current release scope. Three assert PostgreSQL and three assert DynamoDB. This is not data or a system observation. The only point is to make same-key disagreement concrete. The relation classification applies to assertion pairs after the key and scope are fixed.</a:t>
+            </a:r>
+          </a:p>
+        </p:txBody>
+      </p:sp>
+      <p:sp>
+        <p:nvSpPr>
+          <p:cNvPr id="4" name="Slide Number Placeholder 3"/>
+          <p:cNvSpPr>
+            <a:spLocks noGrp="1"/>
+          </p:cNvSpPr>
+          <p:nvPr>
+            <p:ph type="sldNum" idx="5" sz="quarter"/>
+          </p:nvPr>
+        </p:nvSpPr>
+        <p:spPr/>
+      </p:sp>
+    </p:spTree>
+  </p:cSld>
+  <p:clrMapOvr>
+    <a:masterClrMapping/>
+  </p:clrMapOvr>
+</p:notes>
+</file>
+
+<file path=ppt/notesSlides/notesSlide18.xml><?xml version="1.0" encoding="utf-8"?>
+<p:notes xmlns:a="http://schemas.openxmlformats.org/drawingml/2006/main" xmlns:p="http://schemas.openxmlformats.org/presentationml/2006/main" xmlns:r="http://schemas.openxmlformats.org/officeDocument/2006/relationships">
+  <p:cSld>
+    <p:spTree>
+      <p:nvGrpSpPr>
+        <p:cNvPr id="1" name=""/>
+        <p:cNvGrpSpPr/>
+        <p:nvPr/>
+      </p:nvGrpSpPr>
+      <p:grpSpPr>
+        <a:xfrm>
+          <a:off x="0" y="0"/>
+          <a:ext cx="0" cy="0"/>
+          <a:chOff x="0" y="0"/>
+          <a:chExt cx="0" cy="0"/>
+        </a:xfrm>
+      </p:grpSpPr>
+      <p:sp>
+        <p:nvSpPr>
+          <p:cNvPr id="2" name="Slide Image Placeholder 1"/>
+          <p:cNvSpPr>
+            <a:spLocks noGrp="1"/>
+          </p:cNvSpPr>
+          <p:nvPr>
+            <p:ph type="sldImg" idx="2"/>
+          </p:nvPr>
+        </p:nvSpPr>
+        <p:spPr/>
+      </p:sp>
+      <p:sp>
+        <p:nvSpPr>
+          <p:cNvPr id="3" name="Notes Placeholder 2"/>
+          <p:cNvSpPr>
+            <a:spLocks noGrp="1"/>
+          </p:cNvSpPr>
+          <p:nvPr>
+            <p:ph type="body" idx="3" sz="quarter"/>
+          </p:nvPr>
+        </p:nvSpPr>
+        <p:spPr/>
+        <p:txBody>
+          <a:bodyPr/>
+          <a:lstStyle/>
+          <a:p>
+            <a:r>
+              <a:t>Walk left to right. Provenance says which hypothetical source made each candidate assertion. Relation asks whether assertions can coexist under the declared key and time scope. Policy action is a decision procedure; in this example it selects Verify, but that action is not a result. Because the scenario supplies no authoritative evidence source or outcome, the final projection remains UNRESOLVED and retains both values and provenance. Do not use vote counting or arrival order as truth. Turtle is a teaching analogy only, not a protocol model.</a:t>
+            </a:r>
+          </a:p>
+        </p:txBody>
+      </p:sp>
+      <p:sp>
+        <p:nvSpPr>
+          <p:cNvPr id="4" name="Slide Number Placeholder 3"/>
+          <p:cNvSpPr>
+            <a:spLocks noGrp="1"/>
+          </p:cNvSpPr>
+          <p:nvPr>
+            <p:ph type="sldNum" idx="5" sz="quarter"/>
+          </p:nvPr>
+        </p:nvSpPr>
+        <p:spPr/>
+      </p:sp>
+    </p:spTree>
+  </p:cSld>
+  <p:clrMapOvr>
+    <a:masterClrMapping/>
+  </p:clrMapOvr>
+</p:notes>
+</file>
+
+<file path=ppt/notesSlides/notesSlide19.xml><?xml version="1.0" encoding="utf-8"?>
+<p:notes xmlns:a="http://schemas.openxmlformats.org/drawingml/2006/main" xmlns:p="http://schemas.openxmlformats.org/presentationml/2006/main" xmlns:r="http://schemas.openxmlformats.org/officeDocument/2006/relationships">
+  <p:cSld>
+    <p:spTree>
+      <p:nvGrpSpPr>
+        <p:cNvPr id="1" name=""/>
+        <p:cNvGrpSpPr/>
+        <p:nvPr/>
+      </p:nvGrpSpPr>
+      <p:grpSpPr>
+        <a:xfrm>
+          <a:off x="0" y="0"/>
+          <a:ext cx="0" cy="0"/>
+          <a:chOff x="0" y="0"/>
+          <a:chExt cx="0" cy="0"/>
+        </a:xfrm>
+      </p:grpSpPr>
+      <p:sp>
+        <p:nvSpPr>
+          <p:cNvPr id="2" name="Slide Image Placeholder 1"/>
+          <p:cNvSpPr>
+            <a:spLocks noGrp="1"/>
+          </p:cNvSpPr>
+          <p:nvPr>
+            <p:ph type="sldImg" idx="2"/>
+          </p:nvPr>
+        </p:nvSpPr>
+        <p:spPr/>
+      </p:sp>
+      <p:sp>
+        <p:nvSpPr>
+          <p:cNvPr id="3" name="Notes Placeholder 2"/>
+          <p:cNvSpPr>
+            <a:spLocks noGrp="1"/>
+          </p:cNvSpPr>
+          <p:nvPr>
+            <p:ph type="body" idx="3" sz="quarter"/>
+          </p:nvPr>
+        </p:nvSpPr>
+        <p:spPr/>
+        <p:txBody>
+          <a:bodyPr/>
+          <a:lstStyle/>
+          <a:p>
+            <a:r>
+              <a:t>Use these points to invite useful feedback, not to claim design decisions are complete. Same-key identity and temporal scope must be explicit. Keep the data provenance, relation class, policy action and final output separate. Verify needs a bounded, auditable evidence source and deterministic rule if it participates in convergence claims. Compare methods on fixed inputs and separate classification quality from action utility. Safety and usefulness need distinct metrics. Scope can be staged: a small benchmark first, with distributed simulation only if the literature and design gates support it. Likely reviewer questions are on the slide; answer newest-wins is a baseline because arrival order is not truth; Verify is not a guarantee; no novelty conclusion has been established.</a:t>
+            </a:r>
+          </a:p>
+        </p:txBody>
+      </p:sp>
+      <p:sp>
+        <p:nvSpPr>
+          <p:cNvPr id="4" name="Slide Number Placeholder 3"/>
+          <p:cNvSpPr>
+            <a:spLocks noGrp="1"/>
+          </p:cNvSpPr>
+          <p:nvPr>
+            <p:ph type="sldNum" idx="5" sz="quarter"/>
+          </p:nvPr>
+        </p:nvSpPr>
+        <p:spPr/>
+      </p:sp>
+    </p:spTree>
+  </p:cSld>
+  <p:clrMapOvr>
+    <a:masterClrMapping/>
+  </p:clrMapOvr>
+</p:notes>
+</file>
+
 <file path=ppt/notesSlides/notesSlide2.xml><?xml version="1.0" encoding="utf-8"?>
 <p:notes xmlns:a="http://schemas.openxmlformats.org/drawingml/2006/main" xmlns:p="http://schemas.openxmlformats.org/presentationml/2006/main" xmlns:r="http://schemas.openxmlformats.org/officeDocument/2006/relationships">
   <p:cSld>
@@ -1078,6 +1292,76 @@
           <a:p>
             <a:r>
               <a:t>Walk through the eight provisional modules. Say explicitly that these titles are an explanatory sequence, not official college module names. The order moves from problem framing to evaluation and limits.</a:t>
+            </a:r>
+          </a:p>
+        </p:txBody>
+      </p:sp>
+      <p:sp>
+        <p:nvSpPr>
+          <p:cNvPr id="4" name="Slide Number Placeholder 3"/>
+          <p:cNvSpPr>
+            <a:spLocks noGrp="1"/>
+          </p:cNvSpPr>
+          <p:nvPr>
+            <p:ph type="sldNum" idx="5" sz="quarter"/>
+          </p:nvPr>
+        </p:nvSpPr>
+        <p:spPr/>
+      </p:sp>
+    </p:spTree>
+  </p:cSld>
+  <p:clrMapOvr>
+    <a:masterClrMapping/>
+  </p:clrMapOvr>
+</p:notes>
+</file>
+
+<file path=ppt/notesSlides/notesSlide20.xml><?xml version="1.0" encoding="utf-8"?>
+<p:notes xmlns:a="http://schemas.openxmlformats.org/drawingml/2006/main" xmlns:p="http://schemas.openxmlformats.org/presentationml/2006/main" xmlns:r="http://schemas.openxmlformats.org/officeDocument/2006/relationships">
+  <p:cSld>
+    <p:spTree>
+      <p:nvGrpSpPr>
+        <p:cNvPr id="1" name=""/>
+        <p:cNvGrpSpPr/>
+        <p:nvPr/>
+      </p:nvGrpSpPr>
+      <p:grpSpPr>
+        <a:xfrm>
+          <a:off x="0" y="0"/>
+          <a:ext cx="0" cy="0"/>
+          <a:chOff x="0" y="0"/>
+          <a:chExt cx="0" cy="0"/>
+        </a:xfrm>
+      </p:grpSpPr>
+      <p:sp>
+        <p:nvSpPr>
+          <p:cNvPr id="2" name="Slide Image Placeholder 1"/>
+          <p:cNvSpPr>
+            <a:spLocks noGrp="1"/>
+          </p:cNvSpPr>
+          <p:nvPr>
+            <p:ph type="sldImg" idx="2"/>
+          </p:nvPr>
+        </p:nvSpPr>
+        <p:spPr/>
+      </p:sp>
+      <p:sp>
+        <p:nvSpPr>
+          <p:cNvPr id="3" name="Notes Placeholder 2"/>
+          <p:cNvSpPr>
+            <a:spLocks noGrp="1"/>
+          </p:cNvSpPr>
+          <p:nvPr>
+            <p:ph type="body" idx="3" sz="quarter"/>
+          </p:nvPr>
+        </p:nvSpPr>
+        <p:spPr/>
+        <p:txBody>
+          <a:bodyPr/>
+          <a:lstStyle/>
+          <a:p>
+            <a:r>
+              <a:t>This is tailored to Monday 26 October 2026. The source context states review dates 24 and 26 October, but not a start time; do not invent one. The module headings remain provisional because no official KEC module list/template has been provided. Check the slide PDF on the actual device, bring the deck and PDF, and keep the report PDF handy. Rehearse the short opening and agent scenario. Do not describe the six labels as actual products or claim any agent capability. Make the literature gate and no-implementation status explicit. Ask the reviewer to confirm college format, expected next milestone, and any required changes.</a:t>
             </a:r>
           </a:p>
         </p:txBody>
@@ -12171,6 +12455,4018 @@
 </p:sld>
 </file>
 
+<file path=ppt/slides/slide17.xml><?xml version="1.0" encoding="utf-8"?>
+<p:sld xmlns:a="http://schemas.openxmlformats.org/drawingml/2006/main" xmlns:p="http://schemas.openxmlformats.org/presentationml/2006/main" xmlns:r="http://schemas.openxmlformats.org/officeDocument/2006/relationships">
+  <p:cSld>
+    <p:bg>
+      <p:bgPr>
+        <a:solidFill>
+          <a:srgbClr val="F7F3E9"/>
+        </a:solidFill>
+        <a:effectLst/>
+      </p:bgPr>
+    </p:bg>
+    <p:spTree>
+      <p:nvGrpSpPr>
+        <p:cNvPr id="1" name=""/>
+        <p:cNvGrpSpPr/>
+        <p:nvPr/>
+      </p:nvGrpSpPr>
+      <p:grpSpPr/>
+      <p:sp>
+        <p:nvSpPr>
+          <p:cNvPr id="2" name="TextBox 1"/>
+          <p:cNvSpPr txBox="1"/>
+          <p:nvPr/>
+        </p:nvSpPr>
+        <p:spPr>
+          <a:xfrm>
+            <a:off x="502920" y="219456"/>
+            <a:ext cx="11155680" cy="274320"/>
+          </a:xfrm>
+          <a:prstGeom prst="rect">
+            <a:avLst/>
+          </a:prstGeom>
+          <a:noFill/>
+        </p:spPr>
+        <p:txBody>
+          <a:bodyPr wrap="square" lIns="36576" rIns="36576" tIns="18288" bIns="18288">
+            <a:spAutoFit/>
+          </a:bodyPr>
+          <a:lstStyle/>
+          <a:p>
+            <a:pPr algn="l">
+              <a:defRPr sz="1200" b="1">
+                <a:solidFill>
+                  <a:srgbClr val="2F7775"/>
+                </a:solidFill>
+                <a:latin typeface="Aptos"/>
+              </a:defRPr>
+            </a:pPr>
+            <a:r>
+              <a:t>AVA EVALUATION • MONDAY REVIEW • PROVISIONAL PACK</a:t>
+            </a:r>
+          </a:p>
+        </p:txBody>
+      </p:sp>
+      <p:sp>
+        <p:nvSpPr>
+          <p:cNvPr id="3" name="TextBox 2"/>
+          <p:cNvSpPr txBox="1"/>
+          <p:nvPr/>
+        </p:nvSpPr>
+        <p:spPr>
+          <a:xfrm>
+            <a:off x="502920" y="603504"/>
+            <a:ext cx="11155680" cy="566928"/>
+          </a:xfrm>
+          <a:prstGeom prst="rect">
+            <a:avLst/>
+          </a:prstGeom>
+          <a:noFill/>
+        </p:spPr>
+        <p:txBody>
+          <a:bodyPr wrap="square" lIns="36576" rIns="36576" tIns="18288" bIns="18288">
+            <a:spAutoFit/>
+          </a:bodyPr>
+          <a:lstStyle/>
+          <a:p>
+            <a:pPr algn="l">
+              <a:defRPr sz="2700" b="1">
+                <a:solidFill>
+                  <a:srgbClr val="173E45"/>
+                </a:solidFill>
+                <a:latin typeface="Aptos"/>
+              </a:defRPr>
+            </a:pPr>
+            <a:r>
+              <a:t>A hypothetical AI-agent team shares one key</a:t>
+            </a:r>
+          </a:p>
+        </p:txBody>
+      </p:sp>
+      <p:sp>
+        <p:nvSpPr>
+          <p:cNvPr id="4" name="TextBox 3"/>
+          <p:cNvSpPr txBox="1"/>
+          <p:nvPr/>
+        </p:nvSpPr>
+        <p:spPr>
+          <a:xfrm>
+            <a:off x="530352" y="1197864"/>
+            <a:ext cx="10972800" cy="384048"/>
+          </a:xfrm>
+          <a:prstGeom prst="rect">
+            <a:avLst/>
+          </a:prstGeom>
+          <a:noFill/>
+        </p:spPr>
+        <p:txBody>
+          <a:bodyPr wrap="square" lIns="36576" rIns="36576" tIns="18288" bIns="18288">
+            <a:spAutoFit/>
+          </a:bodyPr>
+          <a:lstStyle/>
+          <a:p>
+            <a:pPr algn="l">
+              <a:defRPr sz="1400" b="0">
+                <a:solidFill>
+                  <a:srgbClr val="64777A"/>
+                </a:solidFill>
+                <a:latin typeface="Aptos"/>
+              </a:defRPr>
+            </a:pPr>
+            <a:r>
+              <a:t>The labels are illustrative only: no real identity, capabilities, integrations, roles or performance are implied.</a:t>
+            </a:r>
+          </a:p>
+        </p:txBody>
+      </p:sp>
+      <p:sp>
+        <p:nvSpPr>
+          <p:cNvPr id="5" name="Rectangle 4"/>
+          <p:cNvSpPr/>
+          <p:nvPr/>
+        </p:nvSpPr>
+        <p:spPr>
+          <a:xfrm>
+            <a:off x="502920" y="1088136"/>
+            <a:ext cx="11155680" cy="22860"/>
+          </a:xfrm>
+          <a:prstGeom prst="rect">
+            <a:avLst/>
+          </a:prstGeom>
+          <a:solidFill>
+            <a:srgbClr val="2F7775"/>
+          </a:solidFill>
+          <a:ln>
+            <a:noFill/>
+          </a:ln>
+        </p:spPr>
+        <p:style>
+          <a:lnRef idx="1">
+            <a:schemeClr val="accent1"/>
+          </a:lnRef>
+          <a:fillRef idx="3">
+            <a:schemeClr val="accent1"/>
+          </a:fillRef>
+          <a:effectRef idx="2">
+            <a:schemeClr val="accent1"/>
+          </a:effectRef>
+          <a:fontRef idx="minor">
+            <a:schemeClr val="lt1"/>
+          </a:fontRef>
+        </p:style>
+        <p:txBody>
+          <a:bodyPr rtlCol="0" anchor="ctr"/>
+          <a:lstStyle/>
+          <a:p>
+            <a:pPr algn="ctr"/>
+          </a:p>
+        </p:txBody>
+      </p:sp>
+      <p:sp>
+        <p:nvSpPr>
+          <p:cNvPr id="6" name="TextBox 5"/>
+          <p:cNvSpPr txBox="1"/>
+          <p:nvPr/>
+        </p:nvSpPr>
+        <p:spPr>
+          <a:xfrm>
+            <a:off x="530352" y="6492240"/>
+            <a:ext cx="9875520" cy="182880"/>
+          </a:xfrm>
+          <a:prstGeom prst="rect">
+            <a:avLst/>
+          </a:prstGeom>
+          <a:noFill/>
+        </p:spPr>
+        <p:txBody>
+          <a:bodyPr wrap="square" lIns="36576" rIns="36576" tIns="18288" bIns="18288">
+            <a:spAutoFit/>
+          </a:bodyPr>
+          <a:lstStyle/>
+          <a:p>
+            <a:pPr algn="l">
+              <a:defRPr sz="900" b="0">
+                <a:solidFill>
+                  <a:srgbClr val="64777A"/>
+                </a:solidFill>
+                <a:latin typeface="Aptos"/>
+              </a:defRPr>
+            </a:pPr>
+            <a:r>
+              <a:t>Review aid only • novelty unresolved • no implementation authorized</a:t>
+            </a:r>
+          </a:p>
+        </p:txBody>
+      </p:sp>
+      <p:sp>
+        <p:nvSpPr>
+          <p:cNvPr id="7" name="Rounded Rectangle 6"/>
+          <p:cNvSpPr/>
+          <p:nvPr/>
+        </p:nvSpPr>
+        <p:spPr>
+          <a:xfrm>
+            <a:off x="530352" y="1700784"/>
+            <a:ext cx="11064240" cy="749808"/>
+          </a:xfrm>
+          <a:prstGeom prst="roundRect">
+            <a:avLst/>
+          </a:prstGeom>
+          <a:solidFill>
+            <a:srgbClr val="FFFFFF"/>
+          </a:solidFill>
+          <a:ln w="19050">
+            <a:solidFill>
+              <a:srgbClr val="2F7775"/>
+            </a:solidFill>
+          </a:ln>
+        </p:spPr>
+        <p:style>
+          <a:lnRef idx="1">
+            <a:schemeClr val="accent1"/>
+          </a:lnRef>
+          <a:fillRef idx="3">
+            <a:schemeClr val="accent1"/>
+          </a:fillRef>
+          <a:effectRef idx="2">
+            <a:schemeClr val="accent1"/>
+          </a:effectRef>
+          <a:fontRef idx="minor">
+            <a:schemeClr val="lt1"/>
+          </a:fontRef>
+        </p:style>
+        <p:txBody>
+          <a:bodyPr rtlCol="0" anchor="ctr"/>
+          <a:lstStyle/>
+          <a:p>
+            <a:pPr algn="ctr"/>
+          </a:p>
+        </p:txBody>
+      </p:sp>
+      <p:sp>
+        <p:nvSpPr>
+          <p:cNvPr id="8" name="TextBox 7"/>
+          <p:cNvSpPr txBox="1"/>
+          <p:nvPr/>
+        </p:nvSpPr>
+        <p:spPr>
+          <a:xfrm>
+            <a:off x="749808" y="1810512"/>
+            <a:ext cx="5486400" cy="256032"/>
+          </a:xfrm>
+          <a:prstGeom prst="rect">
+            <a:avLst/>
+          </a:prstGeom>
+          <a:noFill/>
+        </p:spPr>
+        <p:txBody>
+          <a:bodyPr wrap="square" lIns="36576" rIns="36576" tIns="18288" bIns="18288">
+            <a:spAutoFit/>
+          </a:bodyPr>
+          <a:lstStyle/>
+          <a:p>
+            <a:pPr algn="l">
+              <a:defRPr sz="1800" b="1">
+                <a:solidFill>
+                  <a:srgbClr val="2F7775"/>
+                </a:solidFill>
+                <a:latin typeface="Aptos"/>
+              </a:defRPr>
+            </a:pPr>
+            <a:r>
+              <a:t>KEY  service.demo-api.primary_db</a:t>
+            </a:r>
+          </a:p>
+        </p:txBody>
+      </p:sp>
+      <p:sp>
+        <p:nvSpPr>
+          <p:cNvPr id="9" name="TextBox 8"/>
+          <p:cNvSpPr txBox="1"/>
+          <p:nvPr/>
+        </p:nvSpPr>
+        <p:spPr>
+          <a:xfrm>
+            <a:off x="749808" y="2112264"/>
+            <a:ext cx="10424160" cy="219456"/>
+          </a:xfrm>
+          <a:prstGeom prst="rect">
+            <a:avLst/>
+          </a:prstGeom>
+          <a:noFill/>
+        </p:spPr>
+        <p:txBody>
+          <a:bodyPr wrap="square" lIns="36576" rIns="36576" tIns="18288" bIns="18288">
+            <a:spAutoFit/>
+          </a:bodyPr>
+          <a:lstStyle/>
+          <a:p>
+            <a:pPr algn="l">
+              <a:defRPr sz="1200" b="0">
+                <a:solidFill>
+                  <a:srgbClr val="173E45"/>
+                </a:solidFill>
+                <a:latin typeface="Aptos"/>
+              </a:defRPr>
+            </a:pPr>
+            <a:r>
+              <a:t>Scope: demo-api • current release window • database enum • exactly one value</a:t>
+            </a:r>
+          </a:p>
+        </p:txBody>
+      </p:sp>
+      <p:sp>
+        <p:nvSpPr>
+          <p:cNvPr id="10" name="Rounded Rectangle 9"/>
+          <p:cNvSpPr/>
+          <p:nvPr/>
+        </p:nvSpPr>
+        <p:spPr>
+          <a:xfrm>
+            <a:off x="530352" y="2724912"/>
+            <a:ext cx="1719072" cy="1207008"/>
+          </a:xfrm>
+          <a:prstGeom prst="roundRect">
+            <a:avLst/>
+          </a:prstGeom>
+          <a:solidFill>
+            <a:srgbClr val="FFFFFF"/>
+          </a:solidFill>
+          <a:ln w="19050">
+            <a:solidFill>
+              <a:srgbClr val="2F7775"/>
+            </a:solidFill>
+          </a:ln>
+        </p:spPr>
+        <p:style>
+          <a:lnRef idx="1">
+            <a:schemeClr val="accent1"/>
+          </a:lnRef>
+          <a:fillRef idx="3">
+            <a:schemeClr val="accent1"/>
+          </a:fillRef>
+          <a:effectRef idx="2">
+            <a:schemeClr val="accent1"/>
+          </a:effectRef>
+          <a:fontRef idx="minor">
+            <a:schemeClr val="lt1"/>
+          </a:fontRef>
+        </p:style>
+        <p:txBody>
+          <a:bodyPr rtlCol="0" anchor="ctr"/>
+          <a:lstStyle/>
+          <a:p>
+            <a:pPr algn="ctr"/>
+          </a:p>
+        </p:txBody>
+      </p:sp>
+      <p:sp>
+        <p:nvSpPr>
+          <p:cNvPr id="11" name="Rounded Rectangle 10"/>
+          <p:cNvSpPr/>
+          <p:nvPr/>
+        </p:nvSpPr>
+        <p:spPr>
+          <a:xfrm>
+            <a:off x="530352" y="2724912"/>
+            <a:ext cx="1719072" cy="384048"/>
+          </a:xfrm>
+          <a:prstGeom prst="roundRect">
+            <a:avLst/>
+          </a:prstGeom>
+          <a:solidFill>
+            <a:srgbClr val="2F7775"/>
+          </a:solidFill>
+          <a:ln w="19050">
+            <a:solidFill>
+              <a:srgbClr val="2F7775"/>
+            </a:solidFill>
+          </a:ln>
+        </p:spPr>
+        <p:style>
+          <a:lnRef idx="1">
+            <a:schemeClr val="accent1"/>
+          </a:lnRef>
+          <a:fillRef idx="3">
+            <a:schemeClr val="accent1"/>
+          </a:fillRef>
+          <a:effectRef idx="2">
+            <a:schemeClr val="accent1"/>
+          </a:effectRef>
+          <a:fontRef idx="minor">
+            <a:schemeClr val="lt1"/>
+          </a:fontRef>
+        </p:style>
+        <p:txBody>
+          <a:bodyPr rtlCol="0" anchor="ctr"/>
+          <a:lstStyle/>
+          <a:p>
+            <a:pPr algn="ctr"/>
+          </a:p>
+        </p:txBody>
+      </p:sp>
+      <p:sp>
+        <p:nvSpPr>
+          <p:cNvPr id="12" name="TextBox 11"/>
+          <p:cNvSpPr txBox="1"/>
+          <p:nvPr/>
+        </p:nvSpPr>
+        <p:spPr>
+          <a:xfrm>
+            <a:off x="585215" y="2798064"/>
+            <a:ext cx="1609344" cy="228600"/>
+          </a:xfrm>
+          <a:prstGeom prst="rect">
+            <a:avLst/>
+          </a:prstGeom>
+          <a:noFill/>
+        </p:spPr>
+        <p:txBody>
+          <a:bodyPr wrap="square" lIns="36576" rIns="36576" tIns="18288" bIns="18288">
+            <a:spAutoFit/>
+          </a:bodyPr>
+          <a:lstStyle/>
+          <a:p>
+            <a:pPr algn="ctr">
+              <a:defRPr sz="1200" b="1">
+                <a:solidFill>
+                  <a:srgbClr val="FFFFFF"/>
+                </a:solidFill>
+                <a:latin typeface="Aptos"/>
+              </a:defRPr>
+            </a:pPr>
+            <a:r>
+              <a:t>Grok bot</a:t>
+            </a:r>
+          </a:p>
+        </p:txBody>
+      </p:sp>
+      <p:sp>
+        <p:nvSpPr>
+          <p:cNvPr id="13" name="TextBox 12"/>
+          <p:cNvSpPr txBox="1"/>
+          <p:nvPr/>
+        </p:nvSpPr>
+        <p:spPr>
+          <a:xfrm>
+            <a:off x="603503" y="3200400"/>
+            <a:ext cx="1572768" cy="201168"/>
+          </a:xfrm>
+          <a:prstGeom prst="rect">
+            <a:avLst/>
+          </a:prstGeom>
+          <a:noFill/>
+        </p:spPr>
+        <p:txBody>
+          <a:bodyPr wrap="square" lIns="36576" rIns="36576" tIns="18288" bIns="18288">
+            <a:spAutoFit/>
+          </a:bodyPr>
+          <a:lstStyle/>
+          <a:p>
+            <a:pPr algn="ctr">
+              <a:defRPr sz="1000" b="0">
+                <a:solidFill>
+                  <a:srgbClr val="64777A"/>
+                </a:solidFill>
+                <a:latin typeface="Aptos"/>
+              </a:defRPr>
+            </a:pPr>
+            <a:r>
+              <a:t>hypothetical write</a:t>
+            </a:r>
+          </a:p>
+        </p:txBody>
+      </p:sp>
+      <p:sp>
+        <p:nvSpPr>
+          <p:cNvPr id="14" name="TextBox 13"/>
+          <p:cNvSpPr txBox="1"/>
+          <p:nvPr/>
+        </p:nvSpPr>
+        <p:spPr>
+          <a:xfrm>
+            <a:off x="603503" y="3474720"/>
+            <a:ext cx="1572768" cy="265176"/>
+          </a:xfrm>
+          <a:prstGeom prst="rect">
+            <a:avLst/>
+          </a:prstGeom>
+          <a:noFill/>
+        </p:spPr>
+        <p:txBody>
+          <a:bodyPr wrap="square" lIns="36576" rIns="36576" tIns="18288" bIns="18288">
+            <a:spAutoFit/>
+          </a:bodyPr>
+          <a:lstStyle/>
+          <a:p>
+            <a:pPr algn="ctr">
+              <a:defRPr sz="1400" b="1">
+                <a:solidFill>
+                  <a:srgbClr val="2F7775"/>
+                </a:solidFill>
+                <a:latin typeface="Aptos"/>
+              </a:defRPr>
+            </a:pPr>
+            <a:r>
+              <a:t>PostgreSQL</a:t>
+            </a:r>
+          </a:p>
+        </p:txBody>
+      </p:sp>
+      <p:sp>
+        <p:nvSpPr>
+          <p:cNvPr id="15" name="Rounded Rectangle 14"/>
+          <p:cNvSpPr/>
+          <p:nvPr/>
+        </p:nvSpPr>
+        <p:spPr>
+          <a:xfrm>
+            <a:off x="2395728" y="2724912"/>
+            <a:ext cx="1719072" cy="1207008"/>
+          </a:xfrm>
+          <a:prstGeom prst="roundRect">
+            <a:avLst/>
+          </a:prstGeom>
+          <a:solidFill>
+            <a:srgbClr val="FFFFFF"/>
+          </a:solidFill>
+          <a:ln w="19050">
+            <a:solidFill>
+              <a:srgbClr val="2F7775"/>
+            </a:solidFill>
+          </a:ln>
+        </p:spPr>
+        <p:style>
+          <a:lnRef idx="1">
+            <a:schemeClr val="accent1"/>
+          </a:lnRef>
+          <a:fillRef idx="3">
+            <a:schemeClr val="accent1"/>
+          </a:fillRef>
+          <a:effectRef idx="2">
+            <a:schemeClr val="accent1"/>
+          </a:effectRef>
+          <a:fontRef idx="minor">
+            <a:schemeClr val="lt1"/>
+          </a:fontRef>
+        </p:style>
+        <p:txBody>
+          <a:bodyPr rtlCol="0" anchor="ctr"/>
+          <a:lstStyle/>
+          <a:p>
+            <a:pPr algn="ctr"/>
+          </a:p>
+        </p:txBody>
+      </p:sp>
+      <p:sp>
+        <p:nvSpPr>
+          <p:cNvPr id="16" name="Rounded Rectangle 15"/>
+          <p:cNvSpPr/>
+          <p:nvPr/>
+        </p:nvSpPr>
+        <p:spPr>
+          <a:xfrm>
+            <a:off x="2395728" y="2724912"/>
+            <a:ext cx="1719072" cy="384048"/>
+          </a:xfrm>
+          <a:prstGeom prst="roundRect">
+            <a:avLst/>
+          </a:prstGeom>
+          <a:solidFill>
+            <a:srgbClr val="2F7775"/>
+          </a:solidFill>
+          <a:ln w="19050">
+            <a:solidFill>
+              <a:srgbClr val="2F7775"/>
+            </a:solidFill>
+          </a:ln>
+        </p:spPr>
+        <p:style>
+          <a:lnRef idx="1">
+            <a:schemeClr val="accent1"/>
+          </a:lnRef>
+          <a:fillRef idx="3">
+            <a:schemeClr val="accent1"/>
+          </a:fillRef>
+          <a:effectRef idx="2">
+            <a:schemeClr val="accent1"/>
+          </a:effectRef>
+          <a:fontRef idx="minor">
+            <a:schemeClr val="lt1"/>
+          </a:fontRef>
+        </p:style>
+        <p:txBody>
+          <a:bodyPr rtlCol="0" anchor="ctr"/>
+          <a:lstStyle/>
+          <a:p>
+            <a:pPr algn="ctr"/>
+          </a:p>
+        </p:txBody>
+      </p:sp>
+      <p:sp>
+        <p:nvSpPr>
+          <p:cNvPr id="17" name="TextBox 16"/>
+          <p:cNvSpPr txBox="1"/>
+          <p:nvPr/>
+        </p:nvSpPr>
+        <p:spPr>
+          <a:xfrm>
+            <a:off x="2450592" y="2798064"/>
+            <a:ext cx="1609344" cy="228600"/>
+          </a:xfrm>
+          <a:prstGeom prst="rect">
+            <a:avLst/>
+          </a:prstGeom>
+          <a:noFill/>
+        </p:spPr>
+        <p:txBody>
+          <a:bodyPr wrap="square" lIns="36576" rIns="36576" tIns="18288" bIns="18288">
+            <a:spAutoFit/>
+          </a:bodyPr>
+          <a:lstStyle/>
+          <a:p>
+            <a:pPr algn="ctr">
+              <a:defRPr sz="1200" b="1">
+                <a:solidFill>
+                  <a:srgbClr val="FFFFFF"/>
+                </a:solidFill>
+                <a:latin typeface="Aptos"/>
+              </a:defRPr>
+            </a:pPr>
+            <a:r>
+              <a:t>GPT dots</a:t>
+            </a:r>
+          </a:p>
+        </p:txBody>
+      </p:sp>
+      <p:sp>
+        <p:nvSpPr>
+          <p:cNvPr id="18" name="TextBox 17"/>
+          <p:cNvSpPr txBox="1"/>
+          <p:nvPr/>
+        </p:nvSpPr>
+        <p:spPr>
+          <a:xfrm>
+            <a:off x="2468880" y="3200400"/>
+            <a:ext cx="1572768" cy="201168"/>
+          </a:xfrm>
+          <a:prstGeom prst="rect">
+            <a:avLst/>
+          </a:prstGeom>
+          <a:noFill/>
+        </p:spPr>
+        <p:txBody>
+          <a:bodyPr wrap="square" lIns="36576" rIns="36576" tIns="18288" bIns="18288">
+            <a:spAutoFit/>
+          </a:bodyPr>
+          <a:lstStyle/>
+          <a:p>
+            <a:pPr algn="ctr">
+              <a:defRPr sz="1000" b="0">
+                <a:solidFill>
+                  <a:srgbClr val="64777A"/>
+                </a:solidFill>
+                <a:latin typeface="Aptos"/>
+              </a:defRPr>
+            </a:pPr>
+            <a:r>
+              <a:t>hypothetical write</a:t>
+            </a:r>
+          </a:p>
+        </p:txBody>
+      </p:sp>
+      <p:sp>
+        <p:nvSpPr>
+          <p:cNvPr id="19" name="TextBox 18"/>
+          <p:cNvSpPr txBox="1"/>
+          <p:nvPr/>
+        </p:nvSpPr>
+        <p:spPr>
+          <a:xfrm>
+            <a:off x="2468880" y="3474720"/>
+            <a:ext cx="1572768" cy="265176"/>
+          </a:xfrm>
+          <a:prstGeom prst="rect">
+            <a:avLst/>
+          </a:prstGeom>
+          <a:noFill/>
+        </p:spPr>
+        <p:txBody>
+          <a:bodyPr wrap="square" lIns="36576" rIns="36576" tIns="18288" bIns="18288">
+            <a:spAutoFit/>
+          </a:bodyPr>
+          <a:lstStyle/>
+          <a:p>
+            <a:pPr algn="ctr">
+              <a:defRPr sz="1400" b="1">
+                <a:solidFill>
+                  <a:srgbClr val="2F7775"/>
+                </a:solidFill>
+                <a:latin typeface="Aptos"/>
+              </a:defRPr>
+            </a:pPr>
+            <a:r>
+              <a:t>PostgreSQL</a:t>
+            </a:r>
+          </a:p>
+        </p:txBody>
+      </p:sp>
+      <p:sp>
+        <p:nvSpPr>
+          <p:cNvPr id="20" name="Rounded Rectangle 19"/>
+          <p:cNvSpPr/>
+          <p:nvPr/>
+        </p:nvSpPr>
+        <p:spPr>
+          <a:xfrm>
+            <a:off x="4261104" y="2724912"/>
+            <a:ext cx="1719072" cy="1207008"/>
+          </a:xfrm>
+          <a:prstGeom prst="roundRect">
+            <a:avLst/>
+          </a:prstGeom>
+          <a:solidFill>
+            <a:srgbClr val="FFFFFF"/>
+          </a:solidFill>
+          <a:ln w="19050">
+            <a:solidFill>
+              <a:srgbClr val="2F7775"/>
+            </a:solidFill>
+          </a:ln>
+        </p:spPr>
+        <p:style>
+          <a:lnRef idx="1">
+            <a:schemeClr val="accent1"/>
+          </a:lnRef>
+          <a:fillRef idx="3">
+            <a:schemeClr val="accent1"/>
+          </a:fillRef>
+          <a:effectRef idx="2">
+            <a:schemeClr val="accent1"/>
+          </a:effectRef>
+          <a:fontRef idx="minor">
+            <a:schemeClr val="lt1"/>
+          </a:fontRef>
+        </p:style>
+        <p:txBody>
+          <a:bodyPr rtlCol="0" anchor="ctr"/>
+          <a:lstStyle/>
+          <a:p>
+            <a:pPr algn="ctr"/>
+          </a:p>
+        </p:txBody>
+      </p:sp>
+      <p:sp>
+        <p:nvSpPr>
+          <p:cNvPr id="21" name="Rounded Rectangle 20"/>
+          <p:cNvSpPr/>
+          <p:nvPr/>
+        </p:nvSpPr>
+        <p:spPr>
+          <a:xfrm>
+            <a:off x="4261104" y="2724912"/>
+            <a:ext cx="1719072" cy="384048"/>
+          </a:xfrm>
+          <a:prstGeom prst="roundRect">
+            <a:avLst/>
+          </a:prstGeom>
+          <a:solidFill>
+            <a:srgbClr val="2F7775"/>
+          </a:solidFill>
+          <a:ln w="19050">
+            <a:solidFill>
+              <a:srgbClr val="2F7775"/>
+            </a:solidFill>
+          </a:ln>
+        </p:spPr>
+        <p:style>
+          <a:lnRef idx="1">
+            <a:schemeClr val="accent1"/>
+          </a:lnRef>
+          <a:fillRef idx="3">
+            <a:schemeClr val="accent1"/>
+          </a:fillRef>
+          <a:effectRef idx="2">
+            <a:schemeClr val="accent1"/>
+          </a:effectRef>
+          <a:fontRef idx="minor">
+            <a:schemeClr val="lt1"/>
+          </a:fontRef>
+        </p:style>
+        <p:txBody>
+          <a:bodyPr rtlCol="0" anchor="ctr"/>
+          <a:lstStyle/>
+          <a:p>
+            <a:pPr algn="ctr"/>
+          </a:p>
+        </p:txBody>
+      </p:sp>
+      <p:sp>
+        <p:nvSpPr>
+          <p:cNvPr id="22" name="TextBox 21"/>
+          <p:cNvSpPr txBox="1"/>
+          <p:nvPr/>
+        </p:nvSpPr>
+        <p:spPr>
+          <a:xfrm>
+            <a:off x="4315968" y="2798064"/>
+            <a:ext cx="1609344" cy="228600"/>
+          </a:xfrm>
+          <a:prstGeom prst="rect">
+            <a:avLst/>
+          </a:prstGeom>
+          <a:noFill/>
+        </p:spPr>
+        <p:txBody>
+          <a:bodyPr wrap="square" lIns="36576" rIns="36576" tIns="18288" bIns="18288">
+            <a:spAutoFit/>
+          </a:bodyPr>
+          <a:lstStyle/>
+          <a:p>
+            <a:pPr algn="ctr">
+              <a:defRPr sz="1200" b="1">
+                <a:solidFill>
+                  <a:srgbClr val="FFFFFF"/>
+                </a:solidFill>
+                <a:latin typeface="Aptos"/>
+              </a:defRPr>
+            </a:pPr>
+            <a:r>
+              <a:t>Claude duet</a:t>
+            </a:r>
+          </a:p>
+        </p:txBody>
+      </p:sp>
+      <p:sp>
+        <p:nvSpPr>
+          <p:cNvPr id="23" name="TextBox 22"/>
+          <p:cNvSpPr txBox="1"/>
+          <p:nvPr/>
+        </p:nvSpPr>
+        <p:spPr>
+          <a:xfrm>
+            <a:off x="4334256" y="3200400"/>
+            <a:ext cx="1572768" cy="201168"/>
+          </a:xfrm>
+          <a:prstGeom prst="rect">
+            <a:avLst/>
+          </a:prstGeom>
+          <a:noFill/>
+        </p:spPr>
+        <p:txBody>
+          <a:bodyPr wrap="square" lIns="36576" rIns="36576" tIns="18288" bIns="18288">
+            <a:spAutoFit/>
+          </a:bodyPr>
+          <a:lstStyle/>
+          <a:p>
+            <a:pPr algn="ctr">
+              <a:defRPr sz="1000" b="0">
+                <a:solidFill>
+                  <a:srgbClr val="64777A"/>
+                </a:solidFill>
+                <a:latin typeface="Aptos"/>
+              </a:defRPr>
+            </a:pPr>
+            <a:r>
+              <a:t>hypothetical write</a:t>
+            </a:r>
+          </a:p>
+        </p:txBody>
+      </p:sp>
+      <p:sp>
+        <p:nvSpPr>
+          <p:cNvPr id="24" name="TextBox 23"/>
+          <p:cNvSpPr txBox="1"/>
+          <p:nvPr/>
+        </p:nvSpPr>
+        <p:spPr>
+          <a:xfrm>
+            <a:off x="4334256" y="3474720"/>
+            <a:ext cx="1572768" cy="265176"/>
+          </a:xfrm>
+          <a:prstGeom prst="rect">
+            <a:avLst/>
+          </a:prstGeom>
+          <a:noFill/>
+        </p:spPr>
+        <p:txBody>
+          <a:bodyPr wrap="square" lIns="36576" rIns="36576" tIns="18288" bIns="18288">
+            <a:spAutoFit/>
+          </a:bodyPr>
+          <a:lstStyle/>
+          <a:p>
+            <a:pPr algn="ctr">
+              <a:defRPr sz="1400" b="1">
+                <a:solidFill>
+                  <a:srgbClr val="2F7775"/>
+                </a:solidFill>
+                <a:latin typeface="Aptos"/>
+              </a:defRPr>
+            </a:pPr>
+            <a:r>
+              <a:t>PostgreSQL</a:t>
+            </a:r>
+          </a:p>
+        </p:txBody>
+      </p:sp>
+      <p:sp>
+        <p:nvSpPr>
+          <p:cNvPr id="25" name="Rounded Rectangle 24"/>
+          <p:cNvSpPr/>
+          <p:nvPr/>
+        </p:nvSpPr>
+        <p:spPr>
+          <a:xfrm>
+            <a:off x="6126480" y="2724912"/>
+            <a:ext cx="1719072" cy="1207008"/>
+          </a:xfrm>
+          <a:prstGeom prst="roundRect">
+            <a:avLst/>
+          </a:prstGeom>
+          <a:solidFill>
+            <a:srgbClr val="FFFFFF"/>
+          </a:solidFill>
+          <a:ln w="19050">
+            <a:solidFill>
+              <a:srgbClr val="D87965"/>
+            </a:solidFill>
+          </a:ln>
+        </p:spPr>
+        <p:style>
+          <a:lnRef idx="1">
+            <a:schemeClr val="accent1"/>
+          </a:lnRef>
+          <a:fillRef idx="3">
+            <a:schemeClr val="accent1"/>
+          </a:fillRef>
+          <a:effectRef idx="2">
+            <a:schemeClr val="accent1"/>
+          </a:effectRef>
+          <a:fontRef idx="minor">
+            <a:schemeClr val="lt1"/>
+          </a:fontRef>
+        </p:style>
+        <p:txBody>
+          <a:bodyPr rtlCol="0" anchor="ctr"/>
+          <a:lstStyle/>
+          <a:p>
+            <a:pPr algn="ctr"/>
+          </a:p>
+        </p:txBody>
+      </p:sp>
+      <p:sp>
+        <p:nvSpPr>
+          <p:cNvPr id="26" name="Rounded Rectangle 25"/>
+          <p:cNvSpPr/>
+          <p:nvPr/>
+        </p:nvSpPr>
+        <p:spPr>
+          <a:xfrm>
+            <a:off x="6126480" y="2724912"/>
+            <a:ext cx="1719072" cy="384048"/>
+          </a:xfrm>
+          <a:prstGeom prst="roundRect">
+            <a:avLst/>
+          </a:prstGeom>
+          <a:solidFill>
+            <a:srgbClr val="D87965"/>
+          </a:solidFill>
+          <a:ln w="19050">
+            <a:solidFill>
+              <a:srgbClr val="D87965"/>
+            </a:solidFill>
+          </a:ln>
+        </p:spPr>
+        <p:style>
+          <a:lnRef idx="1">
+            <a:schemeClr val="accent1"/>
+          </a:lnRef>
+          <a:fillRef idx="3">
+            <a:schemeClr val="accent1"/>
+          </a:fillRef>
+          <a:effectRef idx="2">
+            <a:schemeClr val="accent1"/>
+          </a:effectRef>
+          <a:fontRef idx="minor">
+            <a:schemeClr val="lt1"/>
+          </a:fontRef>
+        </p:style>
+        <p:txBody>
+          <a:bodyPr rtlCol="0" anchor="ctr"/>
+          <a:lstStyle/>
+          <a:p>
+            <a:pPr algn="ctr"/>
+          </a:p>
+        </p:txBody>
+      </p:sp>
+      <p:sp>
+        <p:nvSpPr>
+          <p:cNvPr id="27" name="TextBox 26"/>
+          <p:cNvSpPr txBox="1"/>
+          <p:nvPr/>
+        </p:nvSpPr>
+        <p:spPr>
+          <a:xfrm>
+            <a:off x="6181344" y="2798064"/>
+            <a:ext cx="1609344" cy="228600"/>
+          </a:xfrm>
+          <a:prstGeom prst="rect">
+            <a:avLst/>
+          </a:prstGeom>
+          <a:noFill/>
+        </p:spPr>
+        <p:txBody>
+          <a:bodyPr wrap="square" lIns="36576" rIns="36576" tIns="18288" bIns="18288">
+            <a:spAutoFit/>
+          </a:bodyPr>
+          <a:lstStyle/>
+          <a:p>
+            <a:pPr algn="ctr">
+              <a:defRPr sz="1200" b="1">
+                <a:solidFill>
+                  <a:srgbClr val="FFFFFF"/>
+                </a:solidFill>
+                <a:latin typeface="Aptos"/>
+              </a:defRPr>
+            </a:pPr>
+            <a:r>
+              <a:t>Harkpro</a:t>
+            </a:r>
+          </a:p>
+        </p:txBody>
+      </p:sp>
+      <p:sp>
+        <p:nvSpPr>
+          <p:cNvPr id="28" name="TextBox 27"/>
+          <p:cNvSpPr txBox="1"/>
+          <p:nvPr/>
+        </p:nvSpPr>
+        <p:spPr>
+          <a:xfrm>
+            <a:off x="6199632" y="3200400"/>
+            <a:ext cx="1572768" cy="201168"/>
+          </a:xfrm>
+          <a:prstGeom prst="rect">
+            <a:avLst/>
+          </a:prstGeom>
+          <a:noFill/>
+        </p:spPr>
+        <p:txBody>
+          <a:bodyPr wrap="square" lIns="36576" rIns="36576" tIns="18288" bIns="18288">
+            <a:spAutoFit/>
+          </a:bodyPr>
+          <a:lstStyle/>
+          <a:p>
+            <a:pPr algn="ctr">
+              <a:defRPr sz="1000" b="0">
+                <a:solidFill>
+                  <a:srgbClr val="64777A"/>
+                </a:solidFill>
+                <a:latin typeface="Aptos"/>
+              </a:defRPr>
+            </a:pPr>
+            <a:r>
+              <a:t>hypothetical write</a:t>
+            </a:r>
+          </a:p>
+        </p:txBody>
+      </p:sp>
+      <p:sp>
+        <p:nvSpPr>
+          <p:cNvPr id="29" name="TextBox 28"/>
+          <p:cNvSpPr txBox="1"/>
+          <p:nvPr/>
+        </p:nvSpPr>
+        <p:spPr>
+          <a:xfrm>
+            <a:off x="6199632" y="3474720"/>
+            <a:ext cx="1572768" cy="265176"/>
+          </a:xfrm>
+          <a:prstGeom prst="rect">
+            <a:avLst/>
+          </a:prstGeom>
+          <a:noFill/>
+        </p:spPr>
+        <p:txBody>
+          <a:bodyPr wrap="square" lIns="36576" rIns="36576" tIns="18288" bIns="18288">
+            <a:spAutoFit/>
+          </a:bodyPr>
+          <a:lstStyle/>
+          <a:p>
+            <a:pPr algn="ctr">
+              <a:defRPr sz="1400" b="1">
+                <a:solidFill>
+                  <a:srgbClr val="D87965"/>
+                </a:solidFill>
+                <a:latin typeface="Aptos"/>
+              </a:defRPr>
+            </a:pPr>
+            <a:r>
+              <a:t>DynamoDB</a:t>
+            </a:r>
+          </a:p>
+        </p:txBody>
+      </p:sp>
+      <p:sp>
+        <p:nvSpPr>
+          <p:cNvPr id="30" name="Rounded Rectangle 29"/>
+          <p:cNvSpPr/>
+          <p:nvPr/>
+        </p:nvSpPr>
+        <p:spPr>
+          <a:xfrm>
+            <a:off x="7991856" y="2724912"/>
+            <a:ext cx="1719072" cy="1207008"/>
+          </a:xfrm>
+          <a:prstGeom prst="roundRect">
+            <a:avLst/>
+          </a:prstGeom>
+          <a:solidFill>
+            <a:srgbClr val="FFFFFF"/>
+          </a:solidFill>
+          <a:ln w="19050">
+            <a:solidFill>
+              <a:srgbClr val="D87965"/>
+            </a:solidFill>
+          </a:ln>
+        </p:spPr>
+        <p:style>
+          <a:lnRef idx="1">
+            <a:schemeClr val="accent1"/>
+          </a:lnRef>
+          <a:fillRef idx="3">
+            <a:schemeClr val="accent1"/>
+          </a:fillRef>
+          <a:effectRef idx="2">
+            <a:schemeClr val="accent1"/>
+          </a:effectRef>
+          <a:fontRef idx="minor">
+            <a:schemeClr val="lt1"/>
+          </a:fontRef>
+        </p:style>
+        <p:txBody>
+          <a:bodyPr rtlCol="0" anchor="ctr"/>
+          <a:lstStyle/>
+          <a:p>
+            <a:pPr algn="ctr"/>
+          </a:p>
+        </p:txBody>
+      </p:sp>
+      <p:sp>
+        <p:nvSpPr>
+          <p:cNvPr id="31" name="Rounded Rectangle 30"/>
+          <p:cNvSpPr/>
+          <p:nvPr/>
+        </p:nvSpPr>
+        <p:spPr>
+          <a:xfrm>
+            <a:off x="7991856" y="2724912"/>
+            <a:ext cx="1719072" cy="384048"/>
+          </a:xfrm>
+          <a:prstGeom prst="roundRect">
+            <a:avLst/>
+          </a:prstGeom>
+          <a:solidFill>
+            <a:srgbClr val="D87965"/>
+          </a:solidFill>
+          <a:ln w="19050">
+            <a:solidFill>
+              <a:srgbClr val="D87965"/>
+            </a:solidFill>
+          </a:ln>
+        </p:spPr>
+        <p:style>
+          <a:lnRef idx="1">
+            <a:schemeClr val="accent1"/>
+          </a:lnRef>
+          <a:fillRef idx="3">
+            <a:schemeClr val="accent1"/>
+          </a:fillRef>
+          <a:effectRef idx="2">
+            <a:schemeClr val="accent1"/>
+          </a:effectRef>
+          <a:fontRef idx="minor">
+            <a:schemeClr val="lt1"/>
+          </a:fontRef>
+        </p:style>
+        <p:txBody>
+          <a:bodyPr rtlCol="0" anchor="ctr"/>
+          <a:lstStyle/>
+          <a:p>
+            <a:pPr algn="ctr"/>
+          </a:p>
+        </p:txBody>
+      </p:sp>
+      <p:sp>
+        <p:nvSpPr>
+          <p:cNvPr id="32" name="TextBox 31"/>
+          <p:cNvSpPr txBox="1"/>
+          <p:nvPr/>
+        </p:nvSpPr>
+        <p:spPr>
+          <a:xfrm>
+            <a:off x="8046720" y="2798064"/>
+            <a:ext cx="1609344" cy="228600"/>
+          </a:xfrm>
+          <a:prstGeom prst="rect">
+            <a:avLst/>
+          </a:prstGeom>
+          <a:noFill/>
+        </p:spPr>
+        <p:txBody>
+          <a:bodyPr wrap="square" lIns="36576" rIns="36576" tIns="18288" bIns="18288">
+            <a:spAutoFit/>
+          </a:bodyPr>
+          <a:lstStyle/>
+          <a:p>
+            <a:pPr algn="ctr">
+              <a:defRPr sz="1200" b="1">
+                <a:solidFill>
+                  <a:srgbClr val="FFFFFF"/>
+                </a:solidFill>
+                <a:latin typeface="Aptos"/>
+              </a:defRPr>
+            </a:pPr>
+            <a:r>
+              <a:t>Wajo Fo</a:t>
+            </a:r>
+          </a:p>
+        </p:txBody>
+      </p:sp>
+      <p:sp>
+        <p:nvSpPr>
+          <p:cNvPr id="33" name="TextBox 32"/>
+          <p:cNvSpPr txBox="1"/>
+          <p:nvPr/>
+        </p:nvSpPr>
+        <p:spPr>
+          <a:xfrm>
+            <a:off x="8065008" y="3200400"/>
+            <a:ext cx="1572768" cy="201168"/>
+          </a:xfrm>
+          <a:prstGeom prst="rect">
+            <a:avLst/>
+          </a:prstGeom>
+          <a:noFill/>
+        </p:spPr>
+        <p:txBody>
+          <a:bodyPr wrap="square" lIns="36576" rIns="36576" tIns="18288" bIns="18288">
+            <a:spAutoFit/>
+          </a:bodyPr>
+          <a:lstStyle/>
+          <a:p>
+            <a:pPr algn="ctr">
+              <a:defRPr sz="1000" b="0">
+                <a:solidFill>
+                  <a:srgbClr val="64777A"/>
+                </a:solidFill>
+                <a:latin typeface="Aptos"/>
+              </a:defRPr>
+            </a:pPr>
+            <a:r>
+              <a:t>hypothetical write</a:t>
+            </a:r>
+          </a:p>
+        </p:txBody>
+      </p:sp>
+      <p:sp>
+        <p:nvSpPr>
+          <p:cNvPr id="34" name="TextBox 33"/>
+          <p:cNvSpPr txBox="1"/>
+          <p:nvPr/>
+        </p:nvSpPr>
+        <p:spPr>
+          <a:xfrm>
+            <a:off x="8065008" y="3474720"/>
+            <a:ext cx="1572768" cy="265176"/>
+          </a:xfrm>
+          <a:prstGeom prst="rect">
+            <a:avLst/>
+          </a:prstGeom>
+          <a:noFill/>
+        </p:spPr>
+        <p:txBody>
+          <a:bodyPr wrap="square" lIns="36576" rIns="36576" tIns="18288" bIns="18288">
+            <a:spAutoFit/>
+          </a:bodyPr>
+          <a:lstStyle/>
+          <a:p>
+            <a:pPr algn="ctr">
+              <a:defRPr sz="1400" b="1">
+                <a:solidFill>
+                  <a:srgbClr val="D87965"/>
+                </a:solidFill>
+                <a:latin typeface="Aptos"/>
+              </a:defRPr>
+            </a:pPr>
+            <a:r>
+              <a:t>DynamoDB</a:t>
+            </a:r>
+          </a:p>
+        </p:txBody>
+      </p:sp>
+      <p:sp>
+        <p:nvSpPr>
+          <p:cNvPr id="35" name="Rounded Rectangle 34"/>
+          <p:cNvSpPr/>
+          <p:nvPr/>
+        </p:nvSpPr>
+        <p:spPr>
+          <a:xfrm>
+            <a:off x="9857232" y="2724912"/>
+            <a:ext cx="1719072" cy="1207008"/>
+          </a:xfrm>
+          <a:prstGeom prst="roundRect">
+            <a:avLst/>
+          </a:prstGeom>
+          <a:solidFill>
+            <a:srgbClr val="FFFFFF"/>
+          </a:solidFill>
+          <a:ln w="19050">
+            <a:solidFill>
+              <a:srgbClr val="D87965"/>
+            </a:solidFill>
+          </a:ln>
+        </p:spPr>
+        <p:style>
+          <a:lnRef idx="1">
+            <a:schemeClr val="accent1"/>
+          </a:lnRef>
+          <a:fillRef idx="3">
+            <a:schemeClr val="accent1"/>
+          </a:fillRef>
+          <a:effectRef idx="2">
+            <a:schemeClr val="accent1"/>
+          </a:effectRef>
+          <a:fontRef idx="minor">
+            <a:schemeClr val="lt1"/>
+          </a:fontRef>
+        </p:style>
+        <p:txBody>
+          <a:bodyPr rtlCol="0" anchor="ctr"/>
+          <a:lstStyle/>
+          <a:p>
+            <a:pPr algn="ctr"/>
+          </a:p>
+        </p:txBody>
+      </p:sp>
+      <p:sp>
+        <p:nvSpPr>
+          <p:cNvPr id="36" name="Rounded Rectangle 35"/>
+          <p:cNvSpPr/>
+          <p:nvPr/>
+        </p:nvSpPr>
+        <p:spPr>
+          <a:xfrm>
+            <a:off x="9857232" y="2724912"/>
+            <a:ext cx="1719072" cy="384048"/>
+          </a:xfrm>
+          <a:prstGeom prst="roundRect">
+            <a:avLst/>
+          </a:prstGeom>
+          <a:solidFill>
+            <a:srgbClr val="D87965"/>
+          </a:solidFill>
+          <a:ln w="19050">
+            <a:solidFill>
+              <a:srgbClr val="D87965"/>
+            </a:solidFill>
+          </a:ln>
+        </p:spPr>
+        <p:style>
+          <a:lnRef idx="1">
+            <a:schemeClr val="accent1"/>
+          </a:lnRef>
+          <a:fillRef idx="3">
+            <a:schemeClr val="accent1"/>
+          </a:fillRef>
+          <a:effectRef idx="2">
+            <a:schemeClr val="accent1"/>
+          </a:effectRef>
+          <a:fontRef idx="minor">
+            <a:schemeClr val="lt1"/>
+          </a:fontRef>
+        </p:style>
+        <p:txBody>
+          <a:bodyPr rtlCol="0" anchor="ctr"/>
+          <a:lstStyle/>
+          <a:p>
+            <a:pPr algn="ctr"/>
+          </a:p>
+        </p:txBody>
+      </p:sp>
+      <p:sp>
+        <p:nvSpPr>
+          <p:cNvPr id="37" name="TextBox 36"/>
+          <p:cNvSpPr txBox="1"/>
+          <p:nvPr/>
+        </p:nvSpPr>
+        <p:spPr>
+          <a:xfrm>
+            <a:off x="9912096" y="2798064"/>
+            <a:ext cx="1609344" cy="228600"/>
+          </a:xfrm>
+          <a:prstGeom prst="rect">
+            <a:avLst/>
+          </a:prstGeom>
+          <a:noFill/>
+        </p:spPr>
+        <p:txBody>
+          <a:bodyPr wrap="square" lIns="36576" rIns="36576" tIns="18288" bIns="18288">
+            <a:spAutoFit/>
+          </a:bodyPr>
+          <a:lstStyle/>
+          <a:p>
+            <a:pPr algn="ctr">
+              <a:defRPr sz="1200" b="1">
+                <a:solidFill>
+                  <a:srgbClr val="FFFFFF"/>
+                </a:solidFill>
+                <a:latin typeface="Aptos"/>
+              </a:defRPr>
+            </a:pPr>
+            <a:r>
+              <a:t>Wabi</a:t>
+            </a:r>
+          </a:p>
+        </p:txBody>
+      </p:sp>
+      <p:sp>
+        <p:nvSpPr>
+          <p:cNvPr id="38" name="TextBox 37"/>
+          <p:cNvSpPr txBox="1"/>
+          <p:nvPr/>
+        </p:nvSpPr>
+        <p:spPr>
+          <a:xfrm>
+            <a:off x="9930384" y="3200400"/>
+            <a:ext cx="1572768" cy="201168"/>
+          </a:xfrm>
+          <a:prstGeom prst="rect">
+            <a:avLst/>
+          </a:prstGeom>
+          <a:noFill/>
+        </p:spPr>
+        <p:txBody>
+          <a:bodyPr wrap="square" lIns="36576" rIns="36576" tIns="18288" bIns="18288">
+            <a:spAutoFit/>
+          </a:bodyPr>
+          <a:lstStyle/>
+          <a:p>
+            <a:pPr algn="ctr">
+              <a:defRPr sz="1000" b="0">
+                <a:solidFill>
+                  <a:srgbClr val="64777A"/>
+                </a:solidFill>
+                <a:latin typeface="Aptos"/>
+              </a:defRPr>
+            </a:pPr>
+            <a:r>
+              <a:t>hypothetical write</a:t>
+            </a:r>
+          </a:p>
+        </p:txBody>
+      </p:sp>
+      <p:sp>
+        <p:nvSpPr>
+          <p:cNvPr id="39" name="TextBox 38"/>
+          <p:cNvSpPr txBox="1"/>
+          <p:nvPr/>
+        </p:nvSpPr>
+        <p:spPr>
+          <a:xfrm>
+            <a:off x="9930384" y="3474720"/>
+            <a:ext cx="1572768" cy="265176"/>
+          </a:xfrm>
+          <a:prstGeom prst="rect">
+            <a:avLst/>
+          </a:prstGeom>
+          <a:noFill/>
+        </p:spPr>
+        <p:txBody>
+          <a:bodyPr wrap="square" lIns="36576" rIns="36576" tIns="18288" bIns="18288">
+            <a:spAutoFit/>
+          </a:bodyPr>
+          <a:lstStyle/>
+          <a:p>
+            <a:pPr algn="ctr">
+              <a:defRPr sz="1400" b="1">
+                <a:solidFill>
+                  <a:srgbClr val="D87965"/>
+                </a:solidFill>
+                <a:latin typeface="Aptos"/>
+              </a:defRPr>
+            </a:pPr>
+            <a:r>
+              <a:t>DynamoDB</a:t>
+            </a:r>
+          </a:p>
+        </p:txBody>
+      </p:sp>
+      <p:sp>
+        <p:nvSpPr>
+          <p:cNvPr id="40" name="Rounded Rectangle 39"/>
+          <p:cNvSpPr/>
+          <p:nvPr/>
+        </p:nvSpPr>
+        <p:spPr>
+          <a:xfrm>
+            <a:off x="530352" y="4233672"/>
+            <a:ext cx="5376672" cy="1143000"/>
+          </a:xfrm>
+          <a:prstGeom prst="roundRect">
+            <a:avLst/>
+          </a:prstGeom>
+          <a:solidFill>
+            <a:srgbClr val="E8F1EC"/>
+          </a:solidFill>
+          <a:ln w="19050">
+            <a:solidFill>
+              <a:srgbClr val="8EB89B"/>
+            </a:solidFill>
+          </a:ln>
+        </p:spPr>
+        <p:style>
+          <a:lnRef idx="1">
+            <a:schemeClr val="accent1"/>
+          </a:lnRef>
+          <a:fillRef idx="3">
+            <a:schemeClr val="accent1"/>
+          </a:fillRef>
+          <a:effectRef idx="2">
+            <a:schemeClr val="accent1"/>
+          </a:effectRef>
+          <a:fontRef idx="minor">
+            <a:schemeClr val="lt1"/>
+          </a:fontRef>
+        </p:style>
+        <p:txBody>
+          <a:bodyPr rtlCol="0" anchor="ctr"/>
+          <a:lstStyle/>
+          <a:p>
+            <a:pPr algn="ctr"/>
+          </a:p>
+        </p:txBody>
+      </p:sp>
+      <p:sp>
+        <p:nvSpPr>
+          <p:cNvPr id="41" name="TextBox 40"/>
+          <p:cNvSpPr txBox="1"/>
+          <p:nvPr/>
+        </p:nvSpPr>
+        <p:spPr>
+          <a:xfrm>
+            <a:off x="749808" y="4398264"/>
+            <a:ext cx="4846320" cy="237744"/>
+          </a:xfrm>
+          <a:prstGeom prst="rect">
+            <a:avLst/>
+          </a:prstGeom>
+          <a:noFill/>
+        </p:spPr>
+        <p:txBody>
+          <a:bodyPr wrap="square" lIns="36576" rIns="36576" tIns="18288" bIns="18288">
+            <a:spAutoFit/>
+          </a:bodyPr>
+          <a:lstStyle/>
+          <a:p>
+            <a:pPr algn="l">
+              <a:defRPr sz="1700" b="1">
+                <a:solidFill>
+                  <a:srgbClr val="2F7775"/>
+                </a:solidFill>
+                <a:latin typeface="Aptos"/>
+              </a:defRPr>
+            </a:pPr>
+            <a:r>
+              <a:t>3 candidate writes</a:t>
+            </a:r>
+          </a:p>
+        </p:txBody>
+      </p:sp>
+      <p:sp>
+        <p:nvSpPr>
+          <p:cNvPr id="42" name="TextBox 41"/>
+          <p:cNvSpPr txBox="1"/>
+          <p:nvPr/>
+        </p:nvSpPr>
+        <p:spPr>
+          <a:xfrm>
+            <a:off x="749808" y="4736592"/>
+            <a:ext cx="4846320" cy="274320"/>
+          </a:xfrm>
+          <a:prstGeom prst="rect">
+            <a:avLst/>
+          </a:prstGeom>
+          <a:noFill/>
+        </p:spPr>
+        <p:txBody>
+          <a:bodyPr wrap="square" lIns="36576" rIns="36576" tIns="18288" bIns="18288">
+            <a:spAutoFit/>
+          </a:bodyPr>
+          <a:lstStyle/>
+          <a:p>
+            <a:pPr algn="l">
+              <a:defRPr sz="1600" b="0">
+                <a:solidFill>
+                  <a:srgbClr val="173E45"/>
+                </a:solidFill>
+                <a:latin typeface="Aptos"/>
+              </a:defRPr>
+            </a:pPr>
+            <a:r>
+              <a:t>primary_db = PostgreSQL</a:t>
+            </a:r>
+          </a:p>
+        </p:txBody>
+      </p:sp>
+      <p:sp>
+        <p:nvSpPr>
+          <p:cNvPr id="43" name="Rounded Rectangle 42"/>
+          <p:cNvSpPr/>
+          <p:nvPr/>
+        </p:nvSpPr>
+        <p:spPr>
+          <a:xfrm>
+            <a:off x="6199632" y="4233672"/>
+            <a:ext cx="5394960" cy="1143000"/>
+          </a:xfrm>
+          <a:prstGeom prst="roundRect">
+            <a:avLst/>
+          </a:prstGeom>
+          <a:solidFill>
+            <a:srgbClr val="F9E8E2"/>
+          </a:solidFill>
+          <a:ln w="19050">
+            <a:solidFill>
+              <a:srgbClr val="D87965"/>
+            </a:solidFill>
+          </a:ln>
+        </p:spPr>
+        <p:style>
+          <a:lnRef idx="1">
+            <a:schemeClr val="accent1"/>
+          </a:lnRef>
+          <a:fillRef idx="3">
+            <a:schemeClr val="accent1"/>
+          </a:fillRef>
+          <a:effectRef idx="2">
+            <a:schemeClr val="accent1"/>
+          </a:effectRef>
+          <a:fontRef idx="minor">
+            <a:schemeClr val="lt1"/>
+          </a:fontRef>
+        </p:style>
+        <p:txBody>
+          <a:bodyPr rtlCol="0" anchor="ctr"/>
+          <a:lstStyle/>
+          <a:p>
+            <a:pPr algn="ctr"/>
+          </a:p>
+        </p:txBody>
+      </p:sp>
+      <p:sp>
+        <p:nvSpPr>
+          <p:cNvPr id="44" name="TextBox 43"/>
+          <p:cNvSpPr txBox="1"/>
+          <p:nvPr/>
+        </p:nvSpPr>
+        <p:spPr>
+          <a:xfrm>
+            <a:off x="6419088" y="4398264"/>
+            <a:ext cx="4846320" cy="237744"/>
+          </a:xfrm>
+          <a:prstGeom prst="rect">
+            <a:avLst/>
+          </a:prstGeom>
+          <a:noFill/>
+        </p:spPr>
+        <p:txBody>
+          <a:bodyPr wrap="square" lIns="36576" rIns="36576" tIns="18288" bIns="18288">
+            <a:spAutoFit/>
+          </a:bodyPr>
+          <a:lstStyle/>
+          <a:p>
+            <a:pPr algn="l">
+              <a:defRPr sz="1700" b="1">
+                <a:solidFill>
+                  <a:srgbClr val="D87965"/>
+                </a:solidFill>
+                <a:latin typeface="Aptos"/>
+              </a:defRPr>
+            </a:pPr>
+            <a:r>
+              <a:t>3 candidate writes</a:t>
+            </a:r>
+          </a:p>
+        </p:txBody>
+      </p:sp>
+      <p:sp>
+        <p:nvSpPr>
+          <p:cNvPr id="45" name="TextBox 44"/>
+          <p:cNvSpPr txBox="1"/>
+          <p:nvPr/>
+        </p:nvSpPr>
+        <p:spPr>
+          <a:xfrm>
+            <a:off x="6419088" y="4736592"/>
+            <a:ext cx="4846320" cy="274320"/>
+          </a:xfrm>
+          <a:prstGeom prst="rect">
+            <a:avLst/>
+          </a:prstGeom>
+          <a:noFill/>
+        </p:spPr>
+        <p:txBody>
+          <a:bodyPr wrap="square" lIns="36576" rIns="36576" tIns="18288" bIns="18288">
+            <a:spAutoFit/>
+          </a:bodyPr>
+          <a:lstStyle/>
+          <a:p>
+            <a:pPr algn="l">
+              <a:defRPr sz="1600" b="0">
+                <a:solidFill>
+                  <a:srgbClr val="173E45"/>
+                </a:solidFill>
+                <a:latin typeface="Aptos"/>
+              </a:defRPr>
+            </a:pPr>
+            <a:r>
+              <a:t>primary_db = DynamoDB</a:t>
+            </a:r>
+          </a:p>
+        </p:txBody>
+      </p:sp>
+      <p:sp>
+        <p:nvSpPr>
+          <p:cNvPr id="46" name="TextBox 45"/>
+          <p:cNvSpPr txBox="1"/>
+          <p:nvPr/>
+        </p:nvSpPr>
+        <p:spPr>
+          <a:xfrm>
+            <a:off x="685800" y="5596128"/>
+            <a:ext cx="10881360" cy="566928"/>
+          </a:xfrm>
+          <a:prstGeom prst="rect">
+            <a:avLst/>
+          </a:prstGeom>
+          <a:noFill/>
+        </p:spPr>
+        <p:txBody>
+          <a:bodyPr wrap="square" lIns="36576" rIns="36576" tIns="18288" bIns="18288">
+            <a:spAutoFit/>
+          </a:bodyPr>
+          <a:lstStyle/>
+          <a:p>
+            <a:pPr algn="ctr">
+              <a:defRPr sz="1500" b="1">
+                <a:solidFill>
+                  <a:srgbClr val="173E45"/>
+                </a:solidFill>
+                <a:latin typeface="Aptos"/>
+              </a:defRPr>
+            </a:pPr>
+            <a:r>
+              <a:t>Same declared key + scope + interval: equal values may be equivalent; the two values cannot both occupy a single-valued key.</a:t>
+            </a:r>
+          </a:p>
+        </p:txBody>
+      </p:sp>
+    </p:spTree>
+  </p:cSld>
+  <p:clrMapOvr>
+    <a:masterClrMapping/>
+  </p:clrMapOvr>
+</p:sld>
+</file>
+
+<file path=ppt/slides/slide18.xml><?xml version="1.0" encoding="utf-8"?>
+<p:sld xmlns:a="http://schemas.openxmlformats.org/drawingml/2006/main" xmlns:p="http://schemas.openxmlformats.org/presentationml/2006/main" xmlns:r="http://schemas.openxmlformats.org/officeDocument/2006/relationships">
+  <p:cSld>
+    <p:bg>
+      <p:bgPr>
+        <a:solidFill>
+          <a:srgbClr val="F7F3E9"/>
+        </a:solidFill>
+        <a:effectLst/>
+      </p:bgPr>
+    </p:bg>
+    <p:spTree>
+      <p:nvGrpSpPr>
+        <p:cNvPr id="1" name=""/>
+        <p:cNvGrpSpPr/>
+        <p:nvPr/>
+      </p:nvGrpSpPr>
+      <p:grpSpPr/>
+      <p:sp>
+        <p:nvSpPr>
+          <p:cNvPr id="2" name="TextBox 1"/>
+          <p:cNvSpPr txBox="1"/>
+          <p:nvPr/>
+        </p:nvSpPr>
+        <p:spPr>
+          <a:xfrm>
+            <a:off x="502920" y="219456"/>
+            <a:ext cx="11155680" cy="274320"/>
+          </a:xfrm>
+          <a:prstGeom prst="rect">
+            <a:avLst/>
+          </a:prstGeom>
+          <a:noFill/>
+        </p:spPr>
+        <p:txBody>
+          <a:bodyPr wrap="square" lIns="36576" rIns="36576" tIns="18288" bIns="18288">
+            <a:spAutoFit/>
+          </a:bodyPr>
+          <a:lstStyle/>
+          <a:p>
+            <a:pPr algn="l">
+              <a:defRPr sz="1200" b="1">
+                <a:solidFill>
+                  <a:srgbClr val="2F7775"/>
+                </a:solidFill>
+                <a:latin typeface="Aptos"/>
+              </a:defRPr>
+            </a:pPr>
+            <a:r>
+              <a:t>AVA EVALUATION • MONDAY REVIEW • PROVISIONAL PACK</a:t>
+            </a:r>
+          </a:p>
+        </p:txBody>
+      </p:sp>
+      <p:sp>
+        <p:nvSpPr>
+          <p:cNvPr id="3" name="TextBox 2"/>
+          <p:cNvSpPr txBox="1"/>
+          <p:nvPr/>
+        </p:nvSpPr>
+        <p:spPr>
+          <a:xfrm>
+            <a:off x="502920" y="603504"/>
+            <a:ext cx="11155680" cy="566928"/>
+          </a:xfrm>
+          <a:prstGeom prst="rect">
+            <a:avLst/>
+          </a:prstGeom>
+          <a:noFill/>
+        </p:spPr>
+        <p:txBody>
+          <a:bodyPr wrap="square" lIns="36576" rIns="36576" tIns="18288" bIns="18288">
+            <a:spAutoFit/>
+          </a:bodyPr>
+          <a:lstStyle/>
+          <a:p>
+            <a:pPr algn="l">
+              <a:defRPr sz="2700" b="1">
+                <a:solidFill>
+                  <a:srgbClr val="173E45"/>
+                </a:solidFill>
+                <a:latin typeface="Aptos"/>
+              </a:defRPr>
+            </a:pPr>
+            <a:r>
+              <a:t>Do not collapse four different questions</a:t>
+            </a:r>
+          </a:p>
+        </p:txBody>
+      </p:sp>
+      <p:sp>
+        <p:nvSpPr>
+          <p:cNvPr id="4" name="TextBox 3"/>
+          <p:cNvSpPr txBox="1"/>
+          <p:nvPr/>
+        </p:nvSpPr>
+        <p:spPr>
+          <a:xfrm>
+            <a:off x="530352" y="1197864"/>
+            <a:ext cx="10972800" cy="384048"/>
+          </a:xfrm>
+          <a:prstGeom prst="rect">
+            <a:avLst/>
+          </a:prstGeom>
+          <a:noFill/>
+        </p:spPr>
+        <p:txBody>
+          <a:bodyPr wrap="square" lIns="36576" rIns="36576" tIns="18288" bIns="18288">
+            <a:spAutoFit/>
+          </a:bodyPr>
+          <a:lstStyle/>
+          <a:p>
+            <a:pPr algn="l">
+              <a:defRPr sz="1400" b="0">
+                <a:solidFill>
+                  <a:srgbClr val="64777A"/>
+                </a:solidFill>
+                <a:latin typeface="Aptos"/>
+              </a:defRPr>
+            </a:pPr>
+            <a:r>
+              <a:t>In the example, disagreement is not “solved” by counting agents or choosing the last arrival.</a:t>
+            </a:r>
+          </a:p>
+        </p:txBody>
+      </p:sp>
+      <p:sp>
+        <p:nvSpPr>
+          <p:cNvPr id="5" name="Rectangle 4"/>
+          <p:cNvSpPr/>
+          <p:nvPr/>
+        </p:nvSpPr>
+        <p:spPr>
+          <a:xfrm>
+            <a:off x="502920" y="1088136"/>
+            <a:ext cx="11155680" cy="22860"/>
+          </a:xfrm>
+          <a:prstGeom prst="rect">
+            <a:avLst/>
+          </a:prstGeom>
+          <a:solidFill>
+            <a:srgbClr val="2F7775"/>
+          </a:solidFill>
+          <a:ln>
+            <a:noFill/>
+          </a:ln>
+        </p:spPr>
+        <p:style>
+          <a:lnRef idx="1">
+            <a:schemeClr val="accent1"/>
+          </a:lnRef>
+          <a:fillRef idx="3">
+            <a:schemeClr val="accent1"/>
+          </a:fillRef>
+          <a:effectRef idx="2">
+            <a:schemeClr val="accent1"/>
+          </a:effectRef>
+          <a:fontRef idx="minor">
+            <a:schemeClr val="lt1"/>
+          </a:fontRef>
+        </p:style>
+        <p:txBody>
+          <a:bodyPr rtlCol="0" anchor="ctr"/>
+          <a:lstStyle/>
+          <a:p>
+            <a:pPr algn="ctr"/>
+          </a:p>
+        </p:txBody>
+      </p:sp>
+      <p:sp>
+        <p:nvSpPr>
+          <p:cNvPr id="6" name="TextBox 5"/>
+          <p:cNvSpPr txBox="1"/>
+          <p:nvPr/>
+        </p:nvSpPr>
+        <p:spPr>
+          <a:xfrm>
+            <a:off x="530352" y="6492240"/>
+            <a:ext cx="9875520" cy="182880"/>
+          </a:xfrm>
+          <a:prstGeom prst="rect">
+            <a:avLst/>
+          </a:prstGeom>
+          <a:noFill/>
+        </p:spPr>
+        <p:txBody>
+          <a:bodyPr wrap="square" lIns="36576" rIns="36576" tIns="18288" bIns="18288">
+            <a:spAutoFit/>
+          </a:bodyPr>
+          <a:lstStyle/>
+          <a:p>
+            <a:pPr algn="l">
+              <a:defRPr sz="900" b="0">
+                <a:solidFill>
+                  <a:srgbClr val="64777A"/>
+                </a:solidFill>
+                <a:latin typeface="Aptos"/>
+              </a:defRPr>
+            </a:pPr>
+            <a:r>
+              <a:t>Review aid only • novelty unresolved • no implementation authorized</a:t>
+            </a:r>
+          </a:p>
+        </p:txBody>
+      </p:sp>
+      <p:sp>
+        <p:nvSpPr>
+          <p:cNvPr id="7" name="Rounded Rectangle 6"/>
+          <p:cNvSpPr/>
+          <p:nvPr/>
+        </p:nvSpPr>
+        <p:spPr>
+          <a:xfrm>
+            <a:off x="530352" y="1865376"/>
+            <a:ext cx="2560320" cy="3108960"/>
+          </a:xfrm>
+          <a:prstGeom prst="roundRect">
+            <a:avLst/>
+          </a:prstGeom>
+          <a:solidFill>
+            <a:srgbClr val="FFFFFF"/>
+          </a:solidFill>
+          <a:ln w="19050">
+            <a:solidFill>
+              <a:srgbClr val="2F7775"/>
+            </a:solidFill>
+          </a:ln>
+        </p:spPr>
+        <p:style>
+          <a:lnRef idx="1">
+            <a:schemeClr val="accent1"/>
+          </a:lnRef>
+          <a:fillRef idx="3">
+            <a:schemeClr val="accent1"/>
+          </a:fillRef>
+          <a:effectRef idx="2">
+            <a:schemeClr val="accent1"/>
+          </a:effectRef>
+          <a:fontRef idx="minor">
+            <a:schemeClr val="lt1"/>
+          </a:fontRef>
+        </p:style>
+        <p:txBody>
+          <a:bodyPr rtlCol="0" anchor="ctr"/>
+          <a:lstStyle/>
+          <a:p>
+            <a:pPr algn="ctr"/>
+          </a:p>
+        </p:txBody>
+      </p:sp>
+      <p:sp>
+        <p:nvSpPr>
+          <p:cNvPr id="8" name="Rounded Rectangle 7"/>
+          <p:cNvSpPr/>
+          <p:nvPr/>
+        </p:nvSpPr>
+        <p:spPr>
+          <a:xfrm>
+            <a:off x="530352" y="1865376"/>
+            <a:ext cx="2560320" cy="530352"/>
+          </a:xfrm>
+          <a:prstGeom prst="roundRect">
+            <a:avLst/>
+          </a:prstGeom>
+          <a:solidFill>
+            <a:srgbClr val="2F7775"/>
+          </a:solidFill>
+          <a:ln w="19050">
+            <a:solidFill>
+              <a:srgbClr val="2F7775"/>
+            </a:solidFill>
+          </a:ln>
+        </p:spPr>
+        <p:style>
+          <a:lnRef idx="1">
+            <a:schemeClr val="accent1"/>
+          </a:lnRef>
+          <a:fillRef idx="3">
+            <a:schemeClr val="accent1"/>
+          </a:fillRef>
+          <a:effectRef idx="2">
+            <a:schemeClr val="accent1"/>
+          </a:effectRef>
+          <a:fontRef idx="minor">
+            <a:schemeClr val="lt1"/>
+          </a:fontRef>
+        </p:style>
+        <p:txBody>
+          <a:bodyPr rtlCol="0" anchor="ctr"/>
+          <a:lstStyle/>
+          <a:p>
+            <a:pPr algn="ctr"/>
+          </a:p>
+        </p:txBody>
+      </p:sp>
+      <p:sp>
+        <p:nvSpPr>
+          <p:cNvPr id="9" name="TextBox 8"/>
+          <p:cNvSpPr txBox="1"/>
+          <p:nvPr/>
+        </p:nvSpPr>
+        <p:spPr>
+          <a:xfrm>
+            <a:off x="621792" y="1984248"/>
+            <a:ext cx="2377440" cy="292608"/>
+          </a:xfrm>
+          <a:prstGeom prst="rect">
+            <a:avLst/>
+          </a:prstGeom>
+          <a:noFill/>
+        </p:spPr>
+        <p:txBody>
+          <a:bodyPr wrap="square" lIns="36576" rIns="36576" tIns="18288" bIns="18288">
+            <a:spAutoFit/>
+          </a:bodyPr>
+          <a:lstStyle/>
+          <a:p>
+            <a:pPr algn="ctr">
+              <a:defRPr sz="1500" b="1">
+                <a:solidFill>
+                  <a:srgbClr val="FFFFFF"/>
+                </a:solidFill>
+                <a:latin typeface="Aptos"/>
+              </a:defRPr>
+            </a:pPr>
+            <a:r>
+              <a:t>1  PROVENANCE</a:t>
+            </a:r>
+          </a:p>
+        </p:txBody>
+      </p:sp>
+      <p:sp>
+        <p:nvSpPr>
+          <p:cNvPr id="10" name="TextBox 9"/>
+          <p:cNvSpPr txBox="1"/>
+          <p:nvPr/>
+        </p:nvSpPr>
+        <p:spPr>
+          <a:xfrm>
+            <a:off x="694944" y="2688336"/>
+            <a:ext cx="2240280" cy="1261872"/>
+          </a:xfrm>
+          <a:prstGeom prst="rect">
+            <a:avLst/>
+          </a:prstGeom>
+          <a:noFill/>
+        </p:spPr>
+        <p:txBody>
+          <a:bodyPr wrap="square" lIns="36576" rIns="36576" tIns="18288" bIns="18288">
+            <a:spAutoFit/>
+          </a:bodyPr>
+          <a:lstStyle/>
+          <a:p>
+            <a:pPr algn="ctr">
+              <a:defRPr sz="1500" b="1">
+                <a:solidFill>
+                  <a:srgbClr val="173E45"/>
+                </a:solidFill>
+                <a:latin typeface="Aptos"/>
+              </a:defRPr>
+            </a:pPr>
+            <a:r>
+              <a:t>Six hypothetical labels</a:t>
+            </a:r>
+          </a:p>
+          <a:p>
+            <a:pPr algn="ctr">
+              <a:defRPr sz="1500" b="1">
+                <a:solidFill>
+                  <a:srgbClr val="173E45"/>
+                </a:solidFill>
+                <a:latin typeface="Aptos"/>
+              </a:defRPr>
+            </a:pPr>
+            <a:r>
+              <a:t>Each write stays attached to its source.</a:t>
+            </a:r>
+          </a:p>
+        </p:txBody>
+      </p:sp>
+      <p:sp>
+        <p:nvSpPr>
+          <p:cNvPr id="11" name="TextBox 10"/>
+          <p:cNvSpPr txBox="1"/>
+          <p:nvPr/>
+        </p:nvSpPr>
+        <p:spPr>
+          <a:xfrm>
+            <a:off x="667512" y="4306824"/>
+            <a:ext cx="2286000" cy="438912"/>
+          </a:xfrm>
+          <a:prstGeom prst="rect">
+            <a:avLst/>
+          </a:prstGeom>
+          <a:noFill/>
+        </p:spPr>
+        <p:txBody>
+          <a:bodyPr wrap="square" lIns="36576" rIns="36576" tIns="18288" bIns="18288">
+            <a:spAutoFit/>
+          </a:bodyPr>
+          <a:lstStyle/>
+          <a:p>
+            <a:pPr algn="ctr">
+              <a:defRPr sz="1200" b="0">
+                <a:solidFill>
+                  <a:srgbClr val="64777A"/>
+                </a:solidFill>
+                <a:latin typeface="Aptos"/>
+              </a:defRPr>
+            </a:pPr>
+            <a:r>
+              <a:t>Who said which value?</a:t>
+            </a:r>
+          </a:p>
+        </p:txBody>
+      </p:sp>
+      <p:sp>
+        <p:nvSpPr>
+          <p:cNvPr id="12" name="TextBox 11"/>
+          <p:cNvSpPr txBox="1"/>
+          <p:nvPr/>
+        </p:nvSpPr>
+        <p:spPr>
+          <a:xfrm>
+            <a:off x="3108960" y="3246120"/>
+            <a:ext cx="228600" cy="411480"/>
+          </a:xfrm>
+          <a:prstGeom prst="rect">
+            <a:avLst/>
+          </a:prstGeom>
+          <a:noFill/>
+        </p:spPr>
+        <p:txBody>
+          <a:bodyPr wrap="square" lIns="36576" rIns="36576" tIns="18288" bIns="18288">
+            <a:spAutoFit/>
+          </a:bodyPr>
+          <a:lstStyle/>
+          <a:p>
+            <a:pPr algn="ctr">
+              <a:defRPr sz="2400" b="1">
+                <a:solidFill>
+                  <a:srgbClr val="2F7775"/>
+                </a:solidFill>
+                <a:latin typeface="Aptos"/>
+              </a:defRPr>
+            </a:pPr>
+          </a:p>
+        </p:txBody>
+      </p:sp>
+      <p:sp>
+        <p:nvSpPr>
+          <p:cNvPr id="13" name="Rounded Rectangle 12"/>
+          <p:cNvSpPr/>
+          <p:nvPr/>
+        </p:nvSpPr>
+        <p:spPr>
+          <a:xfrm>
+            <a:off x="3346704" y="1865376"/>
+            <a:ext cx="2560320" cy="3108960"/>
+          </a:xfrm>
+          <a:prstGeom prst="roundRect">
+            <a:avLst/>
+          </a:prstGeom>
+          <a:solidFill>
+            <a:srgbClr val="FFFFFF"/>
+          </a:solidFill>
+          <a:ln w="19050">
+            <a:solidFill>
+              <a:srgbClr val="E8B653"/>
+            </a:solidFill>
+          </a:ln>
+        </p:spPr>
+        <p:style>
+          <a:lnRef idx="1">
+            <a:schemeClr val="accent1"/>
+          </a:lnRef>
+          <a:fillRef idx="3">
+            <a:schemeClr val="accent1"/>
+          </a:fillRef>
+          <a:effectRef idx="2">
+            <a:schemeClr val="accent1"/>
+          </a:effectRef>
+          <a:fontRef idx="minor">
+            <a:schemeClr val="lt1"/>
+          </a:fontRef>
+        </p:style>
+        <p:txBody>
+          <a:bodyPr rtlCol="0" anchor="ctr"/>
+          <a:lstStyle/>
+          <a:p>
+            <a:pPr algn="ctr"/>
+          </a:p>
+        </p:txBody>
+      </p:sp>
+      <p:sp>
+        <p:nvSpPr>
+          <p:cNvPr id="14" name="Rounded Rectangle 13"/>
+          <p:cNvSpPr/>
+          <p:nvPr/>
+        </p:nvSpPr>
+        <p:spPr>
+          <a:xfrm>
+            <a:off x="3346704" y="1865376"/>
+            <a:ext cx="2560320" cy="530352"/>
+          </a:xfrm>
+          <a:prstGeom prst="roundRect">
+            <a:avLst/>
+          </a:prstGeom>
+          <a:solidFill>
+            <a:srgbClr val="E8B653"/>
+          </a:solidFill>
+          <a:ln w="19050">
+            <a:solidFill>
+              <a:srgbClr val="E8B653"/>
+            </a:solidFill>
+          </a:ln>
+        </p:spPr>
+        <p:style>
+          <a:lnRef idx="1">
+            <a:schemeClr val="accent1"/>
+          </a:lnRef>
+          <a:fillRef idx="3">
+            <a:schemeClr val="accent1"/>
+          </a:fillRef>
+          <a:effectRef idx="2">
+            <a:schemeClr val="accent1"/>
+          </a:effectRef>
+          <a:fontRef idx="minor">
+            <a:schemeClr val="lt1"/>
+          </a:fontRef>
+        </p:style>
+        <p:txBody>
+          <a:bodyPr rtlCol="0" anchor="ctr"/>
+          <a:lstStyle/>
+          <a:p>
+            <a:pPr algn="ctr"/>
+          </a:p>
+        </p:txBody>
+      </p:sp>
+      <p:sp>
+        <p:nvSpPr>
+          <p:cNvPr id="15" name="TextBox 14"/>
+          <p:cNvSpPr txBox="1"/>
+          <p:nvPr/>
+        </p:nvSpPr>
+        <p:spPr>
+          <a:xfrm>
+            <a:off x="3438144" y="1984248"/>
+            <a:ext cx="2377440" cy="292608"/>
+          </a:xfrm>
+          <a:prstGeom prst="rect">
+            <a:avLst/>
+          </a:prstGeom>
+          <a:noFill/>
+        </p:spPr>
+        <p:txBody>
+          <a:bodyPr wrap="square" lIns="36576" rIns="36576" tIns="18288" bIns="18288">
+            <a:spAutoFit/>
+          </a:bodyPr>
+          <a:lstStyle/>
+          <a:p>
+            <a:pPr algn="ctr">
+              <a:defRPr sz="1500" b="1">
+                <a:solidFill>
+                  <a:srgbClr val="FFFFFF"/>
+                </a:solidFill>
+                <a:latin typeface="Aptos"/>
+              </a:defRPr>
+            </a:pPr>
+            <a:r>
+              <a:t>2  RELATION</a:t>
+            </a:r>
+          </a:p>
+        </p:txBody>
+      </p:sp>
+      <p:sp>
+        <p:nvSpPr>
+          <p:cNvPr id="16" name="TextBox 15"/>
+          <p:cNvSpPr txBox="1"/>
+          <p:nvPr/>
+        </p:nvSpPr>
+        <p:spPr>
+          <a:xfrm>
+            <a:off x="3511296" y="2688336"/>
+            <a:ext cx="2240280" cy="1261872"/>
+          </a:xfrm>
+          <a:prstGeom prst="rect">
+            <a:avLst/>
+          </a:prstGeom>
+          <a:noFill/>
+        </p:spPr>
+        <p:txBody>
+          <a:bodyPr wrap="square" lIns="36576" rIns="36576" tIns="18288" bIns="18288">
+            <a:spAutoFit/>
+          </a:bodyPr>
+          <a:lstStyle/>
+          <a:p>
+            <a:pPr algn="ctr">
+              <a:defRPr sz="1500" b="1">
+                <a:solidFill>
+                  <a:srgbClr val="173E45"/>
+                </a:solidFill>
+                <a:latin typeface="Aptos"/>
+              </a:defRPr>
+            </a:pPr>
+            <a:r>
+              <a:t>Same-key / same-scope</a:t>
+            </a:r>
+          </a:p>
+          <a:p>
+            <a:pPr algn="ctr">
+              <a:defRPr sz="1500" b="1">
+                <a:solidFill>
+                  <a:srgbClr val="173E45"/>
+                </a:solidFill>
+                <a:latin typeface="Aptos"/>
+              </a:defRPr>
+            </a:pPr>
+            <a:r>
+              <a:t>PostgreSQL vs DynamoDB = hard-conflict candidate.</a:t>
+            </a:r>
+          </a:p>
+        </p:txBody>
+      </p:sp>
+      <p:sp>
+        <p:nvSpPr>
+          <p:cNvPr id="17" name="TextBox 16"/>
+          <p:cNvSpPr txBox="1"/>
+          <p:nvPr/>
+        </p:nvSpPr>
+        <p:spPr>
+          <a:xfrm>
+            <a:off x="3483864" y="4306824"/>
+            <a:ext cx="2286000" cy="438912"/>
+          </a:xfrm>
+          <a:prstGeom prst="rect">
+            <a:avLst/>
+          </a:prstGeom>
+          <a:noFill/>
+        </p:spPr>
+        <p:txBody>
+          <a:bodyPr wrap="square" lIns="36576" rIns="36576" tIns="18288" bIns="18288">
+            <a:spAutoFit/>
+          </a:bodyPr>
+          <a:lstStyle/>
+          <a:p>
+            <a:pPr algn="ctr">
+              <a:defRPr sz="1200" b="0">
+                <a:solidFill>
+                  <a:srgbClr val="64777A"/>
+                </a:solidFill>
+                <a:latin typeface="Aptos"/>
+              </a:defRPr>
+            </a:pPr>
+            <a:r>
+              <a:t>Can both be true?</a:t>
+            </a:r>
+          </a:p>
+        </p:txBody>
+      </p:sp>
+      <p:sp>
+        <p:nvSpPr>
+          <p:cNvPr id="18" name="TextBox 17"/>
+          <p:cNvSpPr txBox="1"/>
+          <p:nvPr/>
+        </p:nvSpPr>
+        <p:spPr>
+          <a:xfrm>
+            <a:off x="5925312" y="3246120"/>
+            <a:ext cx="228600" cy="411480"/>
+          </a:xfrm>
+          <a:prstGeom prst="rect">
+            <a:avLst/>
+          </a:prstGeom>
+          <a:noFill/>
+        </p:spPr>
+        <p:txBody>
+          <a:bodyPr wrap="square" lIns="36576" rIns="36576" tIns="18288" bIns="18288">
+            <a:spAutoFit/>
+          </a:bodyPr>
+          <a:lstStyle/>
+          <a:p>
+            <a:pPr algn="ctr">
+              <a:defRPr sz="2400" b="1">
+                <a:solidFill>
+                  <a:srgbClr val="2F7775"/>
+                </a:solidFill>
+                <a:latin typeface="Aptos"/>
+              </a:defRPr>
+            </a:pPr>
+          </a:p>
+        </p:txBody>
+      </p:sp>
+      <p:sp>
+        <p:nvSpPr>
+          <p:cNvPr id="19" name="Rounded Rectangle 18"/>
+          <p:cNvSpPr/>
+          <p:nvPr/>
+        </p:nvSpPr>
+        <p:spPr>
+          <a:xfrm>
+            <a:off x="6163056" y="1865376"/>
+            <a:ext cx="2560320" cy="3108960"/>
+          </a:xfrm>
+          <a:prstGeom prst="roundRect">
+            <a:avLst/>
+          </a:prstGeom>
+          <a:solidFill>
+            <a:srgbClr val="FFFFFF"/>
+          </a:solidFill>
+          <a:ln w="19050">
+            <a:solidFill>
+              <a:srgbClr val="7186A4"/>
+            </a:solidFill>
+          </a:ln>
+        </p:spPr>
+        <p:style>
+          <a:lnRef idx="1">
+            <a:schemeClr val="accent1"/>
+          </a:lnRef>
+          <a:fillRef idx="3">
+            <a:schemeClr val="accent1"/>
+          </a:fillRef>
+          <a:effectRef idx="2">
+            <a:schemeClr val="accent1"/>
+          </a:effectRef>
+          <a:fontRef idx="minor">
+            <a:schemeClr val="lt1"/>
+          </a:fontRef>
+        </p:style>
+        <p:txBody>
+          <a:bodyPr rtlCol="0" anchor="ctr"/>
+          <a:lstStyle/>
+          <a:p>
+            <a:pPr algn="ctr"/>
+          </a:p>
+        </p:txBody>
+      </p:sp>
+      <p:sp>
+        <p:nvSpPr>
+          <p:cNvPr id="20" name="Rounded Rectangle 19"/>
+          <p:cNvSpPr/>
+          <p:nvPr/>
+        </p:nvSpPr>
+        <p:spPr>
+          <a:xfrm>
+            <a:off x="6163056" y="1865376"/>
+            <a:ext cx="2560320" cy="530352"/>
+          </a:xfrm>
+          <a:prstGeom prst="roundRect">
+            <a:avLst/>
+          </a:prstGeom>
+          <a:solidFill>
+            <a:srgbClr val="7186A4"/>
+          </a:solidFill>
+          <a:ln w="19050">
+            <a:solidFill>
+              <a:srgbClr val="7186A4"/>
+            </a:solidFill>
+          </a:ln>
+        </p:spPr>
+        <p:style>
+          <a:lnRef idx="1">
+            <a:schemeClr val="accent1"/>
+          </a:lnRef>
+          <a:fillRef idx="3">
+            <a:schemeClr val="accent1"/>
+          </a:fillRef>
+          <a:effectRef idx="2">
+            <a:schemeClr val="accent1"/>
+          </a:effectRef>
+          <a:fontRef idx="minor">
+            <a:schemeClr val="lt1"/>
+          </a:fontRef>
+        </p:style>
+        <p:txBody>
+          <a:bodyPr rtlCol="0" anchor="ctr"/>
+          <a:lstStyle/>
+          <a:p>
+            <a:pPr algn="ctr"/>
+          </a:p>
+        </p:txBody>
+      </p:sp>
+      <p:sp>
+        <p:nvSpPr>
+          <p:cNvPr id="21" name="TextBox 20"/>
+          <p:cNvSpPr txBox="1"/>
+          <p:nvPr/>
+        </p:nvSpPr>
+        <p:spPr>
+          <a:xfrm>
+            <a:off x="6254496" y="1984248"/>
+            <a:ext cx="2377440" cy="292608"/>
+          </a:xfrm>
+          <a:prstGeom prst="rect">
+            <a:avLst/>
+          </a:prstGeom>
+          <a:noFill/>
+        </p:spPr>
+        <p:txBody>
+          <a:bodyPr wrap="square" lIns="36576" rIns="36576" tIns="18288" bIns="18288">
+            <a:spAutoFit/>
+          </a:bodyPr>
+          <a:lstStyle/>
+          <a:p>
+            <a:pPr algn="ctr">
+              <a:defRPr sz="1500" b="1">
+                <a:solidFill>
+                  <a:srgbClr val="FFFFFF"/>
+                </a:solidFill>
+                <a:latin typeface="Aptos"/>
+              </a:defRPr>
+            </a:pPr>
+            <a:r>
+              <a:t>3  POLICY ACTION</a:t>
+            </a:r>
+          </a:p>
+        </p:txBody>
+      </p:sp>
+      <p:sp>
+        <p:nvSpPr>
+          <p:cNvPr id="22" name="TextBox 21"/>
+          <p:cNvSpPr txBox="1"/>
+          <p:nvPr/>
+        </p:nvSpPr>
+        <p:spPr>
+          <a:xfrm>
+            <a:off x="6327648" y="2688336"/>
+            <a:ext cx="2240280" cy="1261872"/>
+          </a:xfrm>
+          <a:prstGeom prst="rect">
+            <a:avLst/>
+          </a:prstGeom>
+          <a:noFill/>
+        </p:spPr>
+        <p:txBody>
+          <a:bodyPr wrap="square" lIns="36576" rIns="36576" tIns="18288" bIns="18288">
+            <a:spAutoFit/>
+          </a:bodyPr>
+          <a:lstStyle/>
+          <a:p>
+            <a:pPr algn="ctr">
+              <a:defRPr sz="1500" b="1">
+                <a:solidFill>
+                  <a:srgbClr val="173E45"/>
+                </a:solidFill>
+                <a:latin typeface="Aptos"/>
+              </a:defRPr>
+            </a:pPr>
+            <a:r>
+              <a:t>VERIFY</a:t>
+            </a:r>
+          </a:p>
+          <a:p>
+            <a:pPr algn="ctr">
+              <a:defRPr sz="1500" b="1">
+                <a:solidFill>
+                  <a:srgbClr val="173E45"/>
+                </a:solidFill>
+                <a:latin typeface="Aptos"/>
+              </a:defRPr>
+            </a:pPr>
+            <a:r>
+              <a:t>Only with a named evidence source + deterministic rule.</a:t>
+            </a:r>
+          </a:p>
+        </p:txBody>
+      </p:sp>
+      <p:sp>
+        <p:nvSpPr>
+          <p:cNvPr id="23" name="TextBox 22"/>
+          <p:cNvSpPr txBox="1"/>
+          <p:nvPr/>
+        </p:nvSpPr>
+        <p:spPr>
+          <a:xfrm>
+            <a:off x="6300216" y="4306824"/>
+            <a:ext cx="2286000" cy="438912"/>
+          </a:xfrm>
+          <a:prstGeom prst="rect">
+            <a:avLst/>
+          </a:prstGeom>
+          <a:noFill/>
+        </p:spPr>
+        <p:txBody>
+          <a:bodyPr wrap="square" lIns="36576" rIns="36576" tIns="18288" bIns="18288">
+            <a:spAutoFit/>
+          </a:bodyPr>
+          <a:lstStyle/>
+          <a:p>
+            <a:pPr algn="ctr">
+              <a:defRPr sz="1200" b="0">
+                <a:solidFill>
+                  <a:srgbClr val="64777A"/>
+                </a:solidFill>
+                <a:latin typeface="Aptos"/>
+              </a:defRPr>
+            </a:pPr>
+            <a:r>
+              <a:t>What should happen?</a:t>
+            </a:r>
+          </a:p>
+        </p:txBody>
+      </p:sp>
+      <p:sp>
+        <p:nvSpPr>
+          <p:cNvPr id="24" name="TextBox 23"/>
+          <p:cNvSpPr txBox="1"/>
+          <p:nvPr/>
+        </p:nvSpPr>
+        <p:spPr>
+          <a:xfrm>
+            <a:off x="8741664" y="3246120"/>
+            <a:ext cx="228600" cy="411480"/>
+          </a:xfrm>
+          <a:prstGeom prst="rect">
+            <a:avLst/>
+          </a:prstGeom>
+          <a:noFill/>
+        </p:spPr>
+        <p:txBody>
+          <a:bodyPr wrap="square" lIns="36576" rIns="36576" tIns="18288" bIns="18288">
+            <a:spAutoFit/>
+          </a:bodyPr>
+          <a:lstStyle/>
+          <a:p>
+            <a:pPr algn="ctr">
+              <a:defRPr sz="2400" b="1">
+                <a:solidFill>
+                  <a:srgbClr val="2F7775"/>
+                </a:solidFill>
+                <a:latin typeface="Aptos"/>
+              </a:defRPr>
+            </a:pPr>
+          </a:p>
+        </p:txBody>
+      </p:sp>
+      <p:sp>
+        <p:nvSpPr>
+          <p:cNvPr id="25" name="Rounded Rectangle 24"/>
+          <p:cNvSpPr/>
+          <p:nvPr/>
+        </p:nvSpPr>
+        <p:spPr>
+          <a:xfrm>
+            <a:off x="8979408" y="1865376"/>
+            <a:ext cx="2560320" cy="3108960"/>
+          </a:xfrm>
+          <a:prstGeom prst="roundRect">
+            <a:avLst/>
+          </a:prstGeom>
+          <a:solidFill>
+            <a:srgbClr val="FFFFFF"/>
+          </a:solidFill>
+          <a:ln w="19050">
+            <a:solidFill>
+              <a:srgbClr val="D87965"/>
+            </a:solidFill>
+          </a:ln>
+        </p:spPr>
+        <p:style>
+          <a:lnRef idx="1">
+            <a:schemeClr val="accent1"/>
+          </a:lnRef>
+          <a:fillRef idx="3">
+            <a:schemeClr val="accent1"/>
+          </a:fillRef>
+          <a:effectRef idx="2">
+            <a:schemeClr val="accent1"/>
+          </a:effectRef>
+          <a:fontRef idx="minor">
+            <a:schemeClr val="lt1"/>
+          </a:fontRef>
+        </p:style>
+        <p:txBody>
+          <a:bodyPr rtlCol="0" anchor="ctr"/>
+          <a:lstStyle/>
+          <a:p>
+            <a:pPr algn="ctr"/>
+          </a:p>
+        </p:txBody>
+      </p:sp>
+      <p:sp>
+        <p:nvSpPr>
+          <p:cNvPr id="26" name="Rounded Rectangle 25"/>
+          <p:cNvSpPr/>
+          <p:nvPr/>
+        </p:nvSpPr>
+        <p:spPr>
+          <a:xfrm>
+            <a:off x="8979408" y="1865376"/>
+            <a:ext cx="2560320" cy="530352"/>
+          </a:xfrm>
+          <a:prstGeom prst="roundRect">
+            <a:avLst/>
+          </a:prstGeom>
+          <a:solidFill>
+            <a:srgbClr val="D87965"/>
+          </a:solidFill>
+          <a:ln w="19050">
+            <a:solidFill>
+              <a:srgbClr val="D87965"/>
+            </a:solidFill>
+          </a:ln>
+        </p:spPr>
+        <p:style>
+          <a:lnRef idx="1">
+            <a:schemeClr val="accent1"/>
+          </a:lnRef>
+          <a:fillRef idx="3">
+            <a:schemeClr val="accent1"/>
+          </a:fillRef>
+          <a:effectRef idx="2">
+            <a:schemeClr val="accent1"/>
+          </a:effectRef>
+          <a:fontRef idx="minor">
+            <a:schemeClr val="lt1"/>
+          </a:fontRef>
+        </p:style>
+        <p:txBody>
+          <a:bodyPr rtlCol="0" anchor="ctr"/>
+          <a:lstStyle/>
+          <a:p>
+            <a:pPr algn="ctr"/>
+          </a:p>
+        </p:txBody>
+      </p:sp>
+      <p:sp>
+        <p:nvSpPr>
+          <p:cNvPr id="27" name="TextBox 26"/>
+          <p:cNvSpPr txBox="1"/>
+          <p:nvPr/>
+        </p:nvSpPr>
+        <p:spPr>
+          <a:xfrm>
+            <a:off x="9070848" y="1984248"/>
+            <a:ext cx="2377440" cy="292608"/>
+          </a:xfrm>
+          <a:prstGeom prst="rect">
+            <a:avLst/>
+          </a:prstGeom>
+          <a:noFill/>
+        </p:spPr>
+        <p:txBody>
+          <a:bodyPr wrap="square" lIns="36576" rIns="36576" tIns="18288" bIns="18288">
+            <a:spAutoFit/>
+          </a:bodyPr>
+          <a:lstStyle/>
+          <a:p>
+            <a:pPr algn="ctr">
+              <a:defRPr sz="1500" b="1">
+                <a:solidFill>
+                  <a:srgbClr val="FFFFFF"/>
+                </a:solidFill>
+                <a:latin typeface="Aptos"/>
+              </a:defRPr>
+            </a:pPr>
+            <a:r>
+              <a:t>4  RESULTING STATE</a:t>
+            </a:r>
+          </a:p>
+        </p:txBody>
+      </p:sp>
+      <p:sp>
+        <p:nvSpPr>
+          <p:cNvPr id="28" name="TextBox 27"/>
+          <p:cNvSpPr txBox="1"/>
+          <p:nvPr/>
+        </p:nvSpPr>
+        <p:spPr>
+          <a:xfrm>
+            <a:off x="9144000" y="2688336"/>
+            <a:ext cx="2240280" cy="1261872"/>
+          </a:xfrm>
+          <a:prstGeom prst="rect">
+            <a:avLst/>
+          </a:prstGeom>
+          <a:noFill/>
+        </p:spPr>
+        <p:txBody>
+          <a:bodyPr wrap="square" lIns="36576" rIns="36576" tIns="18288" bIns="18288">
+            <a:spAutoFit/>
+          </a:bodyPr>
+          <a:lstStyle/>
+          <a:p>
+            <a:pPr algn="ctr">
+              <a:defRPr sz="1500" b="1">
+                <a:solidFill>
+                  <a:srgbClr val="173E45"/>
+                </a:solidFill>
+                <a:latin typeface="Aptos"/>
+              </a:defRPr>
+            </a:pPr>
+            <a:r>
+              <a:t>Evidence not supplied</a:t>
+            </a:r>
+          </a:p>
+          <a:p>
+            <a:pPr algn="ctr">
+              <a:defRPr sz="1500" b="1">
+                <a:solidFill>
+                  <a:srgbClr val="173E45"/>
+                </a:solidFill>
+                <a:latin typeface="Aptos"/>
+              </a:defRPr>
+            </a:pPr>
+            <a:r>
+              <a:t>→ UNRESOLVED; keep claims + provenance.</a:t>
+            </a:r>
+          </a:p>
+        </p:txBody>
+      </p:sp>
+      <p:sp>
+        <p:nvSpPr>
+          <p:cNvPr id="29" name="TextBox 28"/>
+          <p:cNvSpPr txBox="1"/>
+          <p:nvPr/>
+        </p:nvSpPr>
+        <p:spPr>
+          <a:xfrm>
+            <a:off x="9116568" y="4306824"/>
+            <a:ext cx="2286000" cy="438912"/>
+          </a:xfrm>
+          <a:prstGeom prst="rect">
+            <a:avLst/>
+          </a:prstGeom>
+          <a:noFill/>
+        </p:spPr>
+        <p:txBody>
+          <a:bodyPr wrap="square" lIns="36576" rIns="36576" tIns="18288" bIns="18288">
+            <a:spAutoFit/>
+          </a:bodyPr>
+          <a:lstStyle/>
+          <a:p>
+            <a:pPr algn="ctr">
+              <a:defRPr sz="1200" b="0">
+                <a:solidFill>
+                  <a:srgbClr val="64777A"/>
+                </a:solidFill>
+                <a:latin typeface="Aptos"/>
+              </a:defRPr>
+            </a:pPr>
+            <a:r>
+              <a:t>What gets published?</a:t>
+            </a:r>
+          </a:p>
+        </p:txBody>
+      </p:sp>
+      <p:sp>
+        <p:nvSpPr>
+          <p:cNvPr id="30" name="Rounded Rectangle 29"/>
+          <p:cNvSpPr/>
+          <p:nvPr/>
+        </p:nvSpPr>
+        <p:spPr>
+          <a:xfrm>
+            <a:off x="914400" y="5330952"/>
+            <a:ext cx="10332720" cy="621792"/>
+          </a:xfrm>
+          <a:prstGeom prst="roundRect">
+            <a:avLst/>
+          </a:prstGeom>
+          <a:solidFill>
+            <a:srgbClr val="F9E8E2"/>
+          </a:solidFill>
+          <a:ln w="19050">
+            <a:solidFill>
+              <a:srgbClr val="D87965"/>
+            </a:solidFill>
+          </a:ln>
+        </p:spPr>
+        <p:style>
+          <a:lnRef idx="1">
+            <a:schemeClr val="accent1"/>
+          </a:lnRef>
+          <a:fillRef idx="3">
+            <a:schemeClr val="accent1"/>
+          </a:fillRef>
+          <a:effectRef idx="2">
+            <a:schemeClr val="accent1"/>
+          </a:effectRef>
+          <a:fontRef idx="minor">
+            <a:schemeClr val="lt1"/>
+          </a:fontRef>
+        </p:style>
+        <p:txBody>
+          <a:bodyPr rtlCol="0" anchor="ctr"/>
+          <a:lstStyle/>
+          <a:p>
+            <a:pPr algn="ctr"/>
+          </a:p>
+        </p:txBody>
+      </p:sp>
+      <p:sp>
+        <p:nvSpPr>
+          <p:cNvPr id="31" name="TextBox 30"/>
+          <p:cNvSpPr txBox="1"/>
+          <p:nvPr/>
+        </p:nvSpPr>
+        <p:spPr>
+          <a:xfrm>
+            <a:off x="1078992" y="5504688"/>
+            <a:ext cx="10012680" cy="228600"/>
+          </a:xfrm>
+          <a:prstGeom prst="rect">
+            <a:avLst/>
+          </a:prstGeom>
+          <a:noFill/>
+        </p:spPr>
+        <p:txBody>
+          <a:bodyPr wrap="square" lIns="36576" rIns="36576" tIns="18288" bIns="18288">
+            <a:spAutoFit/>
+          </a:bodyPr>
+          <a:lstStyle/>
+          <a:p>
+            <a:pPr algn="ctr">
+              <a:defRPr sz="1300" b="1">
+                <a:solidFill>
+                  <a:srgbClr val="173E45"/>
+                </a:solidFill>
+                <a:latin typeface="Aptos"/>
+              </a:defRPr>
+            </a:pPr>
+            <a:r>
+              <a:t>TURTLE ANALOGY: pause when evidence is missing — teaching analogy only, not a protocol component.</a:t>
+            </a:r>
+          </a:p>
+        </p:txBody>
+      </p:sp>
+    </p:spTree>
+  </p:cSld>
+  <p:clrMapOvr>
+    <a:masterClrMapping/>
+  </p:clrMapOvr>
+</p:sld>
+</file>
+
+<file path=ppt/slides/slide19.xml><?xml version="1.0" encoding="utf-8"?>
+<p:sld xmlns:a="http://schemas.openxmlformats.org/drawingml/2006/main" xmlns:p="http://schemas.openxmlformats.org/presentationml/2006/main" xmlns:r="http://schemas.openxmlformats.org/officeDocument/2006/relationships">
+  <p:cSld>
+    <p:bg>
+      <p:bgPr>
+        <a:solidFill>
+          <a:srgbClr val="F7F3E9"/>
+        </a:solidFill>
+        <a:effectLst/>
+      </p:bgPr>
+    </p:bg>
+    <p:spTree>
+      <p:nvGrpSpPr>
+        <p:cNvPr id="1" name=""/>
+        <p:cNvGrpSpPr/>
+        <p:nvPr/>
+      </p:nvGrpSpPr>
+      <p:grpSpPr/>
+      <p:sp>
+        <p:nvSpPr>
+          <p:cNvPr id="2" name="TextBox 1"/>
+          <p:cNvSpPr txBox="1"/>
+          <p:nvPr/>
+        </p:nvSpPr>
+        <p:spPr>
+          <a:xfrm>
+            <a:off x="502920" y="219456"/>
+            <a:ext cx="11155680" cy="274320"/>
+          </a:xfrm>
+          <a:prstGeom prst="rect">
+            <a:avLst/>
+          </a:prstGeom>
+          <a:noFill/>
+        </p:spPr>
+        <p:txBody>
+          <a:bodyPr wrap="square" lIns="36576" rIns="36576" tIns="18288" bIns="18288">
+            <a:spAutoFit/>
+          </a:bodyPr>
+          <a:lstStyle/>
+          <a:p>
+            <a:pPr algn="l">
+              <a:defRPr sz="1200" b="1">
+                <a:solidFill>
+                  <a:srgbClr val="2F7775"/>
+                </a:solidFill>
+                <a:latin typeface="Aptos"/>
+              </a:defRPr>
+            </a:pPr>
+            <a:r>
+              <a:t>AVA EVALUATION • MONDAY REVIEW • PROVISIONAL PACK</a:t>
+            </a:r>
+          </a:p>
+        </p:txBody>
+      </p:sp>
+      <p:sp>
+        <p:nvSpPr>
+          <p:cNvPr id="3" name="TextBox 2"/>
+          <p:cNvSpPr txBox="1"/>
+          <p:nvPr/>
+        </p:nvSpPr>
+        <p:spPr>
+          <a:xfrm>
+            <a:off x="502920" y="603504"/>
+            <a:ext cx="11155680" cy="566928"/>
+          </a:xfrm>
+          <a:prstGeom prst="rect">
+            <a:avLst/>
+          </a:prstGeom>
+          <a:noFill/>
+        </p:spPr>
+        <p:txBody>
+          <a:bodyPr wrap="square" lIns="36576" rIns="36576" tIns="18288" bIns="18288">
+            <a:spAutoFit/>
+          </a:bodyPr>
+          <a:lstStyle/>
+          <a:p>
+            <a:pPr algn="l">
+              <a:defRPr sz="2700" b="1">
+                <a:solidFill>
+                  <a:srgbClr val="173E45"/>
+                </a:solidFill>
+                <a:latin typeface="Aptos"/>
+              </a:defRPr>
+            </a:pPr>
+            <a:r>
+              <a:t>Key design points to get right before any build</a:t>
+            </a:r>
+          </a:p>
+        </p:txBody>
+      </p:sp>
+      <p:sp>
+        <p:nvSpPr>
+          <p:cNvPr id="4" name="TextBox 3"/>
+          <p:cNvSpPr txBox="1"/>
+          <p:nvPr/>
+        </p:nvSpPr>
+        <p:spPr>
+          <a:xfrm>
+            <a:off x="530352" y="1197864"/>
+            <a:ext cx="10972800" cy="384048"/>
+          </a:xfrm>
+          <a:prstGeom prst="rect">
+            <a:avLst/>
+          </a:prstGeom>
+          <a:noFill/>
+        </p:spPr>
+        <p:txBody>
+          <a:bodyPr wrap="square" lIns="36576" rIns="36576" tIns="18288" bIns="18288">
+            <a:spAutoFit/>
+          </a:bodyPr>
+          <a:lstStyle/>
+          <a:p>
+            <a:pPr algn="l">
+              <a:defRPr sz="1400" b="0">
+                <a:solidFill>
+                  <a:srgbClr val="64777A"/>
+                </a:solidFill>
+                <a:latin typeface="Aptos"/>
+              </a:defRPr>
+            </a:pPr>
+            <a:r>
+              <a:t>These are open design questions, not claims that the design is already settled.</a:t>
+            </a:r>
+          </a:p>
+        </p:txBody>
+      </p:sp>
+      <p:sp>
+        <p:nvSpPr>
+          <p:cNvPr id="5" name="Rectangle 4"/>
+          <p:cNvSpPr/>
+          <p:nvPr/>
+        </p:nvSpPr>
+        <p:spPr>
+          <a:xfrm>
+            <a:off x="502920" y="1088136"/>
+            <a:ext cx="11155680" cy="22860"/>
+          </a:xfrm>
+          <a:prstGeom prst="rect">
+            <a:avLst/>
+          </a:prstGeom>
+          <a:solidFill>
+            <a:srgbClr val="2F7775"/>
+          </a:solidFill>
+          <a:ln>
+            <a:noFill/>
+          </a:ln>
+        </p:spPr>
+        <p:style>
+          <a:lnRef idx="1">
+            <a:schemeClr val="accent1"/>
+          </a:lnRef>
+          <a:fillRef idx="3">
+            <a:schemeClr val="accent1"/>
+          </a:fillRef>
+          <a:effectRef idx="2">
+            <a:schemeClr val="accent1"/>
+          </a:effectRef>
+          <a:fontRef idx="minor">
+            <a:schemeClr val="lt1"/>
+          </a:fontRef>
+        </p:style>
+        <p:txBody>
+          <a:bodyPr rtlCol="0" anchor="ctr"/>
+          <a:lstStyle/>
+          <a:p>
+            <a:pPr algn="ctr"/>
+          </a:p>
+        </p:txBody>
+      </p:sp>
+      <p:sp>
+        <p:nvSpPr>
+          <p:cNvPr id="6" name="TextBox 5"/>
+          <p:cNvSpPr txBox="1"/>
+          <p:nvPr/>
+        </p:nvSpPr>
+        <p:spPr>
+          <a:xfrm>
+            <a:off x="530352" y="6492240"/>
+            <a:ext cx="9875520" cy="182880"/>
+          </a:xfrm>
+          <a:prstGeom prst="rect">
+            <a:avLst/>
+          </a:prstGeom>
+          <a:noFill/>
+        </p:spPr>
+        <p:txBody>
+          <a:bodyPr wrap="square" lIns="36576" rIns="36576" tIns="18288" bIns="18288">
+            <a:spAutoFit/>
+          </a:bodyPr>
+          <a:lstStyle/>
+          <a:p>
+            <a:pPr algn="l">
+              <a:defRPr sz="900" b="0">
+                <a:solidFill>
+                  <a:srgbClr val="64777A"/>
+                </a:solidFill>
+                <a:latin typeface="Aptos"/>
+              </a:defRPr>
+            </a:pPr>
+            <a:r>
+              <a:t>Review aid only • novelty unresolved • no implementation authorized</a:t>
+            </a:r>
+          </a:p>
+        </p:txBody>
+      </p:sp>
+      <p:sp>
+        <p:nvSpPr>
+          <p:cNvPr id="7" name="Rounded Rectangle 6"/>
+          <p:cNvSpPr/>
+          <p:nvPr/>
+        </p:nvSpPr>
+        <p:spPr>
+          <a:xfrm>
+            <a:off x="594360" y="1700784"/>
+            <a:ext cx="5257800" cy="932688"/>
+          </a:xfrm>
+          <a:prstGeom prst="roundRect">
+            <a:avLst/>
+          </a:prstGeom>
+          <a:solidFill>
+            <a:srgbClr val="FFFFFF"/>
+          </a:solidFill>
+          <a:ln w="19050">
+            <a:solidFill>
+              <a:srgbClr val="2F7775"/>
+            </a:solidFill>
+          </a:ln>
+        </p:spPr>
+        <p:style>
+          <a:lnRef idx="1">
+            <a:schemeClr val="accent1"/>
+          </a:lnRef>
+          <a:fillRef idx="3">
+            <a:schemeClr val="accent1"/>
+          </a:fillRef>
+          <a:effectRef idx="2">
+            <a:schemeClr val="accent1"/>
+          </a:effectRef>
+          <a:fontRef idx="minor">
+            <a:schemeClr val="lt1"/>
+          </a:fontRef>
+        </p:style>
+        <p:txBody>
+          <a:bodyPr rtlCol="0" anchor="ctr"/>
+          <a:lstStyle/>
+          <a:p>
+            <a:pPr algn="ctr"/>
+          </a:p>
+        </p:txBody>
+      </p:sp>
+      <p:sp>
+        <p:nvSpPr>
+          <p:cNvPr id="8" name="TextBox 7"/>
+          <p:cNvSpPr txBox="1"/>
+          <p:nvPr/>
+        </p:nvSpPr>
+        <p:spPr>
+          <a:xfrm>
+            <a:off x="777240" y="1828800"/>
+            <a:ext cx="4846320" cy="256032"/>
+          </a:xfrm>
+          <a:prstGeom prst="rect">
+            <a:avLst/>
+          </a:prstGeom>
+          <a:noFill/>
+        </p:spPr>
+        <p:txBody>
+          <a:bodyPr wrap="square" lIns="36576" rIns="36576" tIns="18288" bIns="18288">
+            <a:spAutoFit/>
+          </a:bodyPr>
+          <a:lstStyle/>
+          <a:p>
+            <a:pPr algn="l">
+              <a:defRPr sz="1600" b="1">
+                <a:solidFill>
+                  <a:srgbClr val="2F7775"/>
+                </a:solidFill>
+                <a:latin typeface="Aptos"/>
+              </a:defRPr>
+            </a:pPr>
+            <a:r>
+              <a:t>Same-key contract</a:t>
+            </a:r>
+          </a:p>
+        </p:txBody>
+      </p:sp>
+      <p:sp>
+        <p:nvSpPr>
+          <p:cNvPr id="9" name="TextBox 8"/>
+          <p:cNvSpPr txBox="1"/>
+          <p:nvPr/>
+        </p:nvSpPr>
+        <p:spPr>
+          <a:xfrm>
+            <a:off x="777240" y="2185416"/>
+            <a:ext cx="4846320" cy="274320"/>
+          </a:xfrm>
+          <a:prstGeom prst="rect">
+            <a:avLst/>
+          </a:prstGeom>
+          <a:noFill/>
+        </p:spPr>
+        <p:txBody>
+          <a:bodyPr wrap="square" lIns="36576" rIns="36576" tIns="18288" bIns="18288">
+            <a:spAutoFit/>
+          </a:bodyPr>
+          <a:lstStyle/>
+          <a:p>
+            <a:pPr algn="l">
+              <a:defRPr sz="1300" b="0">
+                <a:solidFill>
+                  <a:srgbClr val="173E45"/>
+                </a:solidFill>
+                <a:latin typeface="Aptos"/>
+              </a:defRPr>
+            </a:pPr>
+            <a:r>
+              <a:t>Key, type, role, time window, cardinality</a:t>
+            </a:r>
+          </a:p>
+        </p:txBody>
+      </p:sp>
+      <p:sp>
+        <p:nvSpPr>
+          <p:cNvPr id="10" name="Rounded Rectangle 9"/>
+          <p:cNvSpPr/>
+          <p:nvPr/>
+        </p:nvSpPr>
+        <p:spPr>
+          <a:xfrm>
+            <a:off x="6217920" y="1700784"/>
+            <a:ext cx="5257800" cy="932688"/>
+          </a:xfrm>
+          <a:prstGeom prst="roundRect">
+            <a:avLst/>
+          </a:prstGeom>
+          <a:solidFill>
+            <a:srgbClr val="FFFFFF"/>
+          </a:solidFill>
+          <a:ln w="19050">
+            <a:solidFill>
+              <a:srgbClr val="D87965"/>
+            </a:solidFill>
+          </a:ln>
+        </p:spPr>
+        <p:style>
+          <a:lnRef idx="1">
+            <a:schemeClr val="accent1"/>
+          </a:lnRef>
+          <a:fillRef idx="3">
+            <a:schemeClr val="accent1"/>
+          </a:fillRef>
+          <a:effectRef idx="2">
+            <a:schemeClr val="accent1"/>
+          </a:effectRef>
+          <a:fontRef idx="minor">
+            <a:schemeClr val="lt1"/>
+          </a:fontRef>
+        </p:style>
+        <p:txBody>
+          <a:bodyPr rtlCol="0" anchor="ctr"/>
+          <a:lstStyle/>
+          <a:p>
+            <a:pPr algn="ctr"/>
+          </a:p>
+        </p:txBody>
+      </p:sp>
+      <p:sp>
+        <p:nvSpPr>
+          <p:cNvPr id="11" name="TextBox 10"/>
+          <p:cNvSpPr txBox="1"/>
+          <p:nvPr/>
+        </p:nvSpPr>
+        <p:spPr>
+          <a:xfrm>
+            <a:off x="6400800" y="1828800"/>
+            <a:ext cx="4846320" cy="256032"/>
+          </a:xfrm>
+          <a:prstGeom prst="rect">
+            <a:avLst/>
+          </a:prstGeom>
+          <a:noFill/>
+        </p:spPr>
+        <p:txBody>
+          <a:bodyPr wrap="square" lIns="36576" rIns="36576" tIns="18288" bIns="18288">
+            <a:spAutoFit/>
+          </a:bodyPr>
+          <a:lstStyle/>
+          <a:p>
+            <a:pPr algn="l">
+              <a:defRPr sz="1600" b="1">
+                <a:solidFill>
+                  <a:srgbClr val="D87965"/>
+                </a:solidFill>
+                <a:latin typeface="Aptos"/>
+              </a:defRPr>
+            </a:pPr>
+            <a:r>
+              <a:t>Layer separation</a:t>
+            </a:r>
+          </a:p>
+        </p:txBody>
+      </p:sp>
+      <p:sp>
+        <p:nvSpPr>
+          <p:cNvPr id="12" name="TextBox 11"/>
+          <p:cNvSpPr txBox="1"/>
+          <p:nvPr/>
+        </p:nvSpPr>
+        <p:spPr>
+          <a:xfrm>
+            <a:off x="6400800" y="2185416"/>
+            <a:ext cx="4846320" cy="274320"/>
+          </a:xfrm>
+          <a:prstGeom prst="rect">
+            <a:avLst/>
+          </a:prstGeom>
+          <a:noFill/>
+        </p:spPr>
+        <p:txBody>
+          <a:bodyPr wrap="square" lIns="36576" rIns="36576" tIns="18288" bIns="18288">
+            <a:spAutoFit/>
+          </a:bodyPr>
+          <a:lstStyle/>
+          <a:p>
+            <a:pPr algn="l">
+              <a:defRPr sz="1300" b="0">
+                <a:solidFill>
+                  <a:srgbClr val="173E45"/>
+                </a:solidFill>
+                <a:latin typeface="Aptos"/>
+              </a:defRPr>
+            </a:pPr>
+            <a:r>
+              <a:t>Provenance → relation label → action → output state</a:t>
+            </a:r>
+          </a:p>
+        </p:txBody>
+      </p:sp>
+      <p:sp>
+        <p:nvSpPr>
+          <p:cNvPr id="13" name="Rounded Rectangle 12"/>
+          <p:cNvSpPr/>
+          <p:nvPr/>
+        </p:nvSpPr>
+        <p:spPr>
+          <a:xfrm>
+            <a:off x="594360" y="2889504"/>
+            <a:ext cx="5257800" cy="932688"/>
+          </a:xfrm>
+          <a:prstGeom prst="roundRect">
+            <a:avLst/>
+          </a:prstGeom>
+          <a:solidFill>
+            <a:srgbClr val="FFFFFF"/>
+          </a:solidFill>
+          <a:ln w="19050">
+            <a:solidFill>
+              <a:srgbClr val="2F7775"/>
+            </a:solidFill>
+          </a:ln>
+        </p:spPr>
+        <p:style>
+          <a:lnRef idx="1">
+            <a:schemeClr val="accent1"/>
+          </a:lnRef>
+          <a:fillRef idx="3">
+            <a:schemeClr val="accent1"/>
+          </a:fillRef>
+          <a:effectRef idx="2">
+            <a:schemeClr val="accent1"/>
+          </a:effectRef>
+          <a:fontRef idx="minor">
+            <a:schemeClr val="lt1"/>
+          </a:fontRef>
+        </p:style>
+        <p:txBody>
+          <a:bodyPr rtlCol="0" anchor="ctr"/>
+          <a:lstStyle/>
+          <a:p>
+            <a:pPr algn="ctr"/>
+          </a:p>
+        </p:txBody>
+      </p:sp>
+      <p:sp>
+        <p:nvSpPr>
+          <p:cNvPr id="14" name="TextBox 13"/>
+          <p:cNvSpPr txBox="1"/>
+          <p:nvPr/>
+        </p:nvSpPr>
+        <p:spPr>
+          <a:xfrm>
+            <a:off x="777240" y="3017520"/>
+            <a:ext cx="4846320" cy="256032"/>
+          </a:xfrm>
+          <a:prstGeom prst="rect">
+            <a:avLst/>
+          </a:prstGeom>
+          <a:noFill/>
+        </p:spPr>
+        <p:txBody>
+          <a:bodyPr wrap="square" lIns="36576" rIns="36576" tIns="18288" bIns="18288">
+            <a:spAutoFit/>
+          </a:bodyPr>
+          <a:lstStyle/>
+          <a:p>
+            <a:pPr algn="l">
+              <a:defRPr sz="1600" b="1">
+                <a:solidFill>
+                  <a:srgbClr val="2F7775"/>
+                </a:solidFill>
+                <a:latin typeface="Aptos"/>
+              </a:defRPr>
+            </a:pPr>
+            <a:r>
+              <a:t>Verify rule</a:t>
+            </a:r>
+          </a:p>
+        </p:txBody>
+      </p:sp>
+      <p:sp>
+        <p:nvSpPr>
+          <p:cNvPr id="15" name="TextBox 14"/>
+          <p:cNvSpPr txBox="1"/>
+          <p:nvPr/>
+        </p:nvSpPr>
+        <p:spPr>
+          <a:xfrm>
+            <a:off x="777240" y="3374136"/>
+            <a:ext cx="4846320" cy="274320"/>
+          </a:xfrm>
+          <a:prstGeom prst="rect">
+            <a:avLst/>
+          </a:prstGeom>
+          <a:noFill/>
+        </p:spPr>
+        <p:txBody>
+          <a:bodyPr wrap="square" lIns="36576" rIns="36576" tIns="18288" bIns="18288">
+            <a:spAutoFit/>
+          </a:bodyPr>
+          <a:lstStyle/>
+          <a:p>
+            <a:pPr algn="l">
+              <a:defRPr sz="1300" b="0">
+                <a:solidFill>
+                  <a:srgbClr val="173E45"/>
+                </a:solidFill>
+                <a:latin typeface="Aptos"/>
+              </a:defRPr>
+            </a:pPr>
+            <a:r>
+              <a:t>Allowed evidence, freshness, deterministic tie behavior</a:t>
+            </a:r>
+          </a:p>
+        </p:txBody>
+      </p:sp>
+      <p:sp>
+        <p:nvSpPr>
+          <p:cNvPr id="16" name="Rounded Rectangle 15"/>
+          <p:cNvSpPr/>
+          <p:nvPr/>
+        </p:nvSpPr>
+        <p:spPr>
+          <a:xfrm>
+            <a:off x="6217920" y="2889504"/>
+            <a:ext cx="5257800" cy="932688"/>
+          </a:xfrm>
+          <a:prstGeom prst="roundRect">
+            <a:avLst/>
+          </a:prstGeom>
+          <a:solidFill>
+            <a:srgbClr val="FFFFFF"/>
+          </a:solidFill>
+          <a:ln w="19050">
+            <a:solidFill>
+              <a:srgbClr val="D87965"/>
+            </a:solidFill>
+          </a:ln>
+        </p:spPr>
+        <p:style>
+          <a:lnRef idx="1">
+            <a:schemeClr val="accent1"/>
+          </a:lnRef>
+          <a:fillRef idx="3">
+            <a:schemeClr val="accent1"/>
+          </a:fillRef>
+          <a:effectRef idx="2">
+            <a:schemeClr val="accent1"/>
+          </a:effectRef>
+          <a:fontRef idx="minor">
+            <a:schemeClr val="lt1"/>
+          </a:fontRef>
+        </p:style>
+        <p:txBody>
+          <a:bodyPr rtlCol="0" anchor="ctr"/>
+          <a:lstStyle/>
+          <a:p>
+            <a:pPr algn="ctr"/>
+          </a:p>
+        </p:txBody>
+      </p:sp>
+      <p:sp>
+        <p:nvSpPr>
+          <p:cNvPr id="17" name="TextBox 16"/>
+          <p:cNvSpPr txBox="1"/>
+          <p:nvPr/>
+        </p:nvSpPr>
+        <p:spPr>
+          <a:xfrm>
+            <a:off x="6400800" y="3017520"/>
+            <a:ext cx="4846320" cy="256032"/>
+          </a:xfrm>
+          <a:prstGeom prst="rect">
+            <a:avLst/>
+          </a:prstGeom>
+          <a:noFill/>
+        </p:spPr>
+        <p:txBody>
+          <a:bodyPr wrap="square" lIns="36576" rIns="36576" tIns="18288" bIns="18288">
+            <a:spAutoFit/>
+          </a:bodyPr>
+          <a:lstStyle/>
+          <a:p>
+            <a:pPr algn="l">
+              <a:defRPr sz="1600" b="1">
+                <a:solidFill>
+                  <a:srgbClr val="D87965"/>
+                </a:solidFill>
+                <a:latin typeface="Aptos"/>
+              </a:defRPr>
+            </a:pPr>
+            <a:r>
+              <a:t>Fair comparison</a:t>
+            </a:r>
+          </a:p>
+        </p:txBody>
+      </p:sp>
+      <p:sp>
+        <p:nvSpPr>
+          <p:cNvPr id="18" name="TextBox 17"/>
+          <p:cNvSpPr txBox="1"/>
+          <p:nvPr/>
+        </p:nvSpPr>
+        <p:spPr>
+          <a:xfrm>
+            <a:off x="6400800" y="3374136"/>
+            <a:ext cx="4846320" cy="274320"/>
+          </a:xfrm>
+          <a:prstGeom prst="rect">
+            <a:avLst/>
+          </a:prstGeom>
+          <a:noFill/>
+        </p:spPr>
+        <p:txBody>
+          <a:bodyPr wrap="square" lIns="36576" rIns="36576" tIns="18288" bIns="18288">
+            <a:spAutoFit/>
+          </a:bodyPr>
+          <a:lstStyle/>
+          <a:p>
+            <a:pPr algn="l">
+              <a:defRPr sz="1300" b="0">
+                <a:solidFill>
+                  <a:srgbClr val="173E45"/>
+                </a:solidFill>
+                <a:latin typeface="Aptos"/>
+              </a:defRPr>
+            </a:pPr>
+            <a:r>
+              <a:t>Same inputs; classifier scores separate from policy outcomes</a:t>
+            </a:r>
+          </a:p>
+        </p:txBody>
+      </p:sp>
+      <p:sp>
+        <p:nvSpPr>
+          <p:cNvPr id="19" name="Rounded Rectangle 18"/>
+          <p:cNvSpPr/>
+          <p:nvPr/>
+        </p:nvSpPr>
+        <p:spPr>
+          <a:xfrm>
+            <a:off x="594360" y="4078224"/>
+            <a:ext cx="5257800" cy="932688"/>
+          </a:xfrm>
+          <a:prstGeom prst="roundRect">
+            <a:avLst/>
+          </a:prstGeom>
+          <a:solidFill>
+            <a:srgbClr val="FFFFFF"/>
+          </a:solidFill>
+          <a:ln w="19050">
+            <a:solidFill>
+              <a:srgbClr val="2F7775"/>
+            </a:solidFill>
+          </a:ln>
+        </p:spPr>
+        <p:style>
+          <a:lnRef idx="1">
+            <a:schemeClr val="accent1"/>
+          </a:lnRef>
+          <a:fillRef idx="3">
+            <a:schemeClr val="accent1"/>
+          </a:fillRef>
+          <a:effectRef idx="2">
+            <a:schemeClr val="accent1"/>
+          </a:effectRef>
+          <a:fontRef idx="minor">
+            <a:schemeClr val="lt1"/>
+          </a:fontRef>
+        </p:style>
+        <p:txBody>
+          <a:bodyPr rtlCol="0" anchor="ctr"/>
+          <a:lstStyle/>
+          <a:p>
+            <a:pPr algn="ctr"/>
+          </a:p>
+        </p:txBody>
+      </p:sp>
+      <p:sp>
+        <p:nvSpPr>
+          <p:cNvPr id="20" name="TextBox 19"/>
+          <p:cNvSpPr txBox="1"/>
+          <p:nvPr/>
+        </p:nvSpPr>
+        <p:spPr>
+          <a:xfrm>
+            <a:off x="777240" y="4206240"/>
+            <a:ext cx="4846320" cy="256032"/>
+          </a:xfrm>
+          <a:prstGeom prst="rect">
+            <a:avLst/>
+          </a:prstGeom>
+          <a:noFill/>
+        </p:spPr>
+        <p:txBody>
+          <a:bodyPr wrap="square" lIns="36576" rIns="36576" tIns="18288" bIns="18288">
+            <a:spAutoFit/>
+          </a:bodyPr>
+          <a:lstStyle/>
+          <a:p>
+            <a:pPr algn="l">
+              <a:defRPr sz="1600" b="1">
+                <a:solidFill>
+                  <a:srgbClr val="2F7775"/>
+                </a:solidFill>
+                <a:latin typeface="Aptos"/>
+              </a:defRPr>
+            </a:pPr>
+            <a:r>
+              <a:t>Safety first</a:t>
+            </a:r>
+          </a:p>
+        </p:txBody>
+      </p:sp>
+      <p:sp>
+        <p:nvSpPr>
+          <p:cNvPr id="21" name="TextBox 20"/>
+          <p:cNvSpPr txBox="1"/>
+          <p:nvPr/>
+        </p:nvSpPr>
+        <p:spPr>
+          <a:xfrm>
+            <a:off x="777240" y="4562856"/>
+            <a:ext cx="4846320" cy="274320"/>
+          </a:xfrm>
+          <a:prstGeom prst="rect">
+            <a:avLst/>
+          </a:prstGeom>
+          <a:noFill/>
+        </p:spPr>
+        <p:txBody>
+          <a:bodyPr wrap="square" lIns="36576" rIns="36576" tIns="18288" bIns="18288">
+            <a:spAutoFit/>
+          </a:bodyPr>
+          <a:lstStyle/>
+          <a:p>
+            <a:pPr algn="l">
+              <a:defRPr sz="1300" b="0">
+                <a:solidFill>
+                  <a:srgbClr val="173E45"/>
+                </a:solidFill>
+                <a:latin typeface="Aptos"/>
+              </a:defRPr>
+            </a:pPr>
+            <a:r>
+              <a:t>False merges, false conflicts, abstention, calibration, cost</a:t>
+            </a:r>
+          </a:p>
+        </p:txBody>
+      </p:sp>
+      <p:sp>
+        <p:nvSpPr>
+          <p:cNvPr id="22" name="Rounded Rectangle 21"/>
+          <p:cNvSpPr/>
+          <p:nvPr/>
+        </p:nvSpPr>
+        <p:spPr>
+          <a:xfrm>
+            <a:off x="6217920" y="4078224"/>
+            <a:ext cx="5257800" cy="932688"/>
+          </a:xfrm>
+          <a:prstGeom prst="roundRect">
+            <a:avLst/>
+          </a:prstGeom>
+          <a:solidFill>
+            <a:srgbClr val="FFFFFF"/>
+          </a:solidFill>
+          <a:ln w="19050">
+            <a:solidFill>
+              <a:srgbClr val="D87965"/>
+            </a:solidFill>
+          </a:ln>
+        </p:spPr>
+        <p:style>
+          <a:lnRef idx="1">
+            <a:schemeClr val="accent1"/>
+          </a:lnRef>
+          <a:fillRef idx="3">
+            <a:schemeClr val="accent1"/>
+          </a:fillRef>
+          <a:effectRef idx="2">
+            <a:schemeClr val="accent1"/>
+          </a:effectRef>
+          <a:fontRef idx="minor">
+            <a:schemeClr val="lt1"/>
+          </a:fontRef>
+        </p:style>
+        <p:txBody>
+          <a:bodyPr rtlCol="0" anchor="ctr"/>
+          <a:lstStyle/>
+          <a:p>
+            <a:pPr algn="ctr"/>
+          </a:p>
+        </p:txBody>
+      </p:sp>
+      <p:sp>
+        <p:nvSpPr>
+          <p:cNvPr id="23" name="TextBox 22"/>
+          <p:cNvSpPr txBox="1"/>
+          <p:nvPr/>
+        </p:nvSpPr>
+        <p:spPr>
+          <a:xfrm>
+            <a:off x="6400800" y="4206240"/>
+            <a:ext cx="4846320" cy="256032"/>
+          </a:xfrm>
+          <a:prstGeom prst="rect">
+            <a:avLst/>
+          </a:prstGeom>
+          <a:noFill/>
+        </p:spPr>
+        <p:txBody>
+          <a:bodyPr wrap="square" lIns="36576" rIns="36576" tIns="18288" bIns="18288">
+            <a:spAutoFit/>
+          </a:bodyPr>
+          <a:lstStyle/>
+          <a:p>
+            <a:pPr algn="l">
+              <a:defRPr sz="1600" b="1">
+                <a:solidFill>
+                  <a:srgbClr val="D87965"/>
+                </a:solidFill>
+                <a:latin typeface="Aptos"/>
+              </a:defRPr>
+            </a:pPr>
+            <a:r>
+              <a:t>M.E. feasibility</a:t>
+            </a:r>
+          </a:p>
+        </p:txBody>
+      </p:sp>
+      <p:sp>
+        <p:nvSpPr>
+          <p:cNvPr id="24" name="TextBox 23"/>
+          <p:cNvSpPr txBox="1"/>
+          <p:nvPr/>
+        </p:nvSpPr>
+        <p:spPr>
+          <a:xfrm>
+            <a:off x="6400800" y="4562856"/>
+            <a:ext cx="4846320" cy="274320"/>
+          </a:xfrm>
+          <a:prstGeom prst="rect">
+            <a:avLst/>
+          </a:prstGeom>
+          <a:noFill/>
+        </p:spPr>
+        <p:txBody>
+          <a:bodyPr wrap="square" lIns="36576" rIns="36576" tIns="18288" bIns="18288">
+            <a:spAutoFit/>
+          </a:bodyPr>
+          <a:lstStyle/>
+          <a:p>
+            <a:pPr algn="l">
+              <a:defRPr sz="1300" b="0">
+                <a:solidFill>
+                  <a:srgbClr val="173E45"/>
+                </a:solidFill>
+                <a:latin typeface="Aptos"/>
+              </a:defRPr>
+            </a:pPr>
+            <a:r>
+              <a:t>Prioritize a small core; stage simulator/scaling</a:t>
+            </a:r>
+          </a:p>
+        </p:txBody>
+      </p:sp>
+      <p:sp>
+        <p:nvSpPr>
+          <p:cNvPr id="25" name="TextBox 24"/>
+          <p:cNvSpPr txBox="1"/>
+          <p:nvPr/>
+        </p:nvSpPr>
+        <p:spPr>
+          <a:xfrm>
+            <a:off x="676656" y="5367528"/>
+            <a:ext cx="2926080" cy="320040"/>
+          </a:xfrm>
+          <a:prstGeom prst="rect">
+            <a:avLst/>
+          </a:prstGeom>
+          <a:noFill/>
+        </p:spPr>
+        <p:txBody>
+          <a:bodyPr wrap="square" lIns="36576" rIns="36576" tIns="18288" bIns="18288">
+            <a:spAutoFit/>
+          </a:bodyPr>
+          <a:lstStyle/>
+          <a:p>
+            <a:pPr algn="l">
+              <a:defRPr sz="1800" b="1">
+                <a:solidFill>
+                  <a:srgbClr val="173E45"/>
+                </a:solidFill>
+                <a:latin typeface="Aptos"/>
+              </a:defRPr>
+            </a:pPr>
+            <a:r>
+              <a:t>Likely questions</a:t>
+            </a:r>
+          </a:p>
+        </p:txBody>
+      </p:sp>
+      <p:sp>
+        <p:nvSpPr>
+          <p:cNvPr id="26" name="TextBox 25"/>
+          <p:cNvSpPr txBox="1"/>
+          <p:nvPr/>
+        </p:nvSpPr>
+        <p:spPr>
+          <a:xfrm>
+            <a:off x="685800" y="5724144"/>
+            <a:ext cx="10881360" cy="502920"/>
+          </a:xfrm>
+          <a:prstGeom prst="rect">
+            <a:avLst/>
+          </a:prstGeom>
+          <a:noFill/>
+        </p:spPr>
+        <p:txBody>
+          <a:bodyPr wrap="square" lIns="36576" rIns="36576" tIns="18288" bIns="18288">
+            <a:spAutoFit/>
+          </a:bodyPr>
+          <a:lstStyle/>
+          <a:p>
+            <a:pPr algn="l">
+              <a:defRPr sz="1300" b="0">
+                <a:solidFill>
+                  <a:srgbClr val="173E45"/>
+                </a:solidFill>
+                <a:latin typeface="Aptos"/>
+              </a:defRPr>
+            </a:pPr>
+            <a:r>
+              <a:t>Why not newest-wins? Arrival order is not truth.   •   Does Verify guarantee correctness? No.   •   Is novelty established? No—Pass 3 is incomplete.</a:t>
+            </a:r>
+          </a:p>
+        </p:txBody>
+      </p:sp>
+    </p:spTree>
+  </p:cSld>
+  <p:clrMapOvr>
+    <a:masterClrMapping/>
+  </p:clrMapOvr>
+</p:sld>
+</file>
+
 <file path=ppt/slides/slide2.xml><?xml version="1.0" encoding="utf-8"?>
 <p:sld xmlns:a="http://schemas.openxmlformats.org/drawingml/2006/main" xmlns:p="http://schemas.openxmlformats.org/presentationml/2006/main" xmlns:r="http://schemas.openxmlformats.org/officeDocument/2006/relationships">
   <p:cSld>
@@ -13922,6 +18218,992 @@
             </a:pPr>
             <a:r>
               <a:t>Protect the research gate and keep the M.E. scope manageable</a:t>
+            </a:r>
+          </a:p>
+        </p:txBody>
+      </p:sp>
+    </p:spTree>
+  </p:cSld>
+  <p:clrMapOvr>
+    <a:masterClrMapping/>
+  </p:clrMapOvr>
+</p:sld>
+</file>
+
+<file path=ppt/slides/slide20.xml><?xml version="1.0" encoding="utf-8"?>
+<p:sld xmlns:a="http://schemas.openxmlformats.org/drawingml/2006/main" xmlns:p="http://schemas.openxmlformats.org/presentationml/2006/main" xmlns:r="http://schemas.openxmlformats.org/officeDocument/2006/relationships">
+  <p:cSld>
+    <p:bg>
+      <p:bgPr>
+        <a:solidFill>
+          <a:srgbClr val="F7F3E9"/>
+        </a:solidFill>
+        <a:effectLst/>
+      </p:bgPr>
+    </p:bg>
+    <p:spTree>
+      <p:nvGrpSpPr>
+        <p:cNvPr id="1" name=""/>
+        <p:cNvGrpSpPr/>
+        <p:nvPr/>
+      </p:nvGrpSpPr>
+      <p:grpSpPr/>
+      <p:sp>
+        <p:nvSpPr>
+          <p:cNvPr id="2" name="TextBox 1"/>
+          <p:cNvSpPr txBox="1"/>
+          <p:nvPr/>
+        </p:nvSpPr>
+        <p:spPr>
+          <a:xfrm>
+            <a:off x="502920" y="219456"/>
+            <a:ext cx="11155680" cy="274320"/>
+          </a:xfrm>
+          <a:prstGeom prst="rect">
+            <a:avLst/>
+          </a:prstGeom>
+          <a:noFill/>
+        </p:spPr>
+        <p:txBody>
+          <a:bodyPr wrap="square" lIns="36576" rIns="36576" tIns="18288" bIns="18288">
+            <a:spAutoFit/>
+          </a:bodyPr>
+          <a:lstStyle/>
+          <a:p>
+            <a:pPr algn="l">
+              <a:defRPr sz="1200" b="1">
+                <a:solidFill>
+                  <a:srgbClr val="2F7775"/>
+                </a:solidFill>
+                <a:latin typeface="Aptos"/>
+              </a:defRPr>
+            </a:pPr>
+            <a:r>
+              <a:t>AVA EVALUATION • MONDAY REVIEW • PROVISIONAL PACK</a:t>
+            </a:r>
+          </a:p>
+        </p:txBody>
+      </p:sp>
+      <p:sp>
+        <p:nvSpPr>
+          <p:cNvPr id="3" name="TextBox 2"/>
+          <p:cNvSpPr txBox="1"/>
+          <p:nvPr/>
+        </p:nvSpPr>
+        <p:spPr>
+          <a:xfrm>
+            <a:off x="502920" y="603504"/>
+            <a:ext cx="11155680" cy="566928"/>
+          </a:xfrm>
+          <a:prstGeom prst="rect">
+            <a:avLst/>
+          </a:prstGeom>
+          <a:noFill/>
+        </p:spPr>
+        <p:txBody>
+          <a:bodyPr wrap="square" lIns="36576" rIns="36576" tIns="18288" bIns="18288">
+            <a:spAutoFit/>
+          </a:bodyPr>
+          <a:lstStyle/>
+          <a:p>
+            <a:pPr algn="l">
+              <a:defRPr sz="2700" b="1">
+                <a:solidFill>
+                  <a:srgbClr val="173E45"/>
+                </a:solidFill>
+                <a:latin typeface="Aptos"/>
+              </a:defRPr>
+            </a:pPr>
+            <a:r>
+              <a:t>Monday 26 October — ready-to-present checklist</a:t>
+            </a:r>
+          </a:p>
+        </p:txBody>
+      </p:sp>
+      <p:sp>
+        <p:nvSpPr>
+          <p:cNvPr id="4" name="TextBox 3"/>
+          <p:cNvSpPr txBox="1"/>
+          <p:nvPr/>
+        </p:nvSpPr>
+        <p:spPr>
+          <a:xfrm>
+            <a:off x="530352" y="1197864"/>
+            <a:ext cx="10972800" cy="384048"/>
+          </a:xfrm>
+          <a:prstGeom prst="rect">
+            <a:avLst/>
+          </a:prstGeom>
+          <a:noFill/>
+        </p:spPr>
+        <p:txBody>
+          <a:bodyPr wrap="square" lIns="36576" rIns="36576" tIns="18288" bIns="18288">
+            <a:spAutoFit/>
+          </a:bodyPr>
+          <a:lstStyle/>
+          <a:p>
+            <a:pPr algn="l">
+              <a:defRPr sz="1400" b="0">
+                <a:solidFill>
+                  <a:srgbClr val="64777A"/>
+                </a:solidFill>
+                <a:latin typeface="Aptos"/>
+              </a:defRPr>
+            </a:pPr>
+            <a:r>
+              <a:t>No review time or official KEC module titles were supplied; confirm those with the reviewer.</a:t>
+            </a:r>
+          </a:p>
+        </p:txBody>
+      </p:sp>
+      <p:sp>
+        <p:nvSpPr>
+          <p:cNvPr id="5" name="Rectangle 4"/>
+          <p:cNvSpPr/>
+          <p:nvPr/>
+        </p:nvSpPr>
+        <p:spPr>
+          <a:xfrm>
+            <a:off x="502920" y="1088136"/>
+            <a:ext cx="11155680" cy="22860"/>
+          </a:xfrm>
+          <a:prstGeom prst="rect">
+            <a:avLst/>
+          </a:prstGeom>
+          <a:solidFill>
+            <a:srgbClr val="2F7775"/>
+          </a:solidFill>
+          <a:ln>
+            <a:noFill/>
+          </a:ln>
+        </p:spPr>
+        <p:style>
+          <a:lnRef idx="1">
+            <a:schemeClr val="accent1"/>
+          </a:lnRef>
+          <a:fillRef idx="3">
+            <a:schemeClr val="accent1"/>
+          </a:fillRef>
+          <a:effectRef idx="2">
+            <a:schemeClr val="accent1"/>
+          </a:effectRef>
+          <a:fontRef idx="minor">
+            <a:schemeClr val="lt1"/>
+          </a:fontRef>
+        </p:style>
+        <p:txBody>
+          <a:bodyPr rtlCol="0" anchor="ctr"/>
+          <a:lstStyle/>
+          <a:p>
+            <a:pPr algn="ctr"/>
+          </a:p>
+        </p:txBody>
+      </p:sp>
+      <p:sp>
+        <p:nvSpPr>
+          <p:cNvPr id="6" name="TextBox 5"/>
+          <p:cNvSpPr txBox="1"/>
+          <p:nvPr/>
+        </p:nvSpPr>
+        <p:spPr>
+          <a:xfrm>
+            <a:off x="530352" y="6492240"/>
+            <a:ext cx="9875520" cy="182880"/>
+          </a:xfrm>
+          <a:prstGeom prst="rect">
+            <a:avLst/>
+          </a:prstGeom>
+          <a:noFill/>
+        </p:spPr>
+        <p:txBody>
+          <a:bodyPr wrap="square" lIns="36576" rIns="36576" tIns="18288" bIns="18288">
+            <a:spAutoFit/>
+          </a:bodyPr>
+          <a:lstStyle/>
+          <a:p>
+            <a:pPr algn="l">
+              <a:defRPr sz="900" b="0">
+                <a:solidFill>
+                  <a:srgbClr val="64777A"/>
+                </a:solidFill>
+                <a:latin typeface="Aptos"/>
+              </a:defRPr>
+            </a:pPr>
+            <a:r>
+              <a:t>Review aid only • novelty unresolved • no implementation authorized</a:t>
+            </a:r>
+          </a:p>
+        </p:txBody>
+      </p:sp>
+      <p:sp>
+        <p:nvSpPr>
+          <p:cNvPr id="7" name="Rounded Rectangle 6"/>
+          <p:cNvSpPr/>
+          <p:nvPr/>
+        </p:nvSpPr>
+        <p:spPr>
+          <a:xfrm>
+            <a:off x="566928" y="1700784"/>
+            <a:ext cx="6583680" cy="4251960"/>
+          </a:xfrm>
+          <a:prstGeom prst="roundRect">
+            <a:avLst/>
+          </a:prstGeom>
+          <a:solidFill>
+            <a:srgbClr val="FFFFFF"/>
+          </a:solidFill>
+          <a:ln w="19050">
+            <a:solidFill>
+              <a:srgbClr val="2F7775"/>
+            </a:solidFill>
+          </a:ln>
+        </p:spPr>
+        <p:style>
+          <a:lnRef idx="1">
+            <a:schemeClr val="accent1"/>
+          </a:lnRef>
+          <a:fillRef idx="3">
+            <a:schemeClr val="accent1"/>
+          </a:fillRef>
+          <a:effectRef idx="2">
+            <a:schemeClr val="accent1"/>
+          </a:effectRef>
+          <a:fontRef idx="minor">
+            <a:schemeClr val="lt1"/>
+          </a:fontRef>
+        </p:style>
+        <p:txBody>
+          <a:bodyPr rtlCol="0" anchor="ctr"/>
+          <a:lstStyle/>
+          <a:p>
+            <a:pPr algn="ctr"/>
+          </a:p>
+        </p:txBody>
+      </p:sp>
+      <p:sp>
+        <p:nvSpPr>
+          <p:cNvPr id="8" name="TextBox 7"/>
+          <p:cNvSpPr txBox="1"/>
+          <p:nvPr/>
+        </p:nvSpPr>
+        <p:spPr>
+          <a:xfrm>
+            <a:off x="859536" y="1938528"/>
+            <a:ext cx="5852160" cy="365760"/>
+          </a:xfrm>
+          <a:prstGeom prst="rect">
+            <a:avLst/>
+          </a:prstGeom>
+          <a:noFill/>
+        </p:spPr>
+        <p:txBody>
+          <a:bodyPr wrap="square" lIns="36576" rIns="36576" tIns="18288" bIns="18288">
+            <a:spAutoFit/>
+          </a:bodyPr>
+          <a:lstStyle/>
+          <a:p>
+            <a:pPr algn="l">
+              <a:defRPr sz="2100" b="1">
+                <a:solidFill>
+                  <a:srgbClr val="2F7775"/>
+                </a:solidFill>
+                <a:latin typeface="Aptos"/>
+              </a:defRPr>
+            </a:pPr>
+            <a:r>
+              <a:t>Before the review</a:t>
+            </a:r>
+          </a:p>
+        </p:txBody>
+      </p:sp>
+      <p:sp>
+        <p:nvSpPr>
+          <p:cNvPr id="9" name="TextBox 8"/>
+          <p:cNvSpPr txBox="1"/>
+          <p:nvPr/>
+        </p:nvSpPr>
+        <p:spPr>
+          <a:xfrm>
+            <a:off x="905256" y="2487168"/>
+            <a:ext cx="237744" cy="265176"/>
+          </a:xfrm>
+          <a:prstGeom prst="rect">
+            <a:avLst/>
+          </a:prstGeom>
+          <a:noFill/>
+        </p:spPr>
+        <p:txBody>
+          <a:bodyPr wrap="square" lIns="36576" rIns="36576" tIns="18288" bIns="18288">
+            <a:spAutoFit/>
+          </a:bodyPr>
+          <a:lstStyle/>
+          <a:p>
+            <a:pPr algn="l">
+              <a:defRPr sz="1800" b="1">
+                <a:solidFill>
+                  <a:srgbClr val="E8B653"/>
+                </a:solidFill>
+                <a:latin typeface="Aptos"/>
+              </a:defRPr>
+            </a:pPr>
+            <a:r>
+              <a:t>□</a:t>
+            </a:r>
+          </a:p>
+        </p:txBody>
+      </p:sp>
+      <p:sp>
+        <p:nvSpPr>
+          <p:cNvPr id="10" name="TextBox 9"/>
+          <p:cNvSpPr txBox="1"/>
+          <p:nvPr/>
+        </p:nvSpPr>
+        <p:spPr>
+          <a:xfrm>
+            <a:off x="1225296" y="2487168"/>
+            <a:ext cx="5577840" cy="493776"/>
+          </a:xfrm>
+          <a:prstGeom prst="rect">
+            <a:avLst/>
+          </a:prstGeom>
+          <a:noFill/>
+        </p:spPr>
+        <p:txBody>
+          <a:bodyPr wrap="square" lIns="36576" rIns="36576" tIns="18288" bIns="18288">
+            <a:spAutoFit/>
+          </a:bodyPr>
+          <a:lstStyle/>
+          <a:p>
+            <a:pPr algn="l">
+              <a:defRPr sz="1300" b="0">
+                <a:solidFill>
+                  <a:srgbClr val="173E45"/>
+                </a:solidFill>
+                <a:latin typeface="Aptos"/>
+              </a:defRPr>
+            </a:pPr>
+            <a:r>
+              <a:t>Open the PDF once; check slide order and diagrams on the presentation device.</a:t>
+            </a:r>
+          </a:p>
+        </p:txBody>
+      </p:sp>
+      <p:sp>
+        <p:nvSpPr>
+          <p:cNvPr id="11" name="TextBox 10"/>
+          <p:cNvSpPr txBox="1"/>
+          <p:nvPr/>
+        </p:nvSpPr>
+        <p:spPr>
+          <a:xfrm>
+            <a:off x="905256" y="2999232"/>
+            <a:ext cx="237744" cy="265176"/>
+          </a:xfrm>
+          <a:prstGeom prst="rect">
+            <a:avLst/>
+          </a:prstGeom>
+          <a:noFill/>
+        </p:spPr>
+        <p:txBody>
+          <a:bodyPr wrap="square" lIns="36576" rIns="36576" tIns="18288" bIns="18288">
+            <a:spAutoFit/>
+          </a:bodyPr>
+          <a:lstStyle/>
+          <a:p>
+            <a:pPr algn="l">
+              <a:defRPr sz="1800" b="1">
+                <a:solidFill>
+                  <a:srgbClr val="E8B653"/>
+                </a:solidFill>
+                <a:latin typeface="Aptos"/>
+              </a:defRPr>
+            </a:pPr>
+            <a:r>
+              <a:t>□</a:t>
+            </a:r>
+          </a:p>
+        </p:txBody>
+      </p:sp>
+      <p:sp>
+        <p:nvSpPr>
+          <p:cNvPr id="12" name="TextBox 11"/>
+          <p:cNvSpPr txBox="1"/>
+          <p:nvPr/>
+        </p:nvSpPr>
+        <p:spPr>
+          <a:xfrm>
+            <a:off x="1225296" y="2999232"/>
+            <a:ext cx="5577840" cy="493776"/>
+          </a:xfrm>
+          <a:prstGeom prst="rect">
+            <a:avLst/>
+          </a:prstGeom>
+          <a:noFill/>
+        </p:spPr>
+        <p:txBody>
+          <a:bodyPr wrap="square" lIns="36576" rIns="36576" tIns="18288" bIns="18288">
+            <a:spAutoFit/>
+          </a:bodyPr>
+          <a:lstStyle/>
+          <a:p>
+            <a:pPr algn="l">
+              <a:defRPr sz="1300" b="0">
+                <a:solidFill>
+                  <a:srgbClr val="173E45"/>
+                </a:solidFill>
+                <a:latin typeface="Aptos"/>
+              </a:defRPr>
+            </a:pPr>
+            <a:r>
+              <a:t>Keep PPTX + slide PDF together; keep report PDF as backup/reference.</a:t>
+            </a:r>
+          </a:p>
+        </p:txBody>
+      </p:sp>
+      <p:sp>
+        <p:nvSpPr>
+          <p:cNvPr id="13" name="TextBox 12"/>
+          <p:cNvSpPr txBox="1"/>
+          <p:nvPr/>
+        </p:nvSpPr>
+        <p:spPr>
+          <a:xfrm>
+            <a:off x="905256" y="3511296"/>
+            <a:ext cx="237744" cy="265176"/>
+          </a:xfrm>
+          <a:prstGeom prst="rect">
+            <a:avLst/>
+          </a:prstGeom>
+          <a:noFill/>
+        </p:spPr>
+        <p:txBody>
+          <a:bodyPr wrap="square" lIns="36576" rIns="36576" tIns="18288" bIns="18288">
+            <a:spAutoFit/>
+          </a:bodyPr>
+          <a:lstStyle/>
+          <a:p>
+            <a:pPr algn="l">
+              <a:defRPr sz="1800" b="1">
+                <a:solidFill>
+                  <a:srgbClr val="E8B653"/>
+                </a:solidFill>
+                <a:latin typeface="Aptos"/>
+              </a:defRPr>
+            </a:pPr>
+            <a:r>
+              <a:t>□</a:t>
+            </a:r>
+          </a:p>
+        </p:txBody>
+      </p:sp>
+      <p:sp>
+        <p:nvSpPr>
+          <p:cNvPr id="14" name="TextBox 13"/>
+          <p:cNvSpPr txBox="1"/>
+          <p:nvPr/>
+        </p:nvSpPr>
+        <p:spPr>
+          <a:xfrm>
+            <a:off x="1225296" y="3511296"/>
+            <a:ext cx="5577840" cy="493776"/>
+          </a:xfrm>
+          <a:prstGeom prst="rect">
+            <a:avLst/>
+          </a:prstGeom>
+          <a:noFill/>
+        </p:spPr>
+        <p:txBody>
+          <a:bodyPr wrap="square" lIns="36576" rIns="36576" tIns="18288" bIns="18288">
+            <a:spAutoFit/>
+          </a:bodyPr>
+          <a:lstStyle/>
+          <a:p>
+            <a:pPr algn="l">
+              <a:defRPr sz="1300" b="0">
+                <a:solidFill>
+                  <a:srgbClr val="173E45"/>
+                </a:solidFill>
+                <a:latin typeface="Aptos"/>
+              </a:defRPr>
+            </a:pPr>
+            <a:r>
+              <a:t>Rehearse the 90-second opener and the one-key scenario.</a:t>
+            </a:r>
+          </a:p>
+        </p:txBody>
+      </p:sp>
+      <p:sp>
+        <p:nvSpPr>
+          <p:cNvPr id="15" name="TextBox 14"/>
+          <p:cNvSpPr txBox="1"/>
+          <p:nvPr/>
+        </p:nvSpPr>
+        <p:spPr>
+          <a:xfrm>
+            <a:off x="905256" y="4023360"/>
+            <a:ext cx="237744" cy="265176"/>
+          </a:xfrm>
+          <a:prstGeom prst="rect">
+            <a:avLst/>
+          </a:prstGeom>
+          <a:noFill/>
+        </p:spPr>
+        <p:txBody>
+          <a:bodyPr wrap="square" lIns="36576" rIns="36576" tIns="18288" bIns="18288">
+            <a:spAutoFit/>
+          </a:bodyPr>
+          <a:lstStyle/>
+          <a:p>
+            <a:pPr algn="l">
+              <a:defRPr sz="1800" b="1">
+                <a:solidFill>
+                  <a:srgbClr val="E8B653"/>
+                </a:solidFill>
+                <a:latin typeface="Aptos"/>
+              </a:defRPr>
+            </a:pPr>
+            <a:r>
+              <a:t>□</a:t>
+            </a:r>
+          </a:p>
+        </p:txBody>
+      </p:sp>
+      <p:sp>
+        <p:nvSpPr>
+          <p:cNvPr id="16" name="TextBox 15"/>
+          <p:cNvSpPr txBox="1"/>
+          <p:nvPr/>
+        </p:nvSpPr>
+        <p:spPr>
+          <a:xfrm>
+            <a:off x="1225296" y="4023360"/>
+            <a:ext cx="5577840" cy="493776"/>
+          </a:xfrm>
+          <a:prstGeom prst="rect">
+            <a:avLst/>
+          </a:prstGeom>
+          <a:noFill/>
+        </p:spPr>
+        <p:txBody>
+          <a:bodyPr wrap="square" lIns="36576" rIns="36576" tIns="18288" bIns="18288">
+            <a:spAutoFit/>
+          </a:bodyPr>
+          <a:lstStyle/>
+          <a:p>
+            <a:pPr algn="l">
+              <a:defRPr sz="1300" b="0">
+                <a:solidFill>
+                  <a:srgbClr val="173E45"/>
+                </a:solidFill>
+                <a:latin typeface="Aptos"/>
+              </a:defRPr>
+            </a:pPr>
+            <a:r>
+              <a:t>Call the six names hypothetical labels only; assign no real capabilities.</a:t>
+            </a:r>
+          </a:p>
+        </p:txBody>
+      </p:sp>
+      <p:sp>
+        <p:nvSpPr>
+          <p:cNvPr id="17" name="TextBox 16"/>
+          <p:cNvSpPr txBox="1"/>
+          <p:nvPr/>
+        </p:nvSpPr>
+        <p:spPr>
+          <a:xfrm>
+            <a:off x="905256" y="4535424"/>
+            <a:ext cx="237744" cy="265176"/>
+          </a:xfrm>
+          <a:prstGeom prst="rect">
+            <a:avLst/>
+          </a:prstGeom>
+          <a:noFill/>
+        </p:spPr>
+        <p:txBody>
+          <a:bodyPr wrap="square" lIns="36576" rIns="36576" tIns="18288" bIns="18288">
+            <a:spAutoFit/>
+          </a:bodyPr>
+          <a:lstStyle/>
+          <a:p>
+            <a:pPr algn="l">
+              <a:defRPr sz="1800" b="1">
+                <a:solidFill>
+                  <a:srgbClr val="E8B653"/>
+                </a:solidFill>
+                <a:latin typeface="Aptos"/>
+              </a:defRPr>
+            </a:pPr>
+            <a:r>
+              <a:t>□</a:t>
+            </a:r>
+          </a:p>
+        </p:txBody>
+      </p:sp>
+      <p:sp>
+        <p:nvSpPr>
+          <p:cNvPr id="18" name="TextBox 17"/>
+          <p:cNvSpPr txBox="1"/>
+          <p:nvPr/>
+        </p:nvSpPr>
+        <p:spPr>
+          <a:xfrm>
+            <a:off x="1225296" y="4535424"/>
+            <a:ext cx="5577840" cy="493776"/>
+          </a:xfrm>
+          <a:prstGeom prst="rect">
+            <a:avLst/>
+          </a:prstGeom>
+          <a:noFill/>
+        </p:spPr>
+        <p:txBody>
+          <a:bodyPr wrap="square" lIns="36576" rIns="36576" tIns="18288" bIns="18288">
+            <a:spAutoFit/>
+          </a:bodyPr>
+          <a:lstStyle/>
+          <a:p>
+            <a:pPr algn="l">
+              <a:defRPr sz="1300" b="0">
+                <a:solidFill>
+                  <a:srgbClr val="173E45"/>
+                </a:solidFill>
+                <a:latin typeface="Aptos"/>
+              </a:defRPr>
+            </a:pPr>
+            <a:r>
+              <a:t>State the gate honestly: Pass 3 incomplete, novelty unresolved, no implementation.</a:t>
+            </a:r>
+          </a:p>
+        </p:txBody>
+      </p:sp>
+      <p:sp>
+        <p:nvSpPr>
+          <p:cNvPr id="19" name="TextBox 18"/>
+          <p:cNvSpPr txBox="1"/>
+          <p:nvPr/>
+        </p:nvSpPr>
+        <p:spPr>
+          <a:xfrm>
+            <a:off x="905256" y="5047488"/>
+            <a:ext cx="237744" cy="265176"/>
+          </a:xfrm>
+          <a:prstGeom prst="rect">
+            <a:avLst/>
+          </a:prstGeom>
+          <a:noFill/>
+        </p:spPr>
+        <p:txBody>
+          <a:bodyPr wrap="square" lIns="36576" rIns="36576" tIns="18288" bIns="18288">
+            <a:spAutoFit/>
+          </a:bodyPr>
+          <a:lstStyle/>
+          <a:p>
+            <a:pPr algn="l">
+              <a:defRPr sz="1800" b="1">
+                <a:solidFill>
+                  <a:srgbClr val="E8B653"/>
+                </a:solidFill>
+                <a:latin typeface="Aptos"/>
+              </a:defRPr>
+            </a:pPr>
+            <a:r>
+              <a:t>□</a:t>
+            </a:r>
+          </a:p>
+        </p:txBody>
+      </p:sp>
+      <p:sp>
+        <p:nvSpPr>
+          <p:cNvPr id="20" name="TextBox 19"/>
+          <p:cNvSpPr txBox="1"/>
+          <p:nvPr/>
+        </p:nvSpPr>
+        <p:spPr>
+          <a:xfrm>
+            <a:off x="1225296" y="5047488"/>
+            <a:ext cx="5577840" cy="493776"/>
+          </a:xfrm>
+          <a:prstGeom prst="rect">
+            <a:avLst/>
+          </a:prstGeom>
+          <a:noFill/>
+        </p:spPr>
+        <p:txBody>
+          <a:bodyPr wrap="square" lIns="36576" rIns="36576" tIns="18288" bIns="18288">
+            <a:spAutoFit/>
+          </a:bodyPr>
+          <a:lstStyle/>
+          <a:p>
+            <a:pPr algn="l">
+              <a:defRPr sz="1300" b="0">
+                <a:solidFill>
+                  <a:srgbClr val="173E45"/>
+                </a:solidFill>
+                <a:latin typeface="Aptos"/>
+              </a:defRPr>
+            </a:pPr>
+            <a:r>
+              <a:t>Ask which official modules/template and next milestone the college expects.</a:t>
+            </a:r>
+          </a:p>
+        </p:txBody>
+      </p:sp>
+      <p:sp>
+        <p:nvSpPr>
+          <p:cNvPr id="21" name="Rounded Rectangle 20"/>
+          <p:cNvSpPr/>
+          <p:nvPr/>
+        </p:nvSpPr>
+        <p:spPr>
+          <a:xfrm>
+            <a:off x="7424927" y="1700784"/>
+            <a:ext cx="4160520" cy="2011680"/>
+          </a:xfrm>
+          <a:prstGeom prst="roundRect">
+            <a:avLst/>
+          </a:prstGeom>
+          <a:solidFill>
+            <a:srgbClr val="E8F1EC"/>
+          </a:solidFill>
+          <a:ln w="19050">
+            <a:solidFill>
+              <a:srgbClr val="8EB89B"/>
+            </a:solidFill>
+          </a:ln>
+        </p:spPr>
+        <p:style>
+          <a:lnRef idx="1">
+            <a:schemeClr val="accent1"/>
+          </a:lnRef>
+          <a:fillRef idx="3">
+            <a:schemeClr val="accent1"/>
+          </a:fillRef>
+          <a:effectRef idx="2">
+            <a:schemeClr val="accent1"/>
+          </a:effectRef>
+          <a:fontRef idx="minor">
+            <a:schemeClr val="lt1"/>
+          </a:fontRef>
+        </p:style>
+        <p:txBody>
+          <a:bodyPr rtlCol="0" anchor="ctr"/>
+          <a:lstStyle/>
+          <a:p>
+            <a:pPr algn="ctr"/>
+          </a:p>
+        </p:txBody>
+      </p:sp>
+      <p:sp>
+        <p:nvSpPr>
+          <p:cNvPr id="22" name="TextBox 21"/>
+          <p:cNvSpPr txBox="1"/>
+          <p:nvPr/>
+        </p:nvSpPr>
+        <p:spPr>
+          <a:xfrm>
+            <a:off x="7699248" y="1929384"/>
+            <a:ext cx="3611880" cy="292608"/>
+          </a:xfrm>
+          <a:prstGeom prst="rect">
+            <a:avLst/>
+          </a:prstGeom>
+          <a:noFill/>
+        </p:spPr>
+        <p:txBody>
+          <a:bodyPr wrap="square" lIns="36576" rIns="36576" tIns="18288" bIns="18288">
+            <a:spAutoFit/>
+          </a:bodyPr>
+          <a:lstStyle/>
+          <a:p>
+            <a:pPr algn="l">
+              <a:defRPr sz="1800" b="1">
+                <a:solidFill>
+                  <a:srgbClr val="2F7775"/>
+                </a:solidFill>
+                <a:latin typeface="Aptos"/>
+              </a:defRPr>
+            </a:pPr>
+            <a:r>
+              <a:t>Open with this</a:t>
+            </a:r>
+          </a:p>
+        </p:txBody>
+      </p:sp>
+      <p:sp>
+        <p:nvSpPr>
+          <p:cNvPr id="23" name="TextBox 22"/>
+          <p:cNvSpPr txBox="1"/>
+          <p:nvPr/>
+        </p:nvSpPr>
+        <p:spPr>
+          <a:xfrm>
+            <a:off x="7699248" y="2377440"/>
+            <a:ext cx="3538728" cy="1005840"/>
+          </a:xfrm>
+          <a:prstGeom prst="rect">
+            <a:avLst/>
+          </a:prstGeom>
+          <a:noFill/>
+        </p:spPr>
+        <p:txBody>
+          <a:bodyPr wrap="square" lIns="36576" rIns="36576" tIns="18288" bIns="18288">
+            <a:spAutoFit/>
+          </a:bodyPr>
+          <a:lstStyle/>
+          <a:p>
+            <a:pPr algn="l">
+              <a:defRPr sz="1400" b="0">
+                <a:solidFill>
+                  <a:srgbClr val="173E45"/>
+                </a:solidFill>
+                <a:latin typeface="Aptos"/>
+              </a:defRPr>
+            </a:pPr>
+            <a:r>
+              <a:t>“Same events reaching all replicas does not guarantee safe meaning. I’ll test how same-key disagreement should be classified and when to resolve, verify or preserve uncertainty.”</a:t>
+            </a:r>
+          </a:p>
+        </p:txBody>
+      </p:sp>
+      <p:sp>
+        <p:nvSpPr>
+          <p:cNvPr id="24" name="Rounded Rectangle 23"/>
+          <p:cNvSpPr/>
+          <p:nvPr/>
+        </p:nvSpPr>
+        <p:spPr>
+          <a:xfrm>
+            <a:off x="7424927" y="3968496"/>
+            <a:ext cx="4160520" cy="1984248"/>
+          </a:xfrm>
+          <a:prstGeom prst="roundRect">
+            <a:avLst/>
+          </a:prstGeom>
+          <a:solidFill>
+            <a:srgbClr val="F9E8E2"/>
+          </a:solidFill>
+          <a:ln w="19050">
+            <a:solidFill>
+              <a:srgbClr val="D87965"/>
+            </a:solidFill>
+          </a:ln>
+        </p:spPr>
+        <p:style>
+          <a:lnRef idx="1">
+            <a:schemeClr val="accent1"/>
+          </a:lnRef>
+          <a:fillRef idx="3">
+            <a:schemeClr val="accent1"/>
+          </a:fillRef>
+          <a:effectRef idx="2">
+            <a:schemeClr val="accent1"/>
+          </a:effectRef>
+          <a:fontRef idx="minor">
+            <a:schemeClr val="lt1"/>
+          </a:fontRef>
+        </p:style>
+        <p:txBody>
+          <a:bodyPr rtlCol="0" anchor="ctr"/>
+          <a:lstStyle/>
+          <a:p>
+            <a:pPr algn="ctr"/>
+          </a:p>
+        </p:txBody>
+      </p:sp>
+      <p:sp>
+        <p:nvSpPr>
+          <p:cNvPr id="25" name="TextBox 24"/>
+          <p:cNvSpPr txBox="1"/>
+          <p:nvPr/>
+        </p:nvSpPr>
+        <p:spPr>
+          <a:xfrm>
+            <a:off x="7699248" y="4215384"/>
+            <a:ext cx="3611880" cy="292608"/>
+          </a:xfrm>
+          <a:prstGeom prst="rect">
+            <a:avLst/>
+          </a:prstGeom>
+          <a:noFill/>
+        </p:spPr>
+        <p:txBody>
+          <a:bodyPr wrap="square" lIns="36576" rIns="36576" tIns="18288" bIns="18288">
+            <a:spAutoFit/>
+          </a:bodyPr>
+          <a:lstStyle/>
+          <a:p>
+            <a:pPr algn="l">
+              <a:defRPr sz="1800" b="1">
+                <a:solidFill>
+                  <a:srgbClr val="D87965"/>
+                </a:solidFill>
+                <a:latin typeface="Aptos"/>
+              </a:defRPr>
+            </a:pPr>
+            <a:r>
+              <a:t>Ask for feedback</a:t>
+            </a:r>
+          </a:p>
+        </p:txBody>
+      </p:sp>
+      <p:sp>
+        <p:nvSpPr>
+          <p:cNvPr id="26" name="TextBox 25"/>
+          <p:cNvSpPr txBox="1"/>
+          <p:nvPr/>
+        </p:nvSpPr>
+        <p:spPr>
+          <a:xfrm>
+            <a:off x="7699248" y="4663440"/>
+            <a:ext cx="3520440" cy="987552"/>
+          </a:xfrm>
+          <a:prstGeom prst="rect">
+            <a:avLst/>
+          </a:prstGeom>
+          <a:noFill/>
+        </p:spPr>
+        <p:txBody>
+          <a:bodyPr wrap="square" lIns="36576" rIns="36576" tIns="18288" bIns="18288">
+            <a:spAutoFit/>
+          </a:bodyPr>
+          <a:lstStyle/>
+          <a:p>
+            <a:pPr algn="l">
+              <a:defRPr sz="1400" b="0">
+                <a:solidFill>
+                  <a:srgbClr val="173E45"/>
+                </a:solidFill>
+                <a:latin typeface="Aptos"/>
+              </a:defRPr>
+            </a:pPr>
+            <a:r>
+              <a:t>Is the key/scope precise?</a:t>
+            </a:r>
+          </a:p>
+          <a:p>
+            <a:pPr algn="l">
+              <a:defRPr sz="1400" b="0">
+                <a:solidFill>
+                  <a:srgbClr val="173E45"/>
+                </a:solidFill>
+                <a:latin typeface="Aptos"/>
+              </a:defRPr>
+            </a:pPr>
+            <a:r>
+              <a:t>Which work should be core vs staged?</a:t>
+            </a:r>
+          </a:p>
+          <a:p>
+            <a:pPr algn="l">
+              <a:defRPr sz="1400" b="0">
+                <a:solidFill>
+                  <a:srgbClr val="173E45"/>
+                </a:solidFill>
+                <a:latin typeface="Aptos"/>
+              </a:defRPr>
+            </a:pPr>
+            <a:r>
+              <a:t>What must pass before implementation?</a:t>
             </a:r>
           </a:p>
         </p:txBody>

--- a/docs/review-pack/AVA_Evaluation_Review_Slides.pptx
+++ b/docs/review-pack/AVA_Evaluation_Review_Slides.pptx
@@ -25,6 +25,11 @@
     <p:sldId id="273" r:id="rId25"/>
     <p:sldId id="274" r:id="rId26"/>
     <p:sldId id="275" r:id="rId27"/>
+    <p:sldId id="276" r:id="rId28"/>
+    <p:sldId id="277" r:id="rId29"/>
+    <p:sldId id="278" r:id="rId30"/>
+    <p:sldId id="279" r:id="rId31"/>
+    <p:sldId id="280" r:id="rId32"/>
   </p:sldIdLst>
   <p:sldSz cx="12191695" cy="6858000" type="screen4x3"/>
   <p:notesSz cx="6858000" cy="9144000"/>
@@ -19204,6 +19209,1106 @@
             </a:pPr>
             <a:r>
               <a:t>What must pass before implementation?</a:t>
+            </a:r>
+          </a:p>
+        </p:txBody>
+      </p:sp>
+    </p:spTree>
+  </p:cSld>
+  <p:clrMapOvr>
+    <a:masterClrMapping/>
+  </p:clrMapOvr>
+</p:sld>
+</file>
+
+<file path=ppt/slides/slide21.xml><?xml version="1.0" encoding="utf-8"?>
+<p:sld xmlns:a="http://schemas.openxmlformats.org/drawingml/2006/main" xmlns:p="http://schemas.openxmlformats.org/presentationml/2006/main" xmlns:r="http://schemas.openxmlformats.org/officeDocument/2006/relationships">
+  <p:cSld>
+    <p:spTree>
+      <p:nvGrpSpPr>
+        <p:cNvPr id="1" name=""/>
+        <p:cNvGrpSpPr/>
+        <p:nvPr/>
+      </p:nvGrpSpPr>
+      <p:grpSpPr/>
+      <p:sp>
+        <p:nvSpPr>
+          <p:cNvPr id="2" name="Title 1"/>
+          <p:cNvSpPr>
+            <a:spLocks noGrp="1"/>
+          </p:cNvSpPr>
+          <p:nvPr>
+            <p:ph type="title"/>
+          </p:nvPr>
+        </p:nvSpPr>
+        <p:spPr/>
+        <p:txBody>
+          <a:bodyPr/>
+          <a:lstStyle/>
+          <a:p>
+            <a:r>
+              <a:rPr sz="2500" b="1">
+                <a:solidFill>
+                  <a:srgbClr val="264741"/>
+                </a:solidFill>
+                <a:latin typeface="Aptos"/>
+              </a:rPr>
+              <a:t>Pass 3 evidence • close overlaps</a:t>
+            </a:r>
+          </a:p>
+        </p:txBody>
+      </p:sp>
+      <p:sp>
+        <p:nvSpPr>
+          <p:cNvPr id="3" name="Content Placeholder 2"/>
+          <p:cNvSpPr>
+            <a:spLocks noGrp="1"/>
+          </p:cNvSpPr>
+          <p:nvPr>
+            <p:ph idx="1"/>
+          </p:nvPr>
+        </p:nvSpPr>
+        <p:spPr/>
+        <p:txBody>
+          <a:bodyPr wrap="square"/>
+          <a:lstStyle/>
+          <a:p>
+            <a:pPr>
+              <a:spcAft>
+                <a:spcPts val="1300"/>
+              </a:spcAft>
+              <a:defRPr sz="1800">
+                <a:solidFill>
+                  <a:srgbClr val="233033"/>
+                </a:solidFill>
+                <a:latin typeface="Aptos"/>
+              </a:defRPr>
+            </a:pPr>
+            <a:r>
+              <a:rPr sz="1800" b="1">
+                <a:solidFill>
+                  <a:srgbClr val="264741"/>
+                </a:solidFill>
+                <a:latin typeface="Aptos"/>
+              </a:rPr>
+              <a:t>Same-key commit and memory policy: </a:t>
+            </a:r>
+            <a:r>
+              <a:rPr sz="1700" b="0">
+                <a:solidFill>
+                  <a:srgbClr val="233033"/>
+                </a:solidFill>
+                <a:latin typeface="Aptos"/>
+              </a:rPr>
+              <a:t>MemTX v2: evidence-bearing same-slot conflict gate; 90 cases / 5 backbones. Shared store, not async replica convergence.</a:t>
+            </a:r>
+          </a:p>
+          <a:p>
+            <a:pPr>
+              <a:spcAft>
+                <a:spcPts val="1300"/>
+              </a:spcAft>
+              <a:defRPr sz="1800">
+                <a:solidFill>
+                  <a:srgbClr val="233033"/>
+                </a:solidFill>
+                <a:latin typeface="Aptos"/>
+              </a:defRPr>
+            </a:pPr>
+            <a:r>
+              <a:rPr sz="1800" b="1">
+                <a:solidFill>
+                  <a:srgbClr val="264741"/>
+                </a:solidFill>
+                <a:latin typeface="Aptos"/>
+              </a:rPr>
+              <a:t>Deferral is prior art: </a:t>
+            </a:r>
+            <a:r>
+              <a:rPr sz="1700" b="0">
+                <a:solidFill>
+                  <a:srgbClr val="233033"/>
+                </a:solidFill>
+                <a:latin typeface="Aptos"/>
+              </a:rPr>
+              <a:t>TARL v5: append / noop / revise / reject_conflict / defer_verify; 5,422 cases with gold next state.</a:t>
+            </a:r>
+          </a:p>
+          <a:p>
+            <a:pPr>
+              <a:spcAft>
+                <a:spcPts val="1300"/>
+              </a:spcAft>
+              <a:defRPr sz="1800">
+                <a:solidFill>
+                  <a:srgbClr val="233033"/>
+                </a:solidFill>
+                <a:latin typeface="Aptos"/>
+              </a:defRPr>
+            </a:pPr>
+            <a:r>
+              <a:rPr sz="1800" b="1">
+                <a:solidFill>
+                  <a:srgbClr val="264741"/>
+                </a:solidFill>
+                <a:latin typeface="Aptos"/>
+              </a:rPr>
+              <a:t>Classify then reconcile: </a:t>
+            </a:r>
+            <a:r>
+              <a:rPr sz="1700" b="0">
+                <a:solidFill>
+                  <a:srgbClr val="233033"/>
+                </a:solidFill>
+                <a:latin typeface="Aptos"/>
+              </a:rPr>
+              <a:t>LatticeMind v1: Credibility vs Coordination; 73/75 on a 75-case ConflictBank set, one model.</a:t>
+            </a:r>
+          </a:p>
+          <a:p>
+            <a:pPr>
+              <a:spcAft>
+                <a:spcPts val="1300"/>
+              </a:spcAft>
+              <a:defRPr sz="1800">
+                <a:solidFill>
+                  <a:srgbClr val="233033"/>
+                </a:solidFill>
+                <a:latin typeface="Aptos"/>
+              </a:defRPr>
+            </a:pPr>
+            <a:r>
+              <a:rPr sz="1800" b="1">
+                <a:solidFill>
+                  <a:srgbClr val="264741"/>
+                </a:solidFill>
+                <a:latin typeface="Aptos"/>
+              </a:rPr>
+              <a:t>Sources: </a:t>
+            </a:r>
+            <a:r>
+              <a:rPr sz="1700" b="0">
+                <a:solidFill>
+                  <a:srgbClr val="233033"/>
+                </a:solidFill>
+                <a:latin typeface="Aptos"/>
+              </a:rPr>
+              <a:t>arXiv:2607.23929v2 · 2608.03699v5 · 2608.08236v1</a:t>
+            </a:r>
+          </a:p>
+        </p:txBody>
+      </p:sp>
+      <p:sp>
+        <p:nvSpPr>
+          <p:cNvPr id="4" name="TextBox 3"/>
+          <p:cNvSpPr txBox="1"/>
+          <p:nvPr/>
+        </p:nvSpPr>
+        <p:spPr>
+          <a:xfrm>
+            <a:off x="411480" y="6327648"/>
+            <a:ext cx="10972800" cy="256032"/>
+          </a:xfrm>
+          <a:prstGeom prst="rect">
+            <a:avLst/>
+          </a:prstGeom>
+          <a:noFill/>
+        </p:spPr>
+        <p:txBody>
+          <a:bodyPr wrap="none">
+            <a:spAutoFit/>
+          </a:bodyPr>
+          <a:lstStyle/>
+          <a:p>
+            <a:pPr algn="r"/>
+            <a:r>
+              <a:rPr sz="900" b="1">
+                <a:solidFill>
+                  <a:srgbClr val="964630"/>
+                </a:solidFill>
+                <a:latin typeface="Aptos"/>
+              </a:rPr>
+              <a:t>CURRENT AUDIT NOTES • SELECTED SOURCES • NOVELTY UNRESOLVED</a:t>
+            </a:r>
+          </a:p>
+        </p:txBody>
+      </p:sp>
+    </p:spTree>
+  </p:cSld>
+  <p:clrMapOvr>
+    <a:masterClrMapping/>
+  </p:clrMapOvr>
+</p:sld>
+</file>
+
+<file path=ppt/slides/slide22.xml><?xml version="1.0" encoding="utf-8"?>
+<p:sld xmlns:a="http://schemas.openxmlformats.org/drawingml/2006/main" xmlns:p="http://schemas.openxmlformats.org/presentationml/2006/main" xmlns:r="http://schemas.openxmlformats.org/officeDocument/2006/relationships">
+  <p:cSld>
+    <p:spTree>
+      <p:nvGrpSpPr>
+        <p:cNvPr id="1" name=""/>
+        <p:cNvGrpSpPr/>
+        <p:nvPr/>
+      </p:nvGrpSpPr>
+      <p:grpSpPr/>
+      <p:sp>
+        <p:nvSpPr>
+          <p:cNvPr id="2" name="Title 1"/>
+          <p:cNvSpPr>
+            <a:spLocks noGrp="1"/>
+          </p:cNvSpPr>
+          <p:nvPr>
+            <p:ph type="title"/>
+          </p:nvPr>
+        </p:nvSpPr>
+        <p:spPr/>
+        <p:txBody>
+          <a:bodyPr/>
+          <a:lstStyle/>
+          <a:p>
+            <a:r>
+              <a:rPr sz="2500" b="1">
+                <a:solidFill>
+                  <a:srgbClr val="264741"/>
+                </a:solidFill>
+                <a:latin typeface="Aptos"/>
+              </a:rPr>
+              <a:t>Async delivery • measure what converges</a:t>
+            </a:r>
+          </a:p>
+        </p:txBody>
+      </p:sp>
+      <p:sp>
+        <p:nvSpPr>
+          <p:cNvPr id="3" name="Content Placeholder 2"/>
+          <p:cNvSpPr>
+            <a:spLocks noGrp="1"/>
+          </p:cNvSpPr>
+          <p:nvPr>
+            <p:ph idx="1"/>
+          </p:nvPr>
+        </p:nvSpPr>
+        <p:spPr/>
+        <p:txBody>
+          <a:bodyPr wrap="square"/>
+          <a:lstStyle/>
+          <a:p>
+            <a:pPr>
+              <a:spcAft>
+                <a:spcPts val="1300"/>
+              </a:spcAft>
+              <a:defRPr sz="1800">
+                <a:solidFill>
+                  <a:srgbClr val="233033"/>
+                </a:solidFill>
+                <a:latin typeface="Aptos"/>
+              </a:defRPr>
+            </a:pPr>
+            <a:r>
+              <a:rPr sz="1800" b="1">
+                <a:solidFill>
+                  <a:srgbClr val="264741"/>
+                </a:solidFill>
+                <a:latin typeface="Aptos"/>
+              </a:rPr>
+              <a:t>Direct async example: </a:t>
+            </a:r>
+            <a:r>
+              <a:rPr sz="1700" b="0">
+                <a:solidFill>
+                  <a:srgbClr val="233033"/>
+                </a:solidFill>
+                <a:latin typeface="Aptos"/>
+              </a:rPr>
+              <a:t>Governed Shared Memory v1: supersession 90/90 conditional on both writes landing; 98/200 overall.</a:t>
+            </a:r>
+          </a:p>
+          <a:p>
+            <a:pPr>
+              <a:spcAft>
+                <a:spcPts val="1300"/>
+              </a:spcAft>
+              <a:defRPr sz="1800">
+                <a:solidFill>
+                  <a:srgbClr val="233033"/>
+                </a:solidFill>
+                <a:latin typeface="Aptos"/>
+              </a:defRPr>
+            </a:pPr>
+            <a:r>
+              <a:rPr sz="1800" b="1">
+                <a:solidFill>
+                  <a:srgbClr val="264741"/>
+                </a:solidFill>
+                <a:latin typeface="Aptos"/>
+              </a:rPr>
+              <a:t>Admission matters: </a:t>
+            </a:r>
+            <a:r>
+              <a:rPr sz="1700" b="0">
+                <a:solidFill>
+                  <a:srgbClr val="233033"/>
+                </a:solidFill>
+                <a:latin typeface="Aptos"/>
+              </a:rPr>
+              <a:t>A synchronous dedup gate rejected 206/400 writes before the asynchronous detector; report gate and detector separately.</a:t>
+            </a:r>
+          </a:p>
+          <a:p>
+            <a:pPr>
+              <a:spcAft>
+                <a:spcPts val="1300"/>
+              </a:spcAft>
+              <a:defRPr sz="1800">
+                <a:solidFill>
+                  <a:srgbClr val="233033"/>
+                </a:solidFill>
+                <a:latin typeface="Aptos"/>
+              </a:defRPr>
+            </a:pPr>
+            <a:r>
+              <a:rPr sz="1800" b="1">
+                <a:solidFill>
+                  <a:srgbClr val="264741"/>
+                </a:solidFill>
+                <a:latin typeface="Aptos"/>
+              </a:rPr>
+              <a:t>Different system questions: </a:t>
+            </a:r>
+            <a:r>
+              <a:rPr sz="1700" b="0">
+                <a:solidFill>
+                  <a:srgbClr val="233033"/>
+                </a:solidFill>
+                <a:latin typeface="Aptos"/>
+              </a:rPr>
+              <a:t>CoAgent repairs plan invalidity; S-Bus rejects structural stale-read/write races; neither is same-key truth adjudication.</a:t>
+            </a:r>
+          </a:p>
+          <a:p>
+            <a:pPr>
+              <a:spcAft>
+                <a:spcPts val="1300"/>
+              </a:spcAft>
+              <a:defRPr sz="1800">
+                <a:solidFill>
+                  <a:srgbClr val="233033"/>
+                </a:solidFill>
+                <a:latin typeface="Aptos"/>
+              </a:defRPr>
+            </a:pPr>
+            <a:r>
+              <a:rPr sz="1800" b="1">
+                <a:solidFill>
+                  <a:srgbClr val="264741"/>
+                </a:solidFill>
+                <a:latin typeface="Aptos"/>
+              </a:rPr>
+              <a:t>MELD caution: </a:t>
+            </a:r>
+            <a:r>
+              <a:rPr sz="1700" b="0">
+                <a:solidFill>
+                  <a:srgbClr val="233033"/>
+                </a:solidFill>
+                <a:latin typeface="Aptos"/>
+              </a:rPr>
+              <a:t>Status convergence can coexist with order-sensitive live sets / retrieval: 112/200 orderings changed the live set.</a:t>
+            </a:r>
+          </a:p>
+        </p:txBody>
+      </p:sp>
+      <p:sp>
+        <p:nvSpPr>
+          <p:cNvPr id="4" name="TextBox 3"/>
+          <p:cNvSpPr txBox="1"/>
+          <p:nvPr/>
+        </p:nvSpPr>
+        <p:spPr>
+          <a:xfrm>
+            <a:off x="411480" y="6327648"/>
+            <a:ext cx="10972800" cy="256032"/>
+          </a:xfrm>
+          <a:prstGeom prst="rect">
+            <a:avLst/>
+          </a:prstGeom>
+          <a:noFill/>
+        </p:spPr>
+        <p:txBody>
+          <a:bodyPr wrap="none">
+            <a:spAutoFit/>
+          </a:bodyPr>
+          <a:lstStyle/>
+          <a:p>
+            <a:pPr algn="r"/>
+            <a:r>
+              <a:rPr sz="900" b="1">
+                <a:solidFill>
+                  <a:srgbClr val="964630"/>
+                </a:solidFill>
+                <a:latin typeface="Aptos"/>
+              </a:rPr>
+              <a:t>CURRENT AUDIT NOTES • SELECTED SOURCES • NOVELTY UNRESOLVED</a:t>
+            </a:r>
+          </a:p>
+        </p:txBody>
+      </p:sp>
+    </p:spTree>
+  </p:cSld>
+  <p:clrMapOvr>
+    <a:masterClrMapping/>
+  </p:clrMapOvr>
+</p:sld>
+</file>
+
+<file path=ppt/slides/slide23.xml><?xml version="1.0" encoding="utf-8"?>
+<p:sld xmlns:a="http://schemas.openxmlformats.org/drawingml/2006/main" xmlns:p="http://schemas.openxmlformats.org/presentationml/2006/main" xmlns:r="http://schemas.openxmlformats.org/officeDocument/2006/relationships">
+  <p:cSld>
+    <p:spTree>
+      <p:nvGrpSpPr>
+        <p:cNvPr id="1" name=""/>
+        <p:cNvGrpSpPr/>
+        <p:nvPr/>
+      </p:nvGrpSpPr>
+      <p:grpSpPr/>
+      <p:sp>
+        <p:nvSpPr>
+          <p:cNvPr id="2" name="Title 1"/>
+          <p:cNvSpPr>
+            <a:spLocks noGrp="1"/>
+          </p:cNvSpPr>
+          <p:nvPr>
+            <p:ph type="title"/>
+          </p:nvPr>
+        </p:nvSpPr>
+        <p:spPr/>
+        <p:txBody>
+          <a:bodyPr/>
+          <a:lstStyle/>
+          <a:p>
+            <a:r>
+              <a:rPr sz="2500" b="1">
+                <a:solidFill>
+                  <a:srgbClr val="264741"/>
+                </a:solidFill>
+                <a:latin typeface="Aptos"/>
+              </a:rPr>
+              <a:t>Strong overlap ≠ exact experiment</a:t>
+            </a:r>
+          </a:p>
+        </p:txBody>
+      </p:sp>
+      <p:sp>
+        <p:nvSpPr>
+          <p:cNvPr id="3" name="Content Placeholder 2"/>
+          <p:cNvSpPr>
+            <a:spLocks noGrp="1"/>
+          </p:cNvSpPr>
+          <p:nvPr>
+            <p:ph idx="1"/>
+          </p:nvPr>
+        </p:nvSpPr>
+        <p:spPr/>
+        <p:txBody>
+          <a:bodyPr wrap="square"/>
+          <a:lstStyle/>
+          <a:p>
+            <a:pPr>
+              <a:spcAft>
+                <a:spcPts val="1300"/>
+              </a:spcAft>
+              <a:defRPr sz="1800">
+                <a:solidFill>
+                  <a:srgbClr val="233033"/>
+                </a:solidFill>
+                <a:latin typeface="Aptos"/>
+              </a:defRPr>
+            </a:pPr>
+            <a:r>
+              <a:rPr sz="1800" b="1">
+                <a:solidFill>
+                  <a:srgbClr val="264741"/>
+                </a:solidFill>
+                <a:latin typeface="Aptos"/>
+              </a:rPr>
+              <a:t>StateFuse / TOKI: </a:t>
+            </a:r>
+            <a:r>
+              <a:rPr sz="1700" b="0">
+                <a:solidFill>
+                  <a:srgbClr val="233033"/>
+                </a:solidFill>
+                <a:latin typeface="Aptos"/>
+              </a:rPr>
+              <a:t>Conflict-preserving replicated history, projection/abstention, provenance, time-aware policies and confirmation already appear.</a:t>
+            </a:r>
+          </a:p>
+          <a:p>
+            <a:pPr>
+              <a:spcAft>
+                <a:spcPts val="1300"/>
+              </a:spcAft>
+              <a:defRPr sz="1800">
+                <a:solidFill>
+                  <a:srgbClr val="233033"/>
+                </a:solidFill>
+                <a:latin typeface="Aptos"/>
+              </a:defRPr>
+            </a:pPr>
+            <a:r>
+              <a:rPr sz="1800" b="1">
+                <a:solidFill>
+                  <a:srgbClr val="264741"/>
+                </a:solidFill>
+                <a:latin typeface="Aptos"/>
+              </a:rPr>
+              <a:t>StateFuse caveat: </a:t>
+            </a:r>
+            <a:r>
+              <a:rPr sz="1700" b="0">
+                <a:solidFill>
+                  <a:srgbClr val="233033"/>
+                </a:solidFill>
+                <a:latin typeface="Aptos"/>
+              </a:rPr>
+              <a:t>Same 282-case slice: Table 3 says 64.9%; prose says 97.5%. Unresolved discrepancy; controlled-loop numeric table not recovered.</a:t>
+            </a:r>
+          </a:p>
+          <a:p>
+            <a:pPr>
+              <a:spcAft>
+                <a:spcPts val="1300"/>
+              </a:spcAft>
+              <a:defRPr sz="1800">
+                <a:solidFill>
+                  <a:srgbClr val="233033"/>
+                </a:solidFill>
+                <a:latin typeface="Aptos"/>
+              </a:defRPr>
+            </a:pPr>
+            <a:r>
+              <a:rPr sz="1800" b="1">
+                <a:solidFill>
+                  <a:srgbClr val="264741"/>
+                </a:solidFill>
+                <a:latin typeface="Aptos"/>
+              </a:rPr>
+              <a:t>SCF scope: </a:t>
+            </a:r>
+            <a:r>
+              <a:rPr sz="1700" b="0">
+                <a:solidFill>
+                  <a:srgbClr val="233033"/>
+                </a:solidFill>
+                <a:latin typeface="Aptos"/>
+              </a:rPr>
+              <a:t>600 simulated workflow runs; 27.9% precision / 65.2% recall / 39.0% F1 / 100% completion. Intent prevention ≠ claim convergence.</a:t>
+            </a:r>
+          </a:p>
+          <a:p>
+            <a:pPr>
+              <a:spcAft>
+                <a:spcPts val="1300"/>
+              </a:spcAft>
+              <a:defRPr sz="1800">
+                <a:solidFill>
+                  <a:srgbClr val="233033"/>
+                </a:solidFill>
+                <a:latin typeface="Aptos"/>
+              </a:defRPr>
+            </a:pPr>
+            <a:r>
+              <a:rPr sz="1800" b="1">
+                <a:solidFill>
+                  <a:srgbClr val="264741"/>
+                </a:solidFill>
+                <a:latin typeface="Aptos"/>
+              </a:rPr>
+              <a:t>Survey / code benchmark: </a:t>
+            </a:r>
+            <a:r>
+              <a:rPr sz="1700" b="0">
+                <a:solidFill>
+                  <a:srgbClr val="233033"/>
+                </a:solidFill>
+                <a:latin typeface="Aptos"/>
+              </a:rPr>
+              <a:t>Always-On: scoped 435-work survey, not exhaustive. CodeCRDT 5–10% = preliminary 60/600 manual sample.</a:t>
+            </a:r>
+          </a:p>
+        </p:txBody>
+      </p:sp>
+      <p:sp>
+        <p:nvSpPr>
+          <p:cNvPr id="4" name="TextBox 3"/>
+          <p:cNvSpPr txBox="1"/>
+          <p:nvPr/>
+        </p:nvSpPr>
+        <p:spPr>
+          <a:xfrm>
+            <a:off x="411480" y="6327648"/>
+            <a:ext cx="10972800" cy="256032"/>
+          </a:xfrm>
+          <a:prstGeom prst="rect">
+            <a:avLst/>
+          </a:prstGeom>
+          <a:noFill/>
+        </p:spPr>
+        <p:txBody>
+          <a:bodyPr wrap="none">
+            <a:spAutoFit/>
+          </a:bodyPr>
+          <a:lstStyle/>
+          <a:p>
+            <a:pPr algn="r"/>
+            <a:r>
+              <a:rPr sz="900" b="1">
+                <a:solidFill>
+                  <a:srgbClr val="964630"/>
+                </a:solidFill>
+                <a:latin typeface="Aptos"/>
+              </a:rPr>
+              <a:t>CURRENT AUDIT NOTES • SELECTED SOURCES • NOVELTY UNRESOLVED</a:t>
+            </a:r>
+          </a:p>
+        </p:txBody>
+      </p:sp>
+    </p:spTree>
+  </p:cSld>
+  <p:clrMapOvr>
+    <a:masterClrMapping/>
+  </p:clrMapOvr>
+</p:sld>
+</file>
+
+<file path=ppt/slides/slide24.xml><?xml version="1.0" encoding="utf-8"?>
+<p:sld xmlns:a="http://schemas.openxmlformats.org/drawingml/2006/main" xmlns:p="http://schemas.openxmlformats.org/presentationml/2006/main" xmlns:r="http://schemas.openxmlformats.org/officeDocument/2006/relationships">
+  <p:cSld>
+    <p:spTree>
+      <p:nvGrpSpPr>
+        <p:cNvPr id="1" name=""/>
+        <p:cNvGrpSpPr/>
+        <p:nvPr/>
+      </p:nvGrpSpPr>
+      <p:grpSpPr/>
+      <p:sp>
+        <p:nvSpPr>
+          <p:cNvPr id="2" name="Title 1"/>
+          <p:cNvSpPr>
+            <a:spLocks noGrp="1"/>
+          </p:cNvSpPr>
+          <p:nvPr>
+            <p:ph type="title"/>
+          </p:nvPr>
+        </p:nvSpPr>
+        <p:spPr/>
+        <p:txBody>
+          <a:bodyPr/>
+          <a:lstStyle/>
+          <a:p>
+            <a:r>
+              <a:rPr sz="2500" b="1">
+                <a:solidFill>
+                  <a:srgbClr val="264741"/>
+                </a:solidFill>
+                <a:latin typeface="Aptos"/>
+              </a:rPr>
+              <a:t>Verification needs context</a:t>
+            </a:r>
+          </a:p>
+        </p:txBody>
+      </p:sp>
+      <p:sp>
+        <p:nvSpPr>
+          <p:cNvPr id="3" name="Content Placeholder 2"/>
+          <p:cNvSpPr>
+            <a:spLocks noGrp="1"/>
+          </p:cNvSpPr>
+          <p:nvPr>
+            <p:ph idx="1"/>
+          </p:nvPr>
+        </p:nvSpPr>
+        <p:spPr/>
+        <p:txBody>
+          <a:bodyPr wrap="square"/>
+          <a:lstStyle/>
+          <a:p>
+            <a:pPr>
+              <a:spcAft>
+                <a:spcPts val="1300"/>
+              </a:spcAft>
+              <a:defRPr sz="1800">
+                <a:solidFill>
+                  <a:srgbClr val="233033"/>
+                </a:solidFill>
+                <a:latin typeface="Aptos"/>
+              </a:defRPr>
+            </a:pPr>
+            <a:r>
+              <a:rPr sz="1800" b="1">
+                <a:solidFill>
+                  <a:srgbClr val="264741"/>
+                </a:solidFill>
+                <a:latin typeface="Aptos"/>
+              </a:rPr>
+              <a:t>Evidence-pair errors: </a:t>
+            </a:r>
+            <a:r>
+              <a:rPr sz="1700" b="0">
+                <a:solidFill>
+                  <a:srgbClr val="233033"/>
+                </a:solidFill>
+                <a:latin typeface="Aptos"/>
+              </a:rPr>
+              <a:t>ECon: weak-model recall limits; resolution may be unjustified or prior-informed.</a:t>
+            </a:r>
+          </a:p>
+          <a:p>
+            <a:pPr>
+              <a:spcAft>
+                <a:spcPts val="1300"/>
+              </a:spcAft>
+              <a:defRPr sz="1800">
+                <a:solidFill>
+                  <a:srgbClr val="233033"/>
+                </a:solidFill>
+                <a:latin typeface="Aptos"/>
+              </a:defRPr>
+            </a:pPr>
+            <a:r>
+              <a:rPr sz="1800" b="1">
+                <a:solidFill>
+                  <a:srgbClr val="264741"/>
+                </a:solidFill>
+                <a:latin typeface="Aptos"/>
+              </a:rPr>
+              <a:t>Reference mismatch: </a:t>
+            </a:r>
+            <a:r>
+              <a:rPr sz="1700" b="0">
+                <a:solidFill>
+                  <a:srgbClr val="233033"/>
+                </a:solidFill>
+                <a:latin typeface="Aptos"/>
+              </a:rPr>
+              <a:t>REF-NLI: 1,143 claim/evidence pairs, including ambiguous reference/context cases.</a:t>
+            </a:r>
+          </a:p>
+          <a:p>
+            <a:pPr>
+              <a:spcAft>
+                <a:spcPts val="1300"/>
+              </a:spcAft>
+              <a:defRPr sz="1800">
+                <a:solidFill>
+                  <a:srgbClr val="233033"/>
+                </a:solidFill>
+                <a:latin typeface="Aptos"/>
+              </a:defRPr>
+            </a:pPr>
+            <a:r>
+              <a:rPr sz="1800" b="1">
+                <a:solidFill>
+                  <a:srgbClr val="264741"/>
+                </a:solidFill>
+                <a:latin typeface="Aptos"/>
+              </a:rPr>
+              <a:t>Adversarial NLI: </a:t>
+            </a:r>
+            <a:r>
+              <a:rPr sz="1700" b="0">
+                <a:solidFill>
+                  <a:srgbClr val="233033"/>
+                </a:solidFill>
+                <a:latin typeface="Aptos"/>
+              </a:rPr>
+              <a:t>ANLI v2: ~19k / 47k / 103k examples; dev/test checked, training not fully verified.</a:t>
+            </a:r>
+          </a:p>
+          <a:p>
+            <a:pPr>
+              <a:spcAft>
+                <a:spcPts val="1300"/>
+              </a:spcAft>
+              <a:defRPr sz="1800">
+                <a:solidFill>
+                  <a:srgbClr val="233033"/>
+                </a:solidFill>
+                <a:latin typeface="Aptos"/>
+              </a:defRPr>
+            </a:pPr>
+            <a:r>
+              <a:rPr sz="1800" b="1">
+                <a:solidFill>
+                  <a:srgbClr val="264741"/>
+                </a:solidFill>
+                <a:latin typeface="Aptos"/>
+              </a:rPr>
+              <a:t>Abstention is not verification: </a:t>
+            </a:r>
+            <a:r>
+              <a:rPr sz="1700" b="0">
+                <a:solidFill>
+                  <a:srgbClr val="233033"/>
+                </a:solidFill>
+                <a:latin typeface="Aptos"/>
+              </a:rPr>
+              <a:t>Varshney et al. (17 datasets): no method consistently beats MaxProb across IID/OOD/ADV.</a:t>
+            </a:r>
+          </a:p>
+        </p:txBody>
+      </p:sp>
+      <p:sp>
+        <p:nvSpPr>
+          <p:cNvPr id="4" name="TextBox 3"/>
+          <p:cNvSpPr txBox="1"/>
+          <p:nvPr/>
+        </p:nvSpPr>
+        <p:spPr>
+          <a:xfrm>
+            <a:off x="411480" y="6327648"/>
+            <a:ext cx="10972800" cy="256032"/>
+          </a:xfrm>
+          <a:prstGeom prst="rect">
+            <a:avLst/>
+          </a:prstGeom>
+          <a:noFill/>
+        </p:spPr>
+        <p:txBody>
+          <a:bodyPr wrap="none">
+            <a:spAutoFit/>
+          </a:bodyPr>
+          <a:lstStyle/>
+          <a:p>
+            <a:pPr algn="r"/>
+            <a:r>
+              <a:rPr sz="900" b="1">
+                <a:solidFill>
+                  <a:srgbClr val="964630"/>
+                </a:solidFill>
+                <a:latin typeface="Aptos"/>
+              </a:rPr>
+              <a:t>CURRENT AUDIT NOTES • SELECTED SOURCES • NOVELTY UNRESOLVED</a:t>
+            </a:r>
+          </a:p>
+        </p:txBody>
+      </p:sp>
+    </p:spTree>
+  </p:cSld>
+  <p:clrMapOvr>
+    <a:masterClrMapping/>
+  </p:clrMapOvr>
+</p:sld>
+</file>
+
+<file path=ppt/slides/slide25.xml><?xml version="1.0" encoding="utf-8"?>
+<p:sld xmlns:a="http://schemas.openxmlformats.org/drawingml/2006/main" xmlns:p="http://schemas.openxmlformats.org/presentationml/2006/main" xmlns:r="http://schemas.openxmlformats.org/officeDocument/2006/relationships">
+  <p:cSld>
+    <p:spTree>
+      <p:nvGrpSpPr>
+        <p:cNvPr id="1" name=""/>
+        <p:cNvGrpSpPr/>
+        <p:nvPr/>
+      </p:nvGrpSpPr>
+      <p:grpSpPr/>
+      <p:sp>
+        <p:nvSpPr>
+          <p:cNvPr id="2" name="Title 1"/>
+          <p:cNvSpPr>
+            <a:spLocks noGrp="1"/>
+          </p:cNvSpPr>
+          <p:nvPr>
+            <p:ph type="title"/>
+          </p:nvPr>
+        </p:nvSpPr>
+        <p:spPr/>
+        <p:txBody>
+          <a:bodyPr/>
+          <a:lstStyle/>
+          <a:p>
+            <a:r>
+              <a:rPr sz="2500" b="1">
+                <a:solidFill>
+                  <a:srgbClr val="264741"/>
+                </a:solidFill>
+                <a:latin typeface="Aptos"/>
+              </a:rPr>
+              <a:t>Gate stays open • no novelty verdict</a:t>
+            </a:r>
+          </a:p>
+        </p:txBody>
+      </p:sp>
+      <p:sp>
+        <p:nvSpPr>
+          <p:cNvPr id="3" name="Content Placeholder 2"/>
+          <p:cNvSpPr>
+            <a:spLocks noGrp="1"/>
+          </p:cNvSpPr>
+          <p:nvPr>
+            <p:ph idx="1"/>
+          </p:nvPr>
+        </p:nvSpPr>
+        <p:spPr/>
+        <p:txBody>
+          <a:bodyPr wrap="square"/>
+          <a:lstStyle/>
+          <a:p>
+            <a:pPr>
+              <a:spcAft>
+                <a:spcPts val="1300"/>
+              </a:spcAft>
+              <a:defRPr sz="1800">
+                <a:solidFill>
+                  <a:srgbClr val="233033"/>
+                </a:solidFill>
+                <a:latin typeface="Aptos"/>
+              </a:defRPr>
+            </a:pPr>
+            <a:r>
+              <a:rPr sz="1800" b="1">
+                <a:solidFill>
+                  <a:srgbClr val="264741"/>
+                </a:solidFill>
+                <a:latin typeface="Aptos"/>
+              </a:rPr>
+              <a:t>Broad novelty is unsafe: </a:t>
+            </a:r>
+            <a:r>
+              <a:rPr sz="1700" b="0">
+                <a:solidFill>
+                  <a:srgbClr val="233033"/>
+                </a:solidFill>
+                <a:latin typeface="Aptos"/>
+              </a:rPr>
+              <a:t>Classification, evidence-aware handling, defer/abstain, conflict preservation and async supersession each have close prior art.</a:t>
+            </a:r>
+          </a:p>
+          <a:p>
+            <a:pPr>
+              <a:spcAft>
+                <a:spcPts val="1300"/>
+              </a:spcAft>
+              <a:defRPr sz="1800">
+                <a:solidFill>
+                  <a:srgbClr val="233033"/>
+                </a:solidFill>
+                <a:latin typeface="Aptos"/>
+              </a:defRPr>
+            </a:pPr>
+            <a:r>
+              <a:rPr sz="1800" b="1">
+                <a:solidFill>
+                  <a:srgbClr val="264741"/>
+                </a:solidFill>
+                <a:latin typeface="Aptos"/>
+              </a:rPr>
+              <a:t>Candidate comparison remains untested: </a:t>
+            </a:r>
+            <a:r>
+              <a:rPr sz="1700" b="0">
+                <a:solidFill>
+                  <a:srgbClr val="233033"/>
+                </a:solidFill>
+                <a:latin typeface="Aptos"/>
+              </a:rPr>
+              <a:t>Same-key relation + evidence-based Verify vs fixed-winner vs preserve-unresolved under async reordering, with defined convergence outputs.</a:t>
+            </a:r>
+          </a:p>
+          <a:p>
+            <a:pPr>
+              <a:spcAft>
+                <a:spcPts val="1300"/>
+              </a:spcAft>
+              <a:defRPr sz="1800">
+                <a:solidFill>
+                  <a:srgbClr val="233033"/>
+                </a:solidFill>
+                <a:latin typeface="Aptos"/>
+              </a:defRPr>
+            </a:pPr>
+            <a:r>
+              <a:rPr sz="1800" b="1">
+                <a:solidFill>
+                  <a:srgbClr val="264741"/>
+                </a:solidFill>
+                <a:latin typeface="Aptos"/>
+              </a:rPr>
+              <a:t>WH-1/2/3: </a:t>
+            </a:r>
+            <a:r>
+              <a:rPr sz="1700" b="0">
+                <a:solidFill>
+                  <a:srgbClr val="233033"/>
+                </a:solidFill>
+                <a:latin typeface="Aptos"/>
+              </a:rPr>
+              <a:t>Exact authoritative definitions are missing; leave undefined and obtain the source wording.</a:t>
+            </a:r>
+          </a:p>
+          <a:p>
+            <a:pPr>
+              <a:spcAft>
+                <a:spcPts val="1300"/>
+              </a:spcAft>
+              <a:defRPr sz="1800">
+                <a:solidFill>
+                  <a:srgbClr val="233033"/>
+                </a:solidFill>
+                <a:latin typeface="Aptos"/>
+              </a:defRPr>
+            </a:pPr>
+            <a:r>
+              <a:rPr sz="1800" b="1">
+                <a:solidFill>
+                  <a:srgbClr val="264741"/>
+                </a:solidFill>
+                <a:latin typeface="Aptos"/>
+              </a:rPr>
+              <a:t>Scope of this appendix: </a:t>
+            </a:r>
+            <a:r>
+              <a:rPr sz="1700" b="0">
+                <a:solidFill>
+                  <a:srgbClr val="233033"/>
+                </a:solidFill>
+                <a:latin typeface="Aptos"/>
+              </a:rPr>
+              <a:t>Targeted excerpts, not full source/appendix audits or independent reproduction. Pack remains provisional; no implementation or convergence proof claimed.</a:t>
+            </a:r>
+          </a:p>
+        </p:txBody>
+      </p:sp>
+      <p:sp>
+        <p:nvSpPr>
+          <p:cNvPr id="4" name="TextBox 3"/>
+          <p:cNvSpPr txBox="1"/>
+          <p:nvPr/>
+        </p:nvSpPr>
+        <p:spPr>
+          <a:xfrm>
+            <a:off x="411480" y="6327648"/>
+            <a:ext cx="10972800" cy="256032"/>
+          </a:xfrm>
+          <a:prstGeom prst="rect">
+            <a:avLst/>
+          </a:prstGeom>
+          <a:noFill/>
+        </p:spPr>
+        <p:txBody>
+          <a:bodyPr wrap="none">
+            <a:spAutoFit/>
+          </a:bodyPr>
+          <a:lstStyle/>
+          <a:p>
+            <a:pPr algn="r"/>
+            <a:r>
+              <a:rPr sz="900" b="1">
+                <a:solidFill>
+                  <a:srgbClr val="964630"/>
+                </a:solidFill>
+                <a:latin typeface="Aptos"/>
+              </a:rPr>
+              <a:t>CURRENT AUDIT NOTES • SELECTED SOURCES • NOVELTY UNRESOLVED</a:t>
             </a:r>
           </a:p>
         </p:txBody>

--- a/docs/review-pack/AVA_Evaluation_Review_Slides.pptx
+++ b/docs/review-pack/AVA_Evaluation_Review_Slides.pptx
@@ -19771,7 +19771,7 @@
                 </a:solidFill>
                 <a:latin typeface="Aptos"/>
               </a:rPr>
-              <a:t>Same 282-case slice: Table 3 says 64.9%; prose says 97.5%. Unresolved discrepancy; controlled-loop numeric table not recovered.</a:t>
+              <a:t>Table 3 separates settings: conservative 64.9% accuracy / 100% conflict recall; aggressive 97.5% / 0% recall. Separate controlled 50-task loop: conservative 80%→100% after verification; not an async-convergence test.</a:t>
             </a:r>
           </a:p>
           <a:p>

--- a/docs/review-pack/AVA_Evaluation_Review_Slides.pptx
+++ b/docs/review-pack/AVA_Evaluation_Review_Slides.pptx
@@ -19771,7 +19771,7 @@
                 </a:solidFill>
                 <a:latin typeface="Aptos"/>
               </a:rPr>
-              <a:t>Table 3 separates settings: conservative 64.9% accuracy / 100% conflict recall; aggressive 97.5% / 0% recall. Separate controlled 50-task loop: conservative 80%→100% after verification; not an async-convergence test.</a:t>
+              <a:t>Table 3 (282): conservative 64.9% accuracy / recall 100% / false-certainty 2.1%; aggressive 97.5% / 100% / 2.5%. Table 4 (50): success 80%→100%, false-certainty 20%→0%, 2.4 calls, 0 cost; controlled, not async convergence.</a:t>
             </a:r>
           </a:p>
           <a:p>

--- a/docs/review-pack/AVA_Evaluation_Review_Slides.pptx
+++ b/docs/review-pack/AVA_Evaluation_Review_Slides.pptx
@@ -8663,7 +8663,7 @@
               </a:defRPr>
             </a:pPr>
             <a:r>
-              <a:t>Interpretation: substantial overlap exists; novelty remains unresolved pending full source-wide verification.</a:t>
+              <a:t>Five required papers now have source-wide primary-text audits; wider comparison and the novelty gate remain open.</a:t>
             </a:r>
           </a:p>
         </p:txBody>
@@ -11159,7 +11159,7 @@
               </a:defRPr>
             </a:pPr>
             <a:r>
-              <a:t>full texts, appendices, active disconfirmation</a:t>
+              <a:t>integrate five source-wide audits; finish residual checks</a:t>
             </a:r>
           </a:p>
         </p:txBody>
@@ -19428,7 +19428,7 @@
                 </a:solidFill>
                 <a:latin typeface="Aptos"/>
               </a:rPr>
-              <a:t>CURRENT AUDIT NOTES • SELECTED SOURCES • NOVELTY UNRESOLVED</a:t>
+              <a:t>FIVE REQUIRED SOURCE-WIDE AUDITS • WIDER GATE OPEN • NOVELTY UNRESOLVED</a:t>
             </a:r>
           </a:p>
         </p:txBody>
@@ -19648,7 +19648,7 @@
                 </a:solidFill>
                 <a:latin typeface="Aptos"/>
               </a:rPr>
-              <a:t>CURRENT AUDIT NOTES • SELECTED SOURCES • NOVELTY UNRESOLVED</a:t>
+              <a:t>FIVE REQUIRED SOURCE-WIDE AUDITS • WIDER GATE OPEN • NOVELTY UNRESOLVED</a:t>
             </a:r>
           </a:p>
         </p:txBody>
@@ -19771,7 +19771,7 @@
                 </a:solidFill>
                 <a:latin typeface="Aptos"/>
               </a:rPr>
-              <a:t>Table 3 (282): conservative 64.9% accuracy / recall 100% / false-certainty 2.1%; aggressive 97.5% / 100% / 2.5%. Table 4 (50): success 80%→100%, false-certainty 20%→0%, 2.4 calls, 0 cost; controlled, not async convergence.</a:t>
+              <a:t>Table 3 (282): conservative 64.9% accuracy / recall 100% / false-certainty 2.1%; aggressive 97.5% / 100% / 2.5%. Table 4 (50): conservative StateFuse and flat go 80%→100%; collapsed 40%→60% with 40% post-Verify false confidence. Controlled, not async convergence.</a:t>
             </a:r>
           </a:p>
           <a:p>
@@ -19868,7 +19868,7 @@
                 </a:solidFill>
                 <a:latin typeface="Aptos"/>
               </a:rPr>
-              <a:t>CURRENT AUDIT NOTES • SELECTED SOURCES • NOVELTY UNRESOLVED</a:t>
+              <a:t>FIVE REQUIRED SOURCE-WIDE AUDITS • WIDER GATE OPEN • NOVELTY UNRESOLVED</a:t>
             </a:r>
           </a:p>
         </p:txBody>
@@ -20022,7 +20022,7 @@
                 </a:solidFill>
                 <a:latin typeface="Aptos"/>
               </a:rPr>
-              <a:t>ANLI v2: ~19k / 47k / 103k examples; dev/test checked, training not fully verified.</a:t>
+              <a:t>ANLI v2: full main text checked; no appendix identified; not an AVA state-conflict dataset.</a:t>
             </a:r>
           </a:p>
           <a:p>
@@ -20088,7 +20088,7 @@
                 </a:solidFill>
                 <a:latin typeface="Aptos"/>
               </a:rPr>
-              <a:t>CURRENT AUDIT NOTES • SELECTED SOURCES • NOVELTY UNRESOLVED</a:t>
+              <a:t>FIVE REQUIRED SOURCE-WIDE AUDITS • WIDER GATE OPEN • NOVELTY UNRESOLVED</a:t>
             </a:r>
           </a:p>
         </p:txBody>
@@ -20273,7 +20273,7 @@
                 </a:solidFill>
                 <a:latin typeface="Aptos"/>
               </a:rPr>
-              <a:t>Targeted excerpts, not full source/appendix audits or independent reproduction. Pack remains provisional; no implementation or convergence proof claimed.</a:t>
+              <a:t>Five required papers have source-wide primary-text audits; wider checks, level-P review and missing artifacts remain. No independent reproduction, implementation or convergence proof is claimed.</a:t>
             </a:r>
           </a:p>
         </p:txBody>
@@ -20308,7 +20308,7 @@
                 </a:solidFill>
                 <a:latin typeface="Aptos"/>
               </a:rPr>
-              <a:t>CURRENT AUDIT NOTES • SELECTED SOURCES • NOVELTY UNRESOLVED</a:t>
+              <a:t>FIVE REQUIRED SOURCE-WIDE AUDITS • WIDER GATE OPEN • NOVELTY UNRESOLVED</a:t>
             </a:r>
           </a:p>
         </p:txBody>
